--- a/courses/research-in-finance/lectures/lecture-02-data-handling/slides.pptx
+++ b/courses/research-in-finance/lectures/lecture-02-data-handling/slides.pptx
@@ -34,6 +34,7 @@
     <p:sldId id="282" r:id="rId28"/>
     <p:sldId id="283" r:id="rId29"/>
     <p:sldId id="284" r:id="rId30"/>
+    <p:sldId id="285" r:id="rId31"/>
   </p:sldIdLst>
   <p:sldSz cx="9144000" cy="5143500" type="screen16x9"/>
   <p:notesSz cx="6858000" cy="9144000"/>
@@ -13473,42 +13474,24 @@
             <a:pPr lvl="0"/>
             <a:r>
               <a:rPr/>
-              <a:t>Posit (2022). </a:t>
-            </a:r>
-            <a:r>
-              <a:rPr i="1"/>
-              <a:t>ggplot2 cheat sheet</a:t>
-            </a:r>
+              <a:t>Posit (2022) — quick-reference for the ggplot2 grammar.</a:t>
+            </a:r>
+          </a:p>
+          <a:p>
+            <a:pPr lvl="0"/>
             <a:r>
               <a:rPr/>
-              <a:t>. </a:t>
+              <a:t>Wickham, Navarro, and Pedersen (2024) — comprehensive ggplot2 reference, free draft at </a:t>
             </a:r>
             <a:r>
               <a:rPr>
                 <a:hlinkClick r:id="rId2"/>
               </a:rPr>
-              <a:t>https://posit.co/wp-content/uploads/2022/10/data-visualization-1.pdf</a:t>
-            </a:r>
-          </a:p>
-          <a:p>
-            <a:pPr lvl="0"/>
+              <a:t>https://ggplot2-book.org/</a:t>
+            </a:r>
             <a:r>
               <a:rPr/>
-              <a:t>Wickham, H., Navarro, D., Pedersen, T. L. (2024 draft). </a:t>
-            </a:r>
-            <a:r>
-              <a:rPr i="1"/>
-              <a:t>ggplot2: Elegant Graphics for Data Analysis</a:t>
-            </a:r>
-            <a:r>
-              <a:rPr/>
-              <a:t> (3rd ed.). Online draft: </a:t>
-            </a:r>
-            <a:r>
-              <a:rPr>
-                <a:hlinkClick r:id="rId3"/>
-              </a:rPr>
-              <a:t>https://ggplot2-book.org/</a:t>
+              <a:t>.</a:t>
             </a:r>
           </a:p>
           <a:p>
@@ -13522,63 +13505,29 @@
             <a:pPr lvl="0"/>
             <a:r>
               <a:rPr/>
-              <a:t>Lamport, L. (1994). </a:t>
+              <a:t>Lamport (1994) — Leslie Lamport’s classic LaTeX manual.</a:t>
+            </a:r>
+          </a:p>
+          <a:p>
+            <a:pPr lvl="0"/>
+            <a:r>
+              <a:rPr/>
+              <a:t>Flynn (2019) — </a:t>
             </a:r>
             <a:r>
               <a:rPr i="1"/>
-              <a:t>LaTeX: A Document Preparation System</a:t>
+              <a:t>lshort</a:t>
             </a:r>
             <a:r>
               <a:rPr/>
-              <a:t> (2nd ed.). Addison-Wesley. Updated examples: </a:t>
-            </a:r>
-            <a:r>
-              <a:rPr>
-                <a:hlinkClick r:id="rId4"/>
-              </a:rPr>
-              <a:t>https://www.latex-project.org/help/documentation/</a:t>
+              <a:t>, a beginner-friendly free LaTeX intro.</a:t>
             </a:r>
           </a:p>
           <a:p>
             <a:pPr lvl="0"/>
             <a:r>
               <a:rPr/>
-              <a:t>Flynn, P. (2019). </a:t>
-            </a:r>
-            <a:r>
-              <a:rPr i="1"/>
-              <a:t>Formatting Information: Introduction to LaTeX</a:t>
-            </a:r>
-            <a:r>
-              <a:rPr/>
-              <a:t> (5th ed.). TUG. </a:t>
-            </a:r>
-            <a:r>
-              <a:rPr>
-                <a:hlinkClick r:id="rId5"/>
-              </a:rPr>
-              <a:t>https://www.ctan.org/tex-archive/info/lshort/english/lshort.pdf</a:t>
-            </a:r>
-          </a:p>
-          <a:p>
-            <a:pPr lvl="0"/>
-            <a:r>
-              <a:rPr/>
-              <a:t>Overleaf Team (2023). </a:t>
-            </a:r>
-            <a:r>
-              <a:rPr i="1"/>
-              <a:t>Overleaf tutorial: Basic guide to LaTeX</a:t>
-            </a:r>
-            <a:r>
-              <a:rPr/>
-              <a:t>. </a:t>
-            </a:r>
-            <a:r>
-              <a:rPr>
-                <a:hlinkClick r:id="rId6"/>
-              </a:rPr>
-              <a:t>https://www.overleaf.com/learn/latex/Learn_LaTeX_in_30_minutes</a:t>
+              <a:t>Overleaf (2023) — Overleaf’s hands-on 30-minute LaTeX tutorial.</a:t>
             </a:r>
           </a:p>
         </p:txBody>
@@ -14469,6 +14418,180 @@
 </p:sld>
 </file>
 
+<file path=ppt/slides/slide30.xml><?xml version="1.0" encoding="utf-8"?>
+<p:sld xmlns:a="http://schemas.openxmlformats.org/drawingml/2006/main" xmlns:r="http://schemas.openxmlformats.org/officeDocument/2006/relationships" xmlns:p="http://schemas.openxmlformats.org/presentationml/2006/main">
+  <p:cSld>
+    <p:spTree>
+      <p:nvGrpSpPr>
+        <p:cNvPr id="1" name=""/>
+        <p:cNvGrpSpPr/>
+        <p:nvPr/>
+      </p:nvGrpSpPr>
+      <p:grpSpPr>
+        <a:xfrm>
+          <a:off x="0" y="0"/>
+          <a:ext cx="0" cy="0"/>
+          <a:chOff x="0" y="0"/>
+          <a:chExt cx="0" cy="0"/>
+        </a:xfrm>
+      </p:grpSpPr>
+      <p:sp>
+        <p:nvSpPr>
+          <p:cNvPr id="2" name="Title 1"/>
+          <p:cNvSpPr>
+            <a:spLocks noGrp="1"/>
+          </p:cNvSpPr>
+          <p:nvPr>
+            <p:ph type="title"/>
+          </p:nvPr>
+        </p:nvSpPr>
+        <p:spPr/>
+        <p:txBody>
+          <a:bodyPr/>
+          <a:lstStyle/>
+          <a:p>
+            <a:pPr lvl="0" indent="0" marL="0">
+              <a:buNone/>
+            </a:pPr>
+            <a:r>
+              <a:rPr/>
+              <a:t>References</a:t>
+            </a:r>
+          </a:p>
+        </p:txBody>
+      </p:sp>
+      <p:sp>
+        <p:nvSpPr>
+          <p:cNvPr id="3" name="Content Placeholder 2"/>
+          <p:cNvSpPr>
+            <a:spLocks noGrp="1"/>
+          </p:cNvSpPr>
+          <p:nvPr>
+            <p:ph idx="1"/>
+          </p:nvPr>
+        </p:nvSpPr>
+        <p:spPr/>
+        <p:txBody>
+          <a:bodyPr/>
+          <a:lstStyle/>
+          <a:p>
+            <a:pPr lvl="0" indent="0" marL="0">
+              <a:buNone/>
+            </a:pPr>
+            <a:r>
+              <a:rPr/>
+              <a:t>Flynn, Peter. 2019. “Formatting Information: Introduction to LaTeX.” TeX Users Group (TUG). </a:t>
+            </a:r>
+            <a:r>
+              <a:rPr>
+                <a:hlinkClick r:id="rId2"/>
+              </a:rPr>
+              <a:t>https://www.ctan.org/tex-archive/info/lshort/english/lshort.pdf</a:t>
+            </a:r>
+            <a:r>
+              <a:rPr/>
+              <a:t>.</a:t>
+            </a:r>
+          </a:p>
+          <a:p>
+            <a:pPr lvl="0" indent="0" marL="0">
+              <a:buNone/>
+            </a:pPr>
+            <a:r>
+              <a:rPr/>
+              <a:t>Lamport, Leslie. 1994. </a:t>
+            </a:r>
+            <a:r>
+              <a:rPr i="1"/>
+              <a:t>LaTeX: A Document Preparation System</a:t>
+            </a:r>
+            <a:r>
+              <a:rPr/>
+              <a:t>. 2nd ed. Reading, MA: Addison-Wesley. </a:t>
+            </a:r>
+            <a:r>
+              <a:rPr>
+                <a:hlinkClick r:id="rId3"/>
+              </a:rPr>
+              <a:t>https://www.latex-project.org/help/documentation/</a:t>
+            </a:r>
+            <a:r>
+              <a:rPr/>
+              <a:t>.</a:t>
+            </a:r>
+          </a:p>
+          <a:p>
+            <a:pPr lvl="0" indent="0" marL="0">
+              <a:buNone/>
+            </a:pPr>
+            <a:r>
+              <a:rPr/>
+              <a:t>Overleaf. 2023. “Overleaf Tutorial: Basic Guide to LaTeX.” </a:t>
+            </a:r>
+            <a:r>
+              <a:rPr>
+                <a:hlinkClick r:id="rId4"/>
+              </a:rPr>
+              <a:t>https://www.overleaf.com/learn/latex/Learn_LaTeX_in_30_minutes</a:t>
+            </a:r>
+            <a:r>
+              <a:rPr/>
+              <a:t>.</a:t>
+            </a:r>
+          </a:p>
+          <a:p>
+            <a:pPr lvl="0" indent="0" marL="0">
+              <a:buNone/>
+            </a:pPr>
+            <a:r>
+              <a:rPr/>
+              <a:t>Posit. 2022. “Ggplot2 Cheat Sheet.” </a:t>
+            </a:r>
+            <a:r>
+              <a:rPr>
+                <a:hlinkClick r:id="rId5"/>
+              </a:rPr>
+              <a:t>https://posit.co/wp-content/uploads/2022/10/data-visualization-1.pdf</a:t>
+            </a:r>
+            <a:r>
+              <a:rPr/>
+              <a:t>.</a:t>
+            </a:r>
+          </a:p>
+          <a:p>
+            <a:pPr lvl="0" indent="0" marL="0">
+              <a:buNone/>
+            </a:pPr>
+            <a:r>
+              <a:rPr/>
+              <a:t>Wickham, Hadley, Danielle Navarro, and Thomas Lin Pedersen. 2024. </a:t>
+            </a:r>
+            <a:r>
+              <a:rPr i="1"/>
+              <a:t>Ggplot2: Elegant Graphics for Data Analysis</a:t>
+            </a:r>
+            <a:r>
+              <a:rPr/>
+              <a:t>. 3rd ed. </a:t>
+            </a:r>
+            <a:r>
+              <a:rPr>
+                <a:hlinkClick r:id="rId6"/>
+              </a:rPr>
+              <a:t>https://ggplot2-book.org/</a:t>
+            </a:r>
+            <a:r>
+              <a:rPr/>
+              <a:t>.</a:t>
+            </a:r>
+          </a:p>
+        </p:txBody>
+      </p:sp>
+    </p:spTree>
+  </p:cSld>
+</p:sld>
+</file>
+
 <file path=ppt/slides/slide4.xml><?xml version="1.0" encoding="utf-8"?>
 <p:sld xmlns:a="http://schemas.openxmlformats.org/drawingml/2006/main" xmlns:r="http://schemas.openxmlformats.org/officeDocument/2006/relationships" xmlns:p="http://schemas.openxmlformats.org/presentationml/2006/main">
   <p:cSld>

--- a/courses/research-in-finance/lectures/lecture-02-data-handling/slides.pptx
+++ b/courses/research-in-finance/lectures/lecture-02-data-handling/slides.pptx
@@ -4,39 +4,7 @@
   <p:sldMasterIdLst>
     <p:sldMasterId id="2147483648" r:id="rId1"/>
   </p:sldMasterIdLst>
-  <p:sldIdLst>
-    <p:sldId id="256" r:id="rId2"/>
-    <p:sldId id="257" r:id="rId3"/>
-    <p:sldId id="258" r:id="rId4"/>
-    <p:sldId id="259" r:id="rId5"/>
-    <p:sldId id="260" r:id="rId6"/>
-    <p:sldId id="261" r:id="rId7"/>
-    <p:sldId id="262" r:id="rId8"/>
-    <p:sldId id="263" r:id="rId9"/>
-    <p:sldId id="264" r:id="rId10"/>
-    <p:sldId id="265" r:id="rId11"/>
-    <p:sldId id="266" r:id="rId12"/>
-    <p:sldId id="267" r:id="rId13"/>
-    <p:sldId id="268" r:id="rId14"/>
-    <p:sldId id="269" r:id="rId15"/>
-    <p:sldId id="270" r:id="rId16"/>
-    <p:sldId id="271" r:id="rId17"/>
-    <p:sldId id="272" r:id="rId18"/>
-    <p:sldId id="273" r:id="rId19"/>
-    <p:sldId id="274" r:id="rId20"/>
-    <p:sldId id="275" r:id="rId21"/>
-    <p:sldId id="276" r:id="rId22"/>
-    <p:sldId id="277" r:id="rId23"/>
-    <p:sldId id="278" r:id="rId24"/>
-    <p:sldId id="279" r:id="rId25"/>
-    <p:sldId id="280" r:id="rId26"/>
-    <p:sldId id="281" r:id="rId27"/>
-    <p:sldId id="282" r:id="rId28"/>
-    <p:sldId id="283" r:id="rId29"/>
-    <p:sldId id="284" r:id="rId30"/>
-    <p:sldId id="285" r:id="rId31"/>
-  </p:sldIdLst>
-  <p:sldSz cx="9144000" cy="5143500" type="screen16x9"/>
+  <p:sldSz cx="12191695" cy="6858000" type="screen4x3"/>
   <p:notesSz cx="6858000" cy="9144000"/>
   <p:defaultTextStyle>
     <a:defPPr>
@@ -133,22 +101,6 @@
       </a:defRPr>
     </a:lvl9pPr>
   </p:defaultTextStyle>
-  <p:extLst>
-    <p:ext uri="{EFAFB233-063F-42B5-8137-9DF3F51BA10A}">
-      <p15:sldGuideLst xmlns:p15="http://schemas.microsoft.com/office/powerpoint/2012/main">
-        <p15:guide id="1" orient="horz" pos="1620" userDrawn="1">
-          <p15:clr>
-            <a:srgbClr val="A4A3A4"/>
-          </p15:clr>
-        </p15:guide>
-        <p15:guide id="2" pos="2880" userDrawn="1">
-          <p15:clr>
-            <a:srgbClr val="A4A3A4"/>
-          </p15:clr>
-        </p15:guide>
-      </p15:sldGuideLst>
-    </p:ext>
-  </p:extLst>
 </p:presentation>
 </file>
 
@@ -181,8 +133,8 @@
         </p:nvSpPr>
         <p:spPr>
           <a:xfrm>
-            <a:off x="685800" y="1597819"/>
-            <a:ext cx="7772400" cy="1102519"/>
+            <a:off x="685800" y="2130425"/>
+            <a:ext cx="7772400" cy="1470025"/>
           </a:xfrm>
         </p:spPr>
         <p:txBody>
@@ -190,9 +142,14 @@
           <a:lstStyle/>
           <a:p>
             <a:r>
-              <a:rPr lang="en-US"/>
+              <a:rPr lang="en-US" smtClean="0">
+                <a:solidFill>
+                  <a:srgbClr val="111111"/>
+                </a:solidFill>
+              </a:rPr>
               <a:t>Click to edit Master title style</a:t>
             </a:r>
+            <a:endParaRPr lang="en-US"/>
           </a:p>
         </p:txBody>
       </p:sp>
@@ -208,8 +165,8 @@
         </p:nvSpPr>
         <p:spPr>
           <a:xfrm>
-            <a:off x="1371600" y="2914650"/>
-            <a:ext cx="6400800" cy="1314450"/>
+            <a:off x="1371600" y="3886200"/>
+            <a:ext cx="6400800" cy="1752600"/>
           </a:xfrm>
         </p:spPr>
         <p:txBody>
@@ -219,98 +176,85 @@
               <a:buNone/>
               <a:defRPr>
                 <a:solidFill>
-                  <a:schemeClr val="tx1">
-                    <a:tint val="75000"/>
-                  </a:schemeClr>
+                  <a:srgbClr val="111111"/>
                 </a:solidFill>
               </a:defRPr>
             </a:lvl1pPr>
-            <a:lvl2pPr marL="342900" indent="0" algn="ctr">
+            <a:lvl2pPr marL="457200" indent="0" algn="ctr">
               <a:buNone/>
               <a:defRPr>
                 <a:solidFill>
-                  <a:schemeClr val="tx1">
-                    <a:tint val="75000"/>
-                  </a:schemeClr>
+                  <a:srgbClr val="111111"/>
                 </a:solidFill>
               </a:defRPr>
             </a:lvl2pPr>
-            <a:lvl3pPr marL="685800" indent="0" algn="ctr">
+            <a:lvl3pPr marL="914400" indent="0" algn="ctr">
               <a:buNone/>
               <a:defRPr>
                 <a:solidFill>
-                  <a:schemeClr val="tx1">
-                    <a:tint val="75000"/>
-                  </a:schemeClr>
+                  <a:srgbClr val="111111"/>
                 </a:solidFill>
               </a:defRPr>
             </a:lvl3pPr>
-            <a:lvl4pPr marL="1028700" indent="0" algn="ctr">
+            <a:lvl4pPr marL="1371600" indent="0" algn="ctr">
               <a:buNone/>
               <a:defRPr>
                 <a:solidFill>
-                  <a:schemeClr val="tx1">
-                    <a:tint val="75000"/>
-                  </a:schemeClr>
+                  <a:srgbClr val="111111"/>
                 </a:solidFill>
               </a:defRPr>
             </a:lvl4pPr>
-            <a:lvl5pPr marL="1371600" indent="0" algn="ctr">
+            <a:lvl5pPr marL="1828800" indent="0" algn="ctr">
               <a:buNone/>
               <a:defRPr>
                 <a:solidFill>
-                  <a:schemeClr val="tx1">
-                    <a:tint val="75000"/>
-                  </a:schemeClr>
+                  <a:srgbClr val="111111"/>
                 </a:solidFill>
               </a:defRPr>
             </a:lvl5pPr>
-            <a:lvl6pPr marL="1714500" indent="0" algn="ctr">
+            <a:lvl6pPr marL="2286000" indent="0" algn="ctr">
               <a:buNone/>
               <a:defRPr>
                 <a:solidFill>
-                  <a:schemeClr val="tx1">
-                    <a:tint val="75000"/>
-                  </a:schemeClr>
+                  <a:srgbClr val="111111"/>
                 </a:solidFill>
               </a:defRPr>
             </a:lvl6pPr>
-            <a:lvl7pPr marL="2057400" indent="0" algn="ctr">
+            <a:lvl7pPr marL="2743200" indent="0" algn="ctr">
               <a:buNone/>
               <a:defRPr>
                 <a:solidFill>
-                  <a:schemeClr val="tx1">
-                    <a:tint val="75000"/>
-                  </a:schemeClr>
+                  <a:srgbClr val="111111"/>
                 </a:solidFill>
               </a:defRPr>
             </a:lvl7pPr>
-            <a:lvl8pPr marL="2400300" indent="0" algn="ctr">
+            <a:lvl8pPr marL="3200400" indent="0" algn="ctr">
               <a:buNone/>
               <a:defRPr>
                 <a:solidFill>
-                  <a:schemeClr val="tx1">
-                    <a:tint val="75000"/>
-                  </a:schemeClr>
+                  <a:srgbClr val="111111"/>
                 </a:solidFill>
               </a:defRPr>
             </a:lvl8pPr>
-            <a:lvl9pPr marL="2743200" indent="0" algn="ctr">
+            <a:lvl9pPr marL="3657600" indent="0" algn="ctr">
               <a:buNone/>
               <a:defRPr>
                 <a:solidFill>
-                  <a:schemeClr val="tx1">
-                    <a:tint val="75000"/>
-                  </a:schemeClr>
+                  <a:srgbClr val="111111"/>
                 </a:solidFill>
               </a:defRPr>
             </a:lvl9pPr>
           </a:lstStyle>
           <a:p>
             <a:r>
-              <a:rPr lang="en-US"/>
+              <a:rPr lang="en-US" smtClean="0">
+                <a:solidFill>
+                  <a:srgbClr val="111111"/>
+                </a:solidFill>
+              </a:rPr>
               <a:t>Click to edit Master subtitle style</a:t>
             </a:r>
+            <a:endParaRPr lang="en-US"/>
           </a:p>
         </p:txBody>
       </p:sp>
@@ -329,9 +273,13 @@
           <a:bodyPr/>
           <a:lstStyle/>
           <a:p>
-            <a:fld id="{241EB5C9-1307-BA42-ABA2-0BC069CD8E7F}" type="datetimeFigureOut">
-              <a:rPr lang="en-US" smtClean="0"/>
-              <a:t>1/2/22</a:t>
+            <a:fld id="{5BCAD085-E8A6-8845-BD4E-CB4CCA059FC4}" type="datetimeFigureOut">
+              <a:rPr lang="en-US" smtClean="0">
+                <a:solidFill>
+                  <a:srgbClr val="111111"/>
+                </a:solidFill>
+              </a:rPr>
+              <a:t>1/27/13</a:t>
             </a:fld>
             <a:endParaRPr lang="en-US"/>
           </a:p>
@@ -371,8 +319,12 @@
           <a:bodyPr/>
           <a:lstStyle/>
           <a:p>
-            <a:fld id="{C5EF2332-01BF-834F-8236-50238282D533}" type="slidenum">
-              <a:rPr lang="en-US" smtClean="0"/>
+            <a:fld id="{C1FF6DA9-008F-8B48-92A6-B652298478BF}" type="slidenum">
+              <a:rPr lang="en-US" smtClean="0">
+                <a:solidFill>
+                  <a:srgbClr val="111111"/>
+                </a:solidFill>
+              </a:rPr>
               <a:t>‹#›</a:t>
             </a:fld>
             <a:endParaRPr lang="en-US"/>
@@ -382,7 +334,7 @@
     </p:spTree>
     <p:extLst>
       <p:ext uri="{BB962C8B-B14F-4D97-AF65-F5344CB8AC3E}">
-        <p14:creationId xmlns:p14="http://schemas.microsoft.com/office/powerpoint/2010/main" val="1444357513"/>
+        <p14:creationId xmlns:p14="http://schemas.microsoft.com/office/powerpoint/2010/main" val="3168075583"/>
       </p:ext>
     </p:extLst>
   </p:cSld>
@@ -425,9 +377,14 @@
           <a:lstStyle/>
           <a:p>
             <a:r>
-              <a:rPr lang="en-US"/>
+              <a:rPr lang="en-US" smtClean="0">
+                <a:solidFill>
+                  <a:srgbClr val="111111"/>
+                </a:solidFill>
+              </a:rPr>
               <a:t>Click to edit Master title style</a:t>
             </a:r>
+            <a:endParaRPr lang="en-US"/>
           </a:p>
         </p:txBody>
       </p:sp>
@@ -448,37 +405,58 @@
           <a:p>
             <a:pPr lvl="0"/>
             <a:r>
-              <a:rPr lang="en-US"/>
+              <a:rPr lang="en-US" smtClean="0">
+                <a:solidFill>
+                  <a:srgbClr val="111111"/>
+                </a:solidFill>
+              </a:rPr>
               <a:t>Click to edit Master text styles</a:t>
             </a:r>
           </a:p>
           <a:p>
             <a:pPr lvl="1"/>
             <a:r>
-              <a:rPr lang="en-US"/>
+              <a:rPr lang="en-US" smtClean="0">
+                <a:solidFill>
+                  <a:srgbClr val="111111"/>
+                </a:solidFill>
+              </a:rPr>
               <a:t>Second level</a:t>
             </a:r>
           </a:p>
           <a:p>
             <a:pPr lvl="2"/>
             <a:r>
-              <a:rPr lang="en-US"/>
+              <a:rPr lang="en-US" smtClean="0">
+                <a:solidFill>
+                  <a:srgbClr val="111111"/>
+                </a:solidFill>
+              </a:rPr>
               <a:t>Third level</a:t>
             </a:r>
           </a:p>
           <a:p>
             <a:pPr lvl="3"/>
             <a:r>
-              <a:rPr lang="en-US"/>
+              <a:rPr lang="en-US" smtClean="0">
+                <a:solidFill>
+                  <a:srgbClr val="111111"/>
+                </a:solidFill>
+              </a:rPr>
               <a:t>Fourth level</a:t>
             </a:r>
           </a:p>
           <a:p>
             <a:pPr lvl="4"/>
             <a:r>
-              <a:rPr lang="en-US"/>
+              <a:rPr lang="en-US" smtClean="0">
+                <a:solidFill>
+                  <a:srgbClr val="111111"/>
+                </a:solidFill>
+              </a:rPr>
               <a:t>Fifth level</a:t>
             </a:r>
+            <a:endParaRPr lang="en-US"/>
           </a:p>
         </p:txBody>
       </p:sp>
@@ -497,9 +475,13 @@
           <a:bodyPr/>
           <a:lstStyle/>
           <a:p>
-            <a:fld id="{241EB5C9-1307-BA42-ABA2-0BC069CD8E7F}" type="datetimeFigureOut">
-              <a:rPr lang="en-US" smtClean="0"/>
-              <a:t>1/2/22</a:t>
+            <a:fld id="{5BCAD085-E8A6-8845-BD4E-CB4CCA059FC4}" type="datetimeFigureOut">
+              <a:rPr lang="en-US" smtClean="0">
+                <a:solidFill>
+                  <a:srgbClr val="111111"/>
+                </a:solidFill>
+              </a:rPr>
+              <a:t>1/27/13</a:t>
             </a:fld>
             <a:endParaRPr lang="en-US"/>
           </a:p>
@@ -539,8 +521,12 @@
           <a:bodyPr/>
           <a:lstStyle/>
           <a:p>
-            <a:fld id="{C5EF2332-01BF-834F-8236-50238282D533}" type="slidenum">
-              <a:rPr lang="en-US" smtClean="0"/>
+            <a:fld id="{C1FF6DA9-008F-8B48-92A6-B652298478BF}" type="slidenum">
+              <a:rPr lang="en-US" smtClean="0">
+                <a:solidFill>
+                  <a:srgbClr val="111111"/>
+                </a:solidFill>
+              </a:rPr>
               <a:t>‹#›</a:t>
             </a:fld>
             <a:endParaRPr lang="en-US"/>
@@ -550,7 +536,7 @@
     </p:spTree>
     <p:extLst>
       <p:ext uri="{BB962C8B-B14F-4D97-AF65-F5344CB8AC3E}">
-        <p14:creationId xmlns:p14="http://schemas.microsoft.com/office/powerpoint/2010/main" val="313914798"/>
+        <p14:creationId xmlns:p14="http://schemas.microsoft.com/office/powerpoint/2010/main" val="2910927964"/>
       </p:ext>
     </p:extLst>
   </p:cSld>
@@ -589,8 +575,8 @@
         </p:nvSpPr>
         <p:spPr>
           <a:xfrm>
-            <a:off x="6629400" y="205979"/>
-            <a:ext cx="2057400" cy="4388644"/>
+            <a:off x="6629400" y="274638"/>
+            <a:ext cx="2057400" cy="5851525"/>
           </a:xfrm>
         </p:spPr>
         <p:txBody>
@@ -598,9 +584,14 @@
           <a:lstStyle/>
           <a:p>
             <a:r>
-              <a:rPr lang="en-US"/>
+              <a:rPr lang="en-US" smtClean="0">
+                <a:solidFill>
+                  <a:srgbClr val="111111"/>
+                </a:solidFill>
+              </a:rPr>
               <a:t>Click to edit Master title style</a:t>
             </a:r>
+            <a:endParaRPr lang="en-US"/>
           </a:p>
         </p:txBody>
       </p:sp>
@@ -616,8 +607,8 @@
         </p:nvSpPr>
         <p:spPr>
           <a:xfrm>
-            <a:off x="457200" y="205979"/>
-            <a:ext cx="6019800" cy="4388644"/>
+            <a:off x="457200" y="274638"/>
+            <a:ext cx="6019800" cy="5851525"/>
           </a:xfrm>
         </p:spPr>
         <p:txBody>
@@ -626,37 +617,58 @@
           <a:p>
             <a:pPr lvl="0"/>
             <a:r>
-              <a:rPr lang="en-US"/>
+              <a:rPr lang="en-US" smtClean="0">
+                <a:solidFill>
+                  <a:srgbClr val="111111"/>
+                </a:solidFill>
+              </a:rPr>
               <a:t>Click to edit Master text styles</a:t>
             </a:r>
           </a:p>
           <a:p>
             <a:pPr lvl="1"/>
             <a:r>
-              <a:rPr lang="en-US"/>
+              <a:rPr lang="en-US" smtClean="0">
+                <a:solidFill>
+                  <a:srgbClr val="111111"/>
+                </a:solidFill>
+              </a:rPr>
               <a:t>Second level</a:t>
             </a:r>
           </a:p>
           <a:p>
             <a:pPr lvl="2"/>
             <a:r>
-              <a:rPr lang="en-US"/>
+              <a:rPr lang="en-US" smtClean="0">
+                <a:solidFill>
+                  <a:srgbClr val="111111"/>
+                </a:solidFill>
+              </a:rPr>
               <a:t>Third level</a:t>
             </a:r>
           </a:p>
           <a:p>
             <a:pPr lvl="3"/>
             <a:r>
-              <a:rPr lang="en-US"/>
+              <a:rPr lang="en-US" smtClean="0">
+                <a:solidFill>
+                  <a:srgbClr val="111111"/>
+                </a:solidFill>
+              </a:rPr>
               <a:t>Fourth level</a:t>
             </a:r>
           </a:p>
           <a:p>
             <a:pPr lvl="4"/>
             <a:r>
-              <a:rPr lang="en-US"/>
+              <a:rPr lang="en-US" smtClean="0">
+                <a:solidFill>
+                  <a:srgbClr val="111111"/>
+                </a:solidFill>
+              </a:rPr>
               <a:t>Fifth level</a:t>
             </a:r>
+            <a:endParaRPr lang="en-US"/>
           </a:p>
         </p:txBody>
       </p:sp>
@@ -675,9 +687,13 @@
           <a:bodyPr/>
           <a:lstStyle/>
           <a:p>
-            <a:fld id="{241EB5C9-1307-BA42-ABA2-0BC069CD8E7F}" type="datetimeFigureOut">
-              <a:rPr lang="en-US" smtClean="0"/>
-              <a:t>1/2/22</a:t>
+            <a:fld id="{5BCAD085-E8A6-8845-BD4E-CB4CCA059FC4}" type="datetimeFigureOut">
+              <a:rPr lang="en-US" smtClean="0">
+                <a:solidFill>
+                  <a:srgbClr val="111111"/>
+                </a:solidFill>
+              </a:rPr>
+              <a:t>1/27/13</a:t>
             </a:fld>
             <a:endParaRPr lang="en-US"/>
           </a:p>
@@ -717,8 +733,12 @@
           <a:bodyPr/>
           <a:lstStyle/>
           <a:p>
-            <a:fld id="{C5EF2332-01BF-834F-8236-50238282D533}" type="slidenum">
-              <a:rPr lang="en-US" smtClean="0"/>
+            <a:fld id="{C1FF6DA9-008F-8B48-92A6-B652298478BF}" type="slidenum">
+              <a:rPr lang="en-US" smtClean="0">
+                <a:solidFill>
+                  <a:srgbClr val="111111"/>
+                </a:solidFill>
+              </a:rPr>
               <a:t>‹#›</a:t>
             </a:fld>
             <a:endParaRPr lang="en-US"/>
@@ -728,7 +748,7 @@
     </p:spTree>
     <p:extLst>
       <p:ext uri="{BB962C8B-B14F-4D97-AF65-F5344CB8AC3E}">
-        <p14:creationId xmlns:p14="http://schemas.microsoft.com/office/powerpoint/2010/main" val="2581529045"/>
+        <p14:creationId xmlns:p14="http://schemas.microsoft.com/office/powerpoint/2010/main" val="3612223792"/>
       </p:ext>
     </p:extLst>
   </p:cSld>
@@ -771,9 +791,14 @@
           <a:lstStyle/>
           <a:p>
             <a:r>
-              <a:rPr lang="en-US"/>
+              <a:rPr lang="en-US" smtClean="0">
+                <a:solidFill>
+                  <a:srgbClr val="111111"/>
+                </a:solidFill>
+              </a:rPr>
               <a:t>Click to edit Master title style</a:t>
             </a:r>
+            <a:endParaRPr lang="en-US"/>
           </a:p>
         </p:txBody>
       </p:sp>
@@ -794,37 +819,58 @@
           <a:p>
             <a:pPr lvl="0"/>
             <a:r>
-              <a:rPr lang="en-US"/>
+              <a:rPr lang="en-US" smtClean="0">
+                <a:solidFill>
+                  <a:srgbClr val="111111"/>
+                </a:solidFill>
+              </a:rPr>
               <a:t>Click to edit Master text styles</a:t>
             </a:r>
           </a:p>
           <a:p>
             <a:pPr lvl="1"/>
             <a:r>
-              <a:rPr lang="en-US"/>
+              <a:rPr lang="en-US" smtClean="0">
+                <a:solidFill>
+                  <a:srgbClr val="111111"/>
+                </a:solidFill>
+              </a:rPr>
               <a:t>Second level</a:t>
             </a:r>
           </a:p>
           <a:p>
             <a:pPr lvl="2"/>
             <a:r>
-              <a:rPr lang="en-US"/>
+              <a:rPr lang="en-US" smtClean="0">
+                <a:solidFill>
+                  <a:srgbClr val="111111"/>
+                </a:solidFill>
+              </a:rPr>
               <a:t>Third level</a:t>
             </a:r>
           </a:p>
           <a:p>
             <a:pPr lvl="3"/>
             <a:r>
-              <a:rPr lang="en-US"/>
+              <a:rPr lang="en-US" smtClean="0">
+                <a:solidFill>
+                  <a:srgbClr val="111111"/>
+                </a:solidFill>
+              </a:rPr>
               <a:t>Fourth level</a:t>
             </a:r>
           </a:p>
           <a:p>
             <a:pPr lvl="4"/>
             <a:r>
-              <a:rPr lang="en-US"/>
+              <a:rPr lang="en-US" smtClean="0">
+                <a:solidFill>
+                  <a:srgbClr val="111111"/>
+                </a:solidFill>
+              </a:rPr>
               <a:t>Fifth level</a:t>
             </a:r>
+            <a:endParaRPr lang="en-US"/>
           </a:p>
         </p:txBody>
       </p:sp>
@@ -843,9 +889,13 @@
           <a:bodyPr/>
           <a:lstStyle/>
           <a:p>
-            <a:fld id="{241EB5C9-1307-BA42-ABA2-0BC069CD8E7F}" type="datetimeFigureOut">
-              <a:rPr lang="en-US" smtClean="0"/>
-              <a:t>1/2/22</a:t>
+            <a:fld id="{5BCAD085-E8A6-8845-BD4E-CB4CCA059FC4}" type="datetimeFigureOut">
+              <a:rPr lang="en-US" smtClean="0">
+                <a:solidFill>
+                  <a:srgbClr val="111111"/>
+                </a:solidFill>
+              </a:rPr>
+              <a:t>1/27/13</a:t>
             </a:fld>
             <a:endParaRPr lang="en-US"/>
           </a:p>
@@ -885,8 +935,12 @@
           <a:bodyPr/>
           <a:lstStyle/>
           <a:p>
-            <a:fld id="{C5EF2332-01BF-834F-8236-50238282D533}" type="slidenum">
-              <a:rPr lang="en-US" smtClean="0"/>
+            <a:fld id="{C1FF6DA9-008F-8B48-92A6-B652298478BF}" type="slidenum">
+              <a:rPr lang="en-US" smtClean="0">
+                <a:solidFill>
+                  <a:srgbClr val="111111"/>
+                </a:solidFill>
+              </a:rPr>
               <a:t>‹#›</a:t>
             </a:fld>
             <a:endParaRPr lang="en-US"/>
@@ -896,7 +950,7 @@
     </p:spTree>
     <p:extLst>
       <p:ext uri="{BB962C8B-B14F-4D97-AF65-F5344CB8AC3E}">
-        <p14:creationId xmlns:p14="http://schemas.microsoft.com/office/powerpoint/2010/main" val="338346009"/>
+        <p14:creationId xmlns:p14="http://schemas.microsoft.com/office/powerpoint/2010/main" val="2614314258"/>
       </p:ext>
     </p:extLst>
   </p:cSld>
@@ -935,22 +989,31 @@
         </p:nvSpPr>
         <p:spPr>
           <a:xfrm>
-            <a:off x="722313" y="3305176"/>
-            <a:ext cx="7772400" cy="1021556"/>
+            <a:off x="722313" y="4406900"/>
+            <a:ext cx="7772400" cy="1362075"/>
           </a:xfrm>
         </p:spPr>
         <p:txBody>
           <a:bodyPr anchor="t"/>
           <a:lstStyle>
             <a:lvl1pPr algn="l">
-              <a:defRPr sz="3000" b="1" cap="all"/>
+              <a:defRPr sz="4000" b="1" cap="all">
+                <a:solidFill>
+                  <a:srgbClr val="111111"/>
+                </a:solidFill>
+              </a:defRPr>
             </a:lvl1pPr>
           </a:lstStyle>
           <a:p>
             <a:r>
-              <a:rPr lang="en-US"/>
+              <a:rPr lang="en-US" smtClean="0">
+                <a:solidFill>
+                  <a:srgbClr val="111111"/>
+                </a:solidFill>
+              </a:rPr>
               <a:t>Click to edit Master title style</a:t>
             </a:r>
+            <a:endParaRPr lang="en-US"/>
           </a:p>
         </p:txBody>
       </p:sp>
@@ -966,8 +1029,8 @@
         </p:nvSpPr>
         <p:spPr>
           <a:xfrm>
-            <a:off x="722313" y="2180035"/>
-            <a:ext cx="7772400" cy="1125140"/>
+            <a:off x="722313" y="2906713"/>
+            <a:ext cx="7772400" cy="1500187"/>
           </a:xfrm>
         </p:spPr>
         <p:txBody>
@@ -975,91 +1038,73 @@
           <a:lstStyle>
             <a:lvl1pPr marL="0" indent="0">
               <a:buNone/>
-              <a:defRPr sz="1500">
-                <a:solidFill>
-                  <a:schemeClr val="tx1">
-                    <a:tint val="75000"/>
-                  </a:schemeClr>
+              <a:defRPr sz="2000">
+                <a:solidFill>
+                  <a:srgbClr val="111111"/>
                 </a:solidFill>
               </a:defRPr>
             </a:lvl1pPr>
-            <a:lvl2pPr marL="342900" indent="0">
+            <a:lvl2pPr marL="457200" indent="0">
               <a:buNone/>
-              <a:defRPr sz="1350">
-                <a:solidFill>
-                  <a:schemeClr val="tx1">
-                    <a:tint val="75000"/>
-                  </a:schemeClr>
+              <a:defRPr sz="1800">
+                <a:solidFill>
+                  <a:srgbClr val="111111"/>
                 </a:solidFill>
               </a:defRPr>
             </a:lvl2pPr>
-            <a:lvl3pPr marL="685800" indent="0">
+            <a:lvl3pPr marL="914400" indent="0">
               <a:buNone/>
-              <a:defRPr sz="1200">
-                <a:solidFill>
-                  <a:schemeClr val="tx1">
-                    <a:tint val="75000"/>
-                  </a:schemeClr>
+              <a:defRPr sz="1600">
+                <a:solidFill>
+                  <a:srgbClr val="111111"/>
                 </a:solidFill>
               </a:defRPr>
             </a:lvl3pPr>
-            <a:lvl4pPr marL="1028700" indent="0">
+            <a:lvl4pPr marL="1371600" indent="0">
               <a:buNone/>
-              <a:defRPr sz="1050">
-                <a:solidFill>
-                  <a:schemeClr val="tx1">
-                    <a:tint val="75000"/>
-                  </a:schemeClr>
+              <a:defRPr sz="1400">
+                <a:solidFill>
+                  <a:srgbClr val="111111"/>
                 </a:solidFill>
               </a:defRPr>
             </a:lvl4pPr>
-            <a:lvl5pPr marL="1371600" indent="0">
+            <a:lvl5pPr marL="1828800" indent="0">
               <a:buNone/>
-              <a:defRPr sz="1050">
-                <a:solidFill>
-                  <a:schemeClr val="tx1">
-                    <a:tint val="75000"/>
-                  </a:schemeClr>
+              <a:defRPr sz="1400">
+                <a:solidFill>
+                  <a:srgbClr val="111111"/>
                 </a:solidFill>
               </a:defRPr>
             </a:lvl5pPr>
-            <a:lvl6pPr marL="1714500" indent="0">
+            <a:lvl6pPr marL="2286000" indent="0">
               <a:buNone/>
-              <a:defRPr sz="1050">
-                <a:solidFill>
-                  <a:schemeClr val="tx1">
-                    <a:tint val="75000"/>
-                  </a:schemeClr>
+              <a:defRPr sz="1400">
+                <a:solidFill>
+                  <a:srgbClr val="111111"/>
                 </a:solidFill>
               </a:defRPr>
             </a:lvl6pPr>
-            <a:lvl7pPr marL="2057400" indent="0">
+            <a:lvl7pPr marL="2743200" indent="0">
               <a:buNone/>
-              <a:defRPr sz="1050">
-                <a:solidFill>
-                  <a:schemeClr val="tx1">
-                    <a:tint val="75000"/>
-                  </a:schemeClr>
+              <a:defRPr sz="1400">
+                <a:solidFill>
+                  <a:srgbClr val="111111"/>
                 </a:solidFill>
               </a:defRPr>
             </a:lvl7pPr>
-            <a:lvl8pPr marL="2400300" indent="0">
+            <a:lvl8pPr marL="3200400" indent="0">
               <a:buNone/>
-              <a:defRPr sz="1050">
-                <a:solidFill>
-                  <a:schemeClr val="tx1">
-                    <a:tint val="75000"/>
-                  </a:schemeClr>
+              <a:defRPr sz="1400">
+                <a:solidFill>
+                  <a:srgbClr val="111111"/>
                 </a:solidFill>
               </a:defRPr>
             </a:lvl8pPr>
-            <a:lvl9pPr marL="2743200" indent="0">
+            <a:lvl9pPr marL="3657600" indent="0">
               <a:buNone/>
-              <a:defRPr sz="1050">
-                <a:solidFill>
-                  <a:schemeClr val="tx1">
-                    <a:tint val="75000"/>
-                  </a:schemeClr>
+              <a:defRPr sz="1400">
+                <a:solidFill>
+                  <a:srgbClr val="111111"/>
                 </a:solidFill>
               </a:defRPr>
             </a:lvl9pPr>
@@ -1067,7 +1112,11 @@
           <a:p>
             <a:pPr lvl="0"/>
             <a:r>
-              <a:rPr lang="en-US"/>
+              <a:rPr lang="en-US" smtClean="0">
+                <a:solidFill>
+                  <a:srgbClr val="111111"/>
+                </a:solidFill>
+              </a:rPr>
               <a:t>Click to edit Master text styles</a:t>
             </a:r>
           </a:p>
@@ -1088,9 +1137,13 @@
           <a:bodyPr/>
           <a:lstStyle/>
           <a:p>
-            <a:fld id="{241EB5C9-1307-BA42-ABA2-0BC069CD8E7F}" type="datetimeFigureOut">
-              <a:rPr lang="en-US" smtClean="0"/>
-              <a:t>1/2/22</a:t>
+            <a:fld id="{5BCAD085-E8A6-8845-BD4E-CB4CCA059FC4}" type="datetimeFigureOut">
+              <a:rPr lang="en-US" smtClean="0">
+                <a:solidFill>
+                  <a:srgbClr val="111111"/>
+                </a:solidFill>
+              </a:rPr>
+              <a:t>1/27/13</a:t>
             </a:fld>
             <a:endParaRPr lang="en-US"/>
           </a:p>
@@ -1130,8 +1183,12 @@
           <a:bodyPr/>
           <a:lstStyle/>
           <a:p>
-            <a:fld id="{C5EF2332-01BF-834F-8236-50238282D533}" type="slidenum">
-              <a:rPr lang="en-US" smtClean="0"/>
+            <a:fld id="{C1FF6DA9-008F-8B48-92A6-B652298478BF}" type="slidenum">
+              <a:rPr lang="en-US" smtClean="0">
+                <a:solidFill>
+                  <a:srgbClr val="111111"/>
+                </a:solidFill>
+              </a:rPr>
               <a:t>‹#›</a:t>
             </a:fld>
             <a:endParaRPr lang="en-US"/>
@@ -1141,7 +1198,7 @@
     </p:spTree>
     <p:extLst>
       <p:ext uri="{BB962C8B-B14F-4D97-AF65-F5344CB8AC3E}">
-        <p14:creationId xmlns:p14="http://schemas.microsoft.com/office/powerpoint/2010/main" val="1073069076"/>
+        <p14:creationId xmlns:p14="http://schemas.microsoft.com/office/powerpoint/2010/main" val="960648375"/>
       </p:ext>
     </p:extLst>
   </p:cSld>
@@ -1184,9 +1241,14 @@
           <a:lstStyle/>
           <a:p>
             <a:r>
-              <a:rPr lang="en-US"/>
+              <a:rPr lang="en-US" smtClean="0">
+                <a:solidFill>
+                  <a:srgbClr val="111111"/>
+                </a:solidFill>
+              </a:rPr>
               <a:t>Click to edit Master title style</a:t>
             </a:r>
+            <a:endParaRPr lang="en-US"/>
           </a:p>
         </p:txBody>
       </p:sp>
@@ -1202,75 +1264,132 @@
         </p:nvSpPr>
         <p:spPr>
           <a:xfrm>
-            <a:off x="457200" y="1200151"/>
-            <a:ext cx="4038600" cy="3394472"/>
+            <a:off x="457200" y="1600200"/>
+            <a:ext cx="4038600" cy="4525963"/>
           </a:xfrm>
         </p:spPr>
         <p:txBody>
           <a:bodyPr/>
           <a:lstStyle>
             <a:lvl1pPr>
-              <a:defRPr sz="2100"/>
+              <a:defRPr sz="2800">
+                <a:solidFill>
+                  <a:srgbClr val="111111"/>
+                </a:solidFill>
+              </a:defRPr>
             </a:lvl1pPr>
             <a:lvl2pPr>
-              <a:defRPr sz="1800"/>
+              <a:defRPr sz="2400">
+                <a:solidFill>
+                  <a:srgbClr val="111111"/>
+                </a:solidFill>
+              </a:defRPr>
             </a:lvl2pPr>
             <a:lvl3pPr>
-              <a:defRPr sz="1500"/>
+              <a:defRPr sz="2000">
+                <a:solidFill>
+                  <a:srgbClr val="111111"/>
+                </a:solidFill>
+              </a:defRPr>
             </a:lvl3pPr>
             <a:lvl4pPr>
-              <a:defRPr sz="1350"/>
+              <a:defRPr sz="1800">
+                <a:solidFill>
+                  <a:srgbClr val="111111"/>
+                </a:solidFill>
+              </a:defRPr>
             </a:lvl4pPr>
             <a:lvl5pPr>
-              <a:defRPr sz="1350"/>
+              <a:defRPr sz="1800">
+                <a:solidFill>
+                  <a:srgbClr val="111111"/>
+                </a:solidFill>
+              </a:defRPr>
             </a:lvl5pPr>
             <a:lvl6pPr>
-              <a:defRPr sz="1350"/>
+              <a:defRPr sz="1800">
+                <a:solidFill>
+                  <a:srgbClr val="111111"/>
+                </a:solidFill>
+              </a:defRPr>
             </a:lvl6pPr>
             <a:lvl7pPr>
-              <a:defRPr sz="1350"/>
+              <a:defRPr sz="1800">
+                <a:solidFill>
+                  <a:srgbClr val="111111"/>
+                </a:solidFill>
+              </a:defRPr>
             </a:lvl7pPr>
             <a:lvl8pPr>
-              <a:defRPr sz="1350"/>
+              <a:defRPr sz="1800">
+                <a:solidFill>
+                  <a:srgbClr val="111111"/>
+                </a:solidFill>
+              </a:defRPr>
             </a:lvl8pPr>
             <a:lvl9pPr>
-              <a:defRPr sz="1350"/>
+              <a:defRPr sz="1800">
+                <a:solidFill>
+                  <a:srgbClr val="111111"/>
+                </a:solidFill>
+              </a:defRPr>
             </a:lvl9pPr>
           </a:lstStyle>
           <a:p>
             <a:pPr lvl="0"/>
             <a:r>
-              <a:rPr lang="en-US"/>
+              <a:rPr lang="en-US" smtClean="0">
+                <a:solidFill>
+                  <a:srgbClr val="111111"/>
+                </a:solidFill>
+              </a:rPr>
               <a:t>Click to edit Master text styles</a:t>
             </a:r>
           </a:p>
           <a:p>
             <a:pPr lvl="1"/>
             <a:r>
-              <a:rPr lang="en-US"/>
+              <a:rPr lang="en-US" smtClean="0">
+                <a:solidFill>
+                  <a:srgbClr val="111111"/>
+                </a:solidFill>
+              </a:rPr>
               <a:t>Second level</a:t>
             </a:r>
           </a:p>
           <a:p>
             <a:pPr lvl="2"/>
             <a:r>
-              <a:rPr lang="en-US"/>
+              <a:rPr lang="en-US" smtClean="0">
+                <a:solidFill>
+                  <a:srgbClr val="111111"/>
+                </a:solidFill>
+              </a:rPr>
               <a:t>Third level</a:t>
             </a:r>
           </a:p>
           <a:p>
             <a:pPr lvl="3"/>
             <a:r>
-              <a:rPr lang="en-US"/>
+              <a:rPr lang="en-US" smtClean="0">
+                <a:solidFill>
+                  <a:srgbClr val="111111"/>
+                </a:solidFill>
+              </a:rPr>
               <a:t>Fourth level</a:t>
             </a:r>
           </a:p>
           <a:p>
             <a:pPr lvl="4"/>
             <a:r>
-              <a:rPr lang="en-US"/>
+              <a:rPr lang="en-US" smtClean="0">
+                <a:solidFill>
+                  <a:srgbClr val="111111"/>
+                </a:solidFill>
+              </a:rPr>
               <a:t>Fifth level</a:t>
             </a:r>
+            <a:endParaRPr lang="en-US"/>
           </a:p>
         </p:txBody>
       </p:sp>
@@ -1286,75 +1405,132 @@
         </p:nvSpPr>
         <p:spPr>
           <a:xfrm>
-            <a:off x="4648200" y="1200151"/>
-            <a:ext cx="4038600" cy="3394472"/>
+            <a:off x="4648200" y="1600200"/>
+            <a:ext cx="4038600" cy="4525963"/>
           </a:xfrm>
         </p:spPr>
         <p:txBody>
           <a:bodyPr/>
           <a:lstStyle>
             <a:lvl1pPr>
-              <a:defRPr sz="2100"/>
+              <a:defRPr sz="2800">
+                <a:solidFill>
+                  <a:srgbClr val="111111"/>
+                </a:solidFill>
+              </a:defRPr>
             </a:lvl1pPr>
             <a:lvl2pPr>
-              <a:defRPr sz="1800"/>
+              <a:defRPr sz="2400">
+                <a:solidFill>
+                  <a:srgbClr val="111111"/>
+                </a:solidFill>
+              </a:defRPr>
             </a:lvl2pPr>
             <a:lvl3pPr>
-              <a:defRPr sz="1500"/>
+              <a:defRPr sz="2000">
+                <a:solidFill>
+                  <a:srgbClr val="111111"/>
+                </a:solidFill>
+              </a:defRPr>
             </a:lvl3pPr>
             <a:lvl4pPr>
-              <a:defRPr sz="1350"/>
+              <a:defRPr sz="1800">
+                <a:solidFill>
+                  <a:srgbClr val="111111"/>
+                </a:solidFill>
+              </a:defRPr>
             </a:lvl4pPr>
             <a:lvl5pPr>
-              <a:defRPr sz="1350"/>
+              <a:defRPr sz="1800">
+                <a:solidFill>
+                  <a:srgbClr val="111111"/>
+                </a:solidFill>
+              </a:defRPr>
             </a:lvl5pPr>
             <a:lvl6pPr>
-              <a:defRPr sz="1350"/>
+              <a:defRPr sz="1800">
+                <a:solidFill>
+                  <a:srgbClr val="111111"/>
+                </a:solidFill>
+              </a:defRPr>
             </a:lvl6pPr>
             <a:lvl7pPr>
-              <a:defRPr sz="1350"/>
+              <a:defRPr sz="1800">
+                <a:solidFill>
+                  <a:srgbClr val="111111"/>
+                </a:solidFill>
+              </a:defRPr>
             </a:lvl7pPr>
             <a:lvl8pPr>
-              <a:defRPr sz="1350"/>
+              <a:defRPr sz="1800">
+                <a:solidFill>
+                  <a:srgbClr val="111111"/>
+                </a:solidFill>
+              </a:defRPr>
             </a:lvl8pPr>
             <a:lvl9pPr>
-              <a:defRPr sz="1350"/>
+              <a:defRPr sz="1800">
+                <a:solidFill>
+                  <a:srgbClr val="111111"/>
+                </a:solidFill>
+              </a:defRPr>
             </a:lvl9pPr>
           </a:lstStyle>
           <a:p>
             <a:pPr lvl="0"/>
             <a:r>
-              <a:rPr lang="en-US"/>
+              <a:rPr lang="en-US" smtClean="0">
+                <a:solidFill>
+                  <a:srgbClr val="111111"/>
+                </a:solidFill>
+              </a:rPr>
               <a:t>Click to edit Master text styles</a:t>
             </a:r>
           </a:p>
           <a:p>
             <a:pPr lvl="1"/>
             <a:r>
-              <a:rPr lang="en-US"/>
+              <a:rPr lang="en-US" smtClean="0">
+                <a:solidFill>
+                  <a:srgbClr val="111111"/>
+                </a:solidFill>
+              </a:rPr>
               <a:t>Second level</a:t>
             </a:r>
           </a:p>
           <a:p>
             <a:pPr lvl="2"/>
             <a:r>
-              <a:rPr lang="en-US"/>
+              <a:rPr lang="en-US" smtClean="0">
+                <a:solidFill>
+                  <a:srgbClr val="111111"/>
+                </a:solidFill>
+              </a:rPr>
               <a:t>Third level</a:t>
             </a:r>
           </a:p>
           <a:p>
             <a:pPr lvl="3"/>
             <a:r>
-              <a:rPr lang="en-US"/>
+              <a:rPr lang="en-US" smtClean="0">
+                <a:solidFill>
+                  <a:srgbClr val="111111"/>
+                </a:solidFill>
+              </a:rPr>
               <a:t>Fourth level</a:t>
             </a:r>
           </a:p>
           <a:p>
             <a:pPr lvl="4"/>
             <a:r>
-              <a:rPr lang="en-US"/>
+              <a:rPr lang="en-US" smtClean="0">
+                <a:solidFill>
+                  <a:srgbClr val="111111"/>
+                </a:solidFill>
+              </a:rPr>
               <a:t>Fifth level</a:t>
             </a:r>
+            <a:endParaRPr lang="en-US"/>
           </a:p>
         </p:txBody>
       </p:sp>
@@ -1373,9 +1549,13 @@
           <a:bodyPr/>
           <a:lstStyle/>
           <a:p>
-            <a:fld id="{241EB5C9-1307-BA42-ABA2-0BC069CD8E7F}" type="datetimeFigureOut">
-              <a:rPr lang="en-US" smtClean="0"/>
-              <a:t>1/2/22</a:t>
+            <a:fld id="{5BCAD085-E8A6-8845-BD4E-CB4CCA059FC4}" type="datetimeFigureOut">
+              <a:rPr lang="en-US" smtClean="0">
+                <a:solidFill>
+                  <a:srgbClr val="111111"/>
+                </a:solidFill>
+              </a:rPr>
+              <a:t>1/27/13</a:t>
             </a:fld>
             <a:endParaRPr lang="en-US"/>
           </a:p>
@@ -1415,8 +1595,12 @@
           <a:bodyPr/>
           <a:lstStyle/>
           <a:p>
-            <a:fld id="{C5EF2332-01BF-834F-8236-50238282D533}" type="slidenum">
-              <a:rPr lang="en-US" smtClean="0"/>
+            <a:fld id="{C1FF6DA9-008F-8B48-92A6-B652298478BF}" type="slidenum">
+              <a:rPr lang="en-US" smtClean="0">
+                <a:solidFill>
+                  <a:srgbClr val="111111"/>
+                </a:solidFill>
+              </a:rPr>
               <a:t>‹#›</a:t>
             </a:fld>
             <a:endParaRPr lang="en-US"/>
@@ -1426,7 +1610,7 @@
     </p:spTree>
     <p:extLst>
       <p:ext uri="{BB962C8B-B14F-4D97-AF65-F5344CB8AC3E}">
-        <p14:creationId xmlns:p14="http://schemas.microsoft.com/office/powerpoint/2010/main" val="2619886245"/>
+        <p14:creationId xmlns:p14="http://schemas.microsoft.com/office/powerpoint/2010/main" val="2782244947"/>
       </p:ext>
     </p:extLst>
   </p:cSld>
@@ -1468,14 +1652,23 @@
           <a:bodyPr/>
           <a:lstStyle>
             <a:lvl1pPr>
-              <a:defRPr/>
+              <a:defRPr>
+                <a:solidFill>
+                  <a:srgbClr val="111111"/>
+                </a:solidFill>
+              </a:defRPr>
             </a:lvl1pPr>
           </a:lstStyle>
           <a:p>
             <a:r>
-              <a:rPr lang="en-US"/>
+              <a:rPr lang="en-US" smtClean="0">
+                <a:solidFill>
+                  <a:srgbClr val="111111"/>
+                </a:solidFill>
+              </a:rPr>
               <a:t>Click to edit Master title style</a:t>
             </a:r>
+            <a:endParaRPr lang="en-US"/>
           </a:p>
         </p:txBody>
       </p:sp>
@@ -1491,8 +1684,8 @@
         </p:nvSpPr>
         <p:spPr>
           <a:xfrm>
-            <a:off x="457200" y="1151335"/>
-            <a:ext cx="4040188" cy="479822"/>
+            <a:off x="457200" y="1535113"/>
+            <a:ext cx="4040188" cy="639762"/>
           </a:xfrm>
         </p:spPr>
         <p:txBody>
@@ -1500,45 +1693,85 @@
           <a:lstStyle>
             <a:lvl1pPr marL="0" indent="0">
               <a:buNone/>
-              <a:defRPr sz="1800" b="1"/>
+              <a:defRPr sz="2400" b="1">
+                <a:solidFill>
+                  <a:srgbClr val="111111"/>
+                </a:solidFill>
+              </a:defRPr>
             </a:lvl1pPr>
-            <a:lvl2pPr marL="342900" indent="0">
+            <a:lvl2pPr marL="457200" indent="0">
               <a:buNone/>
-              <a:defRPr sz="1500" b="1"/>
+              <a:defRPr sz="2000" b="1">
+                <a:solidFill>
+                  <a:srgbClr val="111111"/>
+                </a:solidFill>
+              </a:defRPr>
             </a:lvl2pPr>
-            <a:lvl3pPr marL="685800" indent="0">
+            <a:lvl3pPr marL="914400" indent="0">
               <a:buNone/>
-              <a:defRPr sz="1350" b="1"/>
+              <a:defRPr sz="1800" b="1">
+                <a:solidFill>
+                  <a:srgbClr val="111111"/>
+                </a:solidFill>
+              </a:defRPr>
             </a:lvl3pPr>
-            <a:lvl4pPr marL="1028700" indent="0">
+            <a:lvl4pPr marL="1371600" indent="0">
               <a:buNone/>
-              <a:defRPr sz="1200" b="1"/>
+              <a:defRPr sz="1600" b="1">
+                <a:solidFill>
+                  <a:srgbClr val="111111"/>
+                </a:solidFill>
+              </a:defRPr>
             </a:lvl4pPr>
-            <a:lvl5pPr marL="1371600" indent="0">
+            <a:lvl5pPr marL="1828800" indent="0">
               <a:buNone/>
-              <a:defRPr sz="1200" b="1"/>
+              <a:defRPr sz="1600" b="1">
+                <a:solidFill>
+                  <a:srgbClr val="111111"/>
+                </a:solidFill>
+              </a:defRPr>
             </a:lvl5pPr>
-            <a:lvl6pPr marL="1714500" indent="0">
+            <a:lvl6pPr marL="2286000" indent="0">
               <a:buNone/>
-              <a:defRPr sz="1200" b="1"/>
+              <a:defRPr sz="1600" b="1">
+                <a:solidFill>
+                  <a:srgbClr val="111111"/>
+                </a:solidFill>
+              </a:defRPr>
             </a:lvl6pPr>
-            <a:lvl7pPr marL="2057400" indent="0">
+            <a:lvl7pPr marL="2743200" indent="0">
               <a:buNone/>
-              <a:defRPr sz="1200" b="1"/>
+              <a:defRPr sz="1600" b="1">
+                <a:solidFill>
+                  <a:srgbClr val="111111"/>
+                </a:solidFill>
+              </a:defRPr>
             </a:lvl7pPr>
-            <a:lvl8pPr marL="2400300" indent="0">
+            <a:lvl8pPr marL="3200400" indent="0">
               <a:buNone/>
-              <a:defRPr sz="1200" b="1"/>
+              <a:defRPr sz="1600" b="1">
+                <a:solidFill>
+                  <a:srgbClr val="111111"/>
+                </a:solidFill>
+              </a:defRPr>
             </a:lvl8pPr>
-            <a:lvl9pPr marL="2743200" indent="0">
+            <a:lvl9pPr marL="3657600" indent="0">
               <a:buNone/>
-              <a:defRPr sz="1200" b="1"/>
+              <a:defRPr sz="1600" b="1">
+                <a:solidFill>
+                  <a:srgbClr val="111111"/>
+                </a:solidFill>
+              </a:defRPr>
             </a:lvl9pPr>
           </a:lstStyle>
           <a:p>
             <a:pPr lvl="0"/>
             <a:r>
-              <a:rPr lang="en-US"/>
+              <a:rPr lang="en-US" smtClean="0">
+                <a:solidFill>
+                  <a:srgbClr val="111111"/>
+                </a:solidFill>
+              </a:rPr>
               <a:t>Click to edit Master text styles</a:t>
             </a:r>
           </a:p>
@@ -1556,75 +1789,132 @@
         </p:nvSpPr>
         <p:spPr>
           <a:xfrm>
-            <a:off x="457200" y="1631156"/>
-            <a:ext cx="4040188" cy="2963466"/>
+            <a:off x="457200" y="2174875"/>
+            <a:ext cx="4040188" cy="3951288"/>
           </a:xfrm>
         </p:spPr>
         <p:txBody>
           <a:bodyPr/>
           <a:lstStyle>
             <a:lvl1pPr>
-              <a:defRPr sz="1800"/>
+              <a:defRPr sz="2400">
+                <a:solidFill>
+                  <a:srgbClr val="111111"/>
+                </a:solidFill>
+              </a:defRPr>
             </a:lvl1pPr>
             <a:lvl2pPr>
-              <a:defRPr sz="1500"/>
+              <a:defRPr sz="2000">
+                <a:solidFill>
+                  <a:srgbClr val="111111"/>
+                </a:solidFill>
+              </a:defRPr>
             </a:lvl2pPr>
             <a:lvl3pPr>
-              <a:defRPr sz="1350"/>
+              <a:defRPr sz="1800">
+                <a:solidFill>
+                  <a:srgbClr val="111111"/>
+                </a:solidFill>
+              </a:defRPr>
             </a:lvl3pPr>
             <a:lvl4pPr>
-              <a:defRPr sz="1200"/>
+              <a:defRPr sz="1600">
+                <a:solidFill>
+                  <a:srgbClr val="111111"/>
+                </a:solidFill>
+              </a:defRPr>
             </a:lvl4pPr>
             <a:lvl5pPr>
-              <a:defRPr sz="1200"/>
+              <a:defRPr sz="1600">
+                <a:solidFill>
+                  <a:srgbClr val="111111"/>
+                </a:solidFill>
+              </a:defRPr>
             </a:lvl5pPr>
             <a:lvl6pPr>
-              <a:defRPr sz="1200"/>
+              <a:defRPr sz="1600">
+                <a:solidFill>
+                  <a:srgbClr val="111111"/>
+                </a:solidFill>
+              </a:defRPr>
             </a:lvl6pPr>
             <a:lvl7pPr>
-              <a:defRPr sz="1200"/>
+              <a:defRPr sz="1600">
+                <a:solidFill>
+                  <a:srgbClr val="111111"/>
+                </a:solidFill>
+              </a:defRPr>
             </a:lvl7pPr>
             <a:lvl8pPr>
-              <a:defRPr sz="1200"/>
+              <a:defRPr sz="1600">
+                <a:solidFill>
+                  <a:srgbClr val="111111"/>
+                </a:solidFill>
+              </a:defRPr>
             </a:lvl8pPr>
             <a:lvl9pPr>
-              <a:defRPr sz="1200"/>
+              <a:defRPr sz="1600">
+                <a:solidFill>
+                  <a:srgbClr val="111111"/>
+                </a:solidFill>
+              </a:defRPr>
             </a:lvl9pPr>
           </a:lstStyle>
           <a:p>
             <a:pPr lvl="0"/>
             <a:r>
-              <a:rPr lang="en-US"/>
+              <a:rPr lang="en-US" smtClean="0">
+                <a:solidFill>
+                  <a:srgbClr val="111111"/>
+                </a:solidFill>
+              </a:rPr>
               <a:t>Click to edit Master text styles</a:t>
             </a:r>
           </a:p>
           <a:p>
             <a:pPr lvl="1"/>
             <a:r>
-              <a:rPr lang="en-US"/>
+              <a:rPr lang="en-US" smtClean="0">
+                <a:solidFill>
+                  <a:srgbClr val="111111"/>
+                </a:solidFill>
+              </a:rPr>
               <a:t>Second level</a:t>
             </a:r>
           </a:p>
           <a:p>
             <a:pPr lvl="2"/>
             <a:r>
-              <a:rPr lang="en-US"/>
+              <a:rPr lang="en-US" smtClean="0">
+                <a:solidFill>
+                  <a:srgbClr val="111111"/>
+                </a:solidFill>
+              </a:rPr>
               <a:t>Third level</a:t>
             </a:r>
           </a:p>
           <a:p>
             <a:pPr lvl="3"/>
             <a:r>
-              <a:rPr lang="en-US"/>
+              <a:rPr lang="en-US" smtClean="0">
+                <a:solidFill>
+                  <a:srgbClr val="111111"/>
+                </a:solidFill>
+              </a:rPr>
               <a:t>Fourth level</a:t>
             </a:r>
           </a:p>
           <a:p>
             <a:pPr lvl="4"/>
             <a:r>
-              <a:rPr lang="en-US"/>
+              <a:rPr lang="en-US" smtClean="0">
+                <a:solidFill>
+                  <a:srgbClr val="111111"/>
+                </a:solidFill>
+              </a:rPr>
               <a:t>Fifth level</a:t>
             </a:r>
+            <a:endParaRPr lang="en-US"/>
           </a:p>
         </p:txBody>
       </p:sp>
@@ -1640,8 +1930,8 @@
         </p:nvSpPr>
         <p:spPr>
           <a:xfrm>
-            <a:off x="4645026" y="1151335"/>
-            <a:ext cx="4041775" cy="479822"/>
+            <a:off x="4645025" y="1535113"/>
+            <a:ext cx="4041775" cy="639762"/>
           </a:xfrm>
         </p:spPr>
         <p:txBody>
@@ -1649,45 +1939,85 @@
           <a:lstStyle>
             <a:lvl1pPr marL="0" indent="0">
               <a:buNone/>
-              <a:defRPr sz="1800" b="1"/>
+              <a:defRPr sz="2400" b="1">
+                <a:solidFill>
+                  <a:srgbClr val="111111"/>
+                </a:solidFill>
+              </a:defRPr>
             </a:lvl1pPr>
-            <a:lvl2pPr marL="342900" indent="0">
+            <a:lvl2pPr marL="457200" indent="0">
               <a:buNone/>
-              <a:defRPr sz="1500" b="1"/>
+              <a:defRPr sz="2000" b="1">
+                <a:solidFill>
+                  <a:srgbClr val="111111"/>
+                </a:solidFill>
+              </a:defRPr>
             </a:lvl2pPr>
-            <a:lvl3pPr marL="685800" indent="0">
+            <a:lvl3pPr marL="914400" indent="0">
               <a:buNone/>
-              <a:defRPr sz="1350" b="1"/>
+              <a:defRPr sz="1800" b="1">
+                <a:solidFill>
+                  <a:srgbClr val="111111"/>
+                </a:solidFill>
+              </a:defRPr>
             </a:lvl3pPr>
-            <a:lvl4pPr marL="1028700" indent="0">
+            <a:lvl4pPr marL="1371600" indent="0">
               <a:buNone/>
-              <a:defRPr sz="1200" b="1"/>
+              <a:defRPr sz="1600" b="1">
+                <a:solidFill>
+                  <a:srgbClr val="111111"/>
+                </a:solidFill>
+              </a:defRPr>
             </a:lvl4pPr>
-            <a:lvl5pPr marL="1371600" indent="0">
+            <a:lvl5pPr marL="1828800" indent="0">
               <a:buNone/>
-              <a:defRPr sz="1200" b="1"/>
+              <a:defRPr sz="1600" b="1">
+                <a:solidFill>
+                  <a:srgbClr val="111111"/>
+                </a:solidFill>
+              </a:defRPr>
             </a:lvl5pPr>
-            <a:lvl6pPr marL="1714500" indent="0">
+            <a:lvl6pPr marL="2286000" indent="0">
               <a:buNone/>
-              <a:defRPr sz="1200" b="1"/>
+              <a:defRPr sz="1600" b="1">
+                <a:solidFill>
+                  <a:srgbClr val="111111"/>
+                </a:solidFill>
+              </a:defRPr>
             </a:lvl6pPr>
-            <a:lvl7pPr marL="2057400" indent="0">
+            <a:lvl7pPr marL="2743200" indent="0">
               <a:buNone/>
-              <a:defRPr sz="1200" b="1"/>
+              <a:defRPr sz="1600" b="1">
+                <a:solidFill>
+                  <a:srgbClr val="111111"/>
+                </a:solidFill>
+              </a:defRPr>
             </a:lvl7pPr>
-            <a:lvl8pPr marL="2400300" indent="0">
+            <a:lvl8pPr marL="3200400" indent="0">
               <a:buNone/>
-              <a:defRPr sz="1200" b="1"/>
+              <a:defRPr sz="1600" b="1">
+                <a:solidFill>
+                  <a:srgbClr val="111111"/>
+                </a:solidFill>
+              </a:defRPr>
             </a:lvl8pPr>
-            <a:lvl9pPr marL="2743200" indent="0">
+            <a:lvl9pPr marL="3657600" indent="0">
               <a:buNone/>
-              <a:defRPr sz="1200" b="1"/>
+              <a:defRPr sz="1600" b="1">
+                <a:solidFill>
+                  <a:srgbClr val="111111"/>
+                </a:solidFill>
+              </a:defRPr>
             </a:lvl9pPr>
           </a:lstStyle>
           <a:p>
             <a:pPr lvl="0"/>
             <a:r>
-              <a:rPr lang="en-US"/>
+              <a:rPr lang="en-US" smtClean="0">
+                <a:solidFill>
+                  <a:srgbClr val="111111"/>
+                </a:solidFill>
+              </a:rPr>
               <a:t>Click to edit Master text styles</a:t>
             </a:r>
           </a:p>
@@ -1705,75 +2035,132 @@
         </p:nvSpPr>
         <p:spPr>
           <a:xfrm>
-            <a:off x="4645026" y="1631156"/>
-            <a:ext cx="4041775" cy="2963466"/>
+            <a:off x="4645025" y="2174875"/>
+            <a:ext cx="4041775" cy="3951288"/>
           </a:xfrm>
         </p:spPr>
         <p:txBody>
           <a:bodyPr/>
           <a:lstStyle>
             <a:lvl1pPr>
-              <a:defRPr sz="1800"/>
+              <a:defRPr sz="2400">
+                <a:solidFill>
+                  <a:srgbClr val="111111"/>
+                </a:solidFill>
+              </a:defRPr>
             </a:lvl1pPr>
             <a:lvl2pPr>
-              <a:defRPr sz="1500"/>
+              <a:defRPr sz="2000">
+                <a:solidFill>
+                  <a:srgbClr val="111111"/>
+                </a:solidFill>
+              </a:defRPr>
             </a:lvl2pPr>
             <a:lvl3pPr>
-              <a:defRPr sz="1350"/>
+              <a:defRPr sz="1800">
+                <a:solidFill>
+                  <a:srgbClr val="111111"/>
+                </a:solidFill>
+              </a:defRPr>
             </a:lvl3pPr>
             <a:lvl4pPr>
-              <a:defRPr sz="1200"/>
+              <a:defRPr sz="1600">
+                <a:solidFill>
+                  <a:srgbClr val="111111"/>
+                </a:solidFill>
+              </a:defRPr>
             </a:lvl4pPr>
             <a:lvl5pPr>
-              <a:defRPr sz="1200"/>
+              <a:defRPr sz="1600">
+                <a:solidFill>
+                  <a:srgbClr val="111111"/>
+                </a:solidFill>
+              </a:defRPr>
             </a:lvl5pPr>
             <a:lvl6pPr>
-              <a:defRPr sz="1200"/>
+              <a:defRPr sz="1600">
+                <a:solidFill>
+                  <a:srgbClr val="111111"/>
+                </a:solidFill>
+              </a:defRPr>
             </a:lvl6pPr>
             <a:lvl7pPr>
-              <a:defRPr sz="1200"/>
+              <a:defRPr sz="1600">
+                <a:solidFill>
+                  <a:srgbClr val="111111"/>
+                </a:solidFill>
+              </a:defRPr>
             </a:lvl7pPr>
             <a:lvl8pPr>
-              <a:defRPr sz="1200"/>
+              <a:defRPr sz="1600">
+                <a:solidFill>
+                  <a:srgbClr val="111111"/>
+                </a:solidFill>
+              </a:defRPr>
             </a:lvl8pPr>
             <a:lvl9pPr>
-              <a:defRPr sz="1200"/>
+              <a:defRPr sz="1600">
+                <a:solidFill>
+                  <a:srgbClr val="111111"/>
+                </a:solidFill>
+              </a:defRPr>
             </a:lvl9pPr>
           </a:lstStyle>
           <a:p>
             <a:pPr lvl="0"/>
             <a:r>
-              <a:rPr lang="en-US"/>
+              <a:rPr lang="en-US" smtClean="0">
+                <a:solidFill>
+                  <a:srgbClr val="111111"/>
+                </a:solidFill>
+              </a:rPr>
               <a:t>Click to edit Master text styles</a:t>
             </a:r>
           </a:p>
           <a:p>
             <a:pPr lvl="1"/>
             <a:r>
-              <a:rPr lang="en-US"/>
+              <a:rPr lang="en-US" smtClean="0">
+                <a:solidFill>
+                  <a:srgbClr val="111111"/>
+                </a:solidFill>
+              </a:rPr>
               <a:t>Second level</a:t>
             </a:r>
           </a:p>
           <a:p>
             <a:pPr lvl="2"/>
             <a:r>
-              <a:rPr lang="en-US"/>
+              <a:rPr lang="en-US" smtClean="0">
+                <a:solidFill>
+                  <a:srgbClr val="111111"/>
+                </a:solidFill>
+              </a:rPr>
               <a:t>Third level</a:t>
             </a:r>
           </a:p>
           <a:p>
             <a:pPr lvl="3"/>
             <a:r>
-              <a:rPr lang="en-US"/>
+              <a:rPr lang="en-US" smtClean="0">
+                <a:solidFill>
+                  <a:srgbClr val="111111"/>
+                </a:solidFill>
+              </a:rPr>
               <a:t>Fourth level</a:t>
             </a:r>
           </a:p>
           <a:p>
             <a:pPr lvl="4"/>
             <a:r>
-              <a:rPr lang="en-US"/>
+              <a:rPr lang="en-US" smtClean="0">
+                <a:solidFill>
+                  <a:srgbClr val="111111"/>
+                </a:solidFill>
+              </a:rPr>
               <a:t>Fifth level</a:t>
             </a:r>
+            <a:endParaRPr lang="en-US"/>
           </a:p>
         </p:txBody>
       </p:sp>
@@ -1792,9 +2179,13 @@
           <a:bodyPr/>
           <a:lstStyle/>
           <a:p>
-            <a:fld id="{241EB5C9-1307-BA42-ABA2-0BC069CD8E7F}" type="datetimeFigureOut">
-              <a:rPr lang="en-US" smtClean="0"/>
-              <a:t>1/2/22</a:t>
+            <a:fld id="{5BCAD085-E8A6-8845-BD4E-CB4CCA059FC4}" type="datetimeFigureOut">
+              <a:rPr lang="en-US" smtClean="0">
+                <a:solidFill>
+                  <a:srgbClr val="111111"/>
+                </a:solidFill>
+              </a:rPr>
+              <a:t>1/27/13</a:t>
             </a:fld>
             <a:endParaRPr lang="en-US"/>
           </a:p>
@@ -1834,8 +2225,12 @@
           <a:bodyPr/>
           <a:lstStyle/>
           <a:p>
-            <a:fld id="{C5EF2332-01BF-834F-8236-50238282D533}" type="slidenum">
-              <a:rPr lang="en-US" smtClean="0"/>
+            <a:fld id="{C1FF6DA9-008F-8B48-92A6-B652298478BF}" type="slidenum">
+              <a:rPr lang="en-US" smtClean="0">
+                <a:solidFill>
+                  <a:srgbClr val="111111"/>
+                </a:solidFill>
+              </a:rPr>
               <a:t>‹#›</a:t>
             </a:fld>
             <a:endParaRPr lang="en-US"/>
@@ -1845,7 +2240,7 @@
     </p:spTree>
     <p:extLst>
       <p:ext uri="{BB962C8B-B14F-4D97-AF65-F5344CB8AC3E}">
-        <p14:creationId xmlns:p14="http://schemas.microsoft.com/office/powerpoint/2010/main" val="2535793967"/>
+        <p14:creationId xmlns:p14="http://schemas.microsoft.com/office/powerpoint/2010/main" val="990158736"/>
       </p:ext>
     </p:extLst>
   </p:cSld>
@@ -1888,9 +2283,14 @@
           <a:lstStyle/>
           <a:p>
             <a:r>
-              <a:rPr lang="en-US"/>
+              <a:rPr lang="en-US" smtClean="0">
+                <a:solidFill>
+                  <a:srgbClr val="111111"/>
+                </a:solidFill>
+              </a:rPr>
               <a:t>Click to edit Master title style</a:t>
             </a:r>
+            <a:endParaRPr lang="en-US"/>
           </a:p>
         </p:txBody>
       </p:sp>
@@ -1909,9 +2309,13 @@
           <a:bodyPr/>
           <a:lstStyle/>
           <a:p>
-            <a:fld id="{241EB5C9-1307-BA42-ABA2-0BC069CD8E7F}" type="datetimeFigureOut">
-              <a:rPr lang="en-US" smtClean="0"/>
-              <a:t>1/2/22</a:t>
+            <a:fld id="{5BCAD085-E8A6-8845-BD4E-CB4CCA059FC4}" type="datetimeFigureOut">
+              <a:rPr lang="en-US" smtClean="0">
+                <a:solidFill>
+                  <a:srgbClr val="111111"/>
+                </a:solidFill>
+              </a:rPr>
+              <a:t>1/27/13</a:t>
             </a:fld>
             <a:endParaRPr lang="en-US"/>
           </a:p>
@@ -1951,8 +2355,12 @@
           <a:bodyPr/>
           <a:lstStyle/>
           <a:p>
-            <a:fld id="{C5EF2332-01BF-834F-8236-50238282D533}" type="slidenum">
-              <a:rPr lang="en-US" smtClean="0"/>
+            <a:fld id="{C1FF6DA9-008F-8B48-92A6-B652298478BF}" type="slidenum">
+              <a:rPr lang="en-US" smtClean="0">
+                <a:solidFill>
+                  <a:srgbClr val="111111"/>
+                </a:solidFill>
+              </a:rPr>
               <a:t>‹#›</a:t>
             </a:fld>
             <a:endParaRPr lang="en-US"/>
@@ -1962,7 +2370,7 @@
     </p:spTree>
     <p:extLst>
       <p:ext uri="{BB962C8B-B14F-4D97-AF65-F5344CB8AC3E}">
-        <p14:creationId xmlns:p14="http://schemas.microsoft.com/office/powerpoint/2010/main" val="3472721253"/>
+        <p14:creationId xmlns:p14="http://schemas.microsoft.com/office/powerpoint/2010/main" val="727027711"/>
       </p:ext>
     </p:extLst>
   </p:cSld>
@@ -2004,9 +2412,13 @@
           <a:bodyPr/>
           <a:lstStyle/>
           <a:p>
-            <a:fld id="{241EB5C9-1307-BA42-ABA2-0BC069CD8E7F}" type="datetimeFigureOut">
-              <a:rPr lang="en-US" smtClean="0"/>
-              <a:t>1/2/22</a:t>
+            <a:fld id="{5BCAD085-E8A6-8845-BD4E-CB4CCA059FC4}" type="datetimeFigureOut">
+              <a:rPr lang="en-US" smtClean="0">
+                <a:solidFill>
+                  <a:srgbClr val="111111"/>
+                </a:solidFill>
+              </a:rPr>
+              <a:t>1/27/13</a:t>
             </a:fld>
             <a:endParaRPr lang="en-US"/>
           </a:p>
@@ -2046,8 +2458,12 @@
           <a:bodyPr/>
           <a:lstStyle/>
           <a:p>
-            <a:fld id="{C5EF2332-01BF-834F-8236-50238282D533}" type="slidenum">
-              <a:rPr lang="en-US" smtClean="0"/>
+            <a:fld id="{C1FF6DA9-008F-8B48-92A6-B652298478BF}" type="slidenum">
+              <a:rPr lang="en-US" smtClean="0">
+                <a:solidFill>
+                  <a:srgbClr val="111111"/>
+                </a:solidFill>
+              </a:rPr>
               <a:t>‹#›</a:t>
             </a:fld>
             <a:endParaRPr lang="en-US"/>
@@ -2057,7 +2473,7 @@
     </p:spTree>
     <p:extLst>
       <p:ext uri="{BB962C8B-B14F-4D97-AF65-F5344CB8AC3E}">
-        <p14:creationId xmlns:p14="http://schemas.microsoft.com/office/powerpoint/2010/main" val="2130901097"/>
+        <p14:creationId xmlns:p14="http://schemas.microsoft.com/office/powerpoint/2010/main" val="1212999818"/>
       </p:ext>
     </p:extLst>
   </p:cSld>
@@ -2096,22 +2512,31 @@
         </p:nvSpPr>
         <p:spPr>
           <a:xfrm>
-            <a:off x="457201" y="204787"/>
-            <a:ext cx="3008313" cy="871538"/>
+            <a:off x="457200" y="273050"/>
+            <a:ext cx="3008313" cy="1162050"/>
           </a:xfrm>
         </p:spPr>
         <p:txBody>
           <a:bodyPr anchor="b"/>
           <a:lstStyle>
             <a:lvl1pPr algn="l">
-              <a:defRPr sz="1500" b="1"/>
+              <a:defRPr sz="2000" b="1">
+                <a:solidFill>
+                  <a:srgbClr val="111111"/>
+                </a:solidFill>
+              </a:defRPr>
             </a:lvl1pPr>
           </a:lstStyle>
           <a:p>
             <a:r>
-              <a:rPr lang="en-US"/>
+              <a:rPr lang="en-US" smtClean="0">
+                <a:solidFill>
+                  <a:srgbClr val="111111"/>
+                </a:solidFill>
+              </a:rPr>
               <a:t>Click to edit Master title style</a:t>
             </a:r>
+            <a:endParaRPr lang="en-US"/>
           </a:p>
         </p:txBody>
       </p:sp>
@@ -2127,75 +2552,132 @@
         </p:nvSpPr>
         <p:spPr>
           <a:xfrm>
-            <a:off x="3575050" y="204788"/>
-            <a:ext cx="5111750" cy="4389835"/>
+            <a:off x="3575050" y="273050"/>
+            <a:ext cx="5111750" cy="5853113"/>
           </a:xfrm>
         </p:spPr>
         <p:txBody>
           <a:bodyPr/>
           <a:lstStyle>
             <a:lvl1pPr>
-              <a:defRPr sz="2400"/>
+              <a:defRPr sz="3200">
+                <a:solidFill>
+                  <a:srgbClr val="111111"/>
+                </a:solidFill>
+              </a:defRPr>
             </a:lvl1pPr>
             <a:lvl2pPr>
-              <a:defRPr sz="2100"/>
+              <a:defRPr sz="2800">
+                <a:solidFill>
+                  <a:srgbClr val="111111"/>
+                </a:solidFill>
+              </a:defRPr>
             </a:lvl2pPr>
             <a:lvl3pPr>
-              <a:defRPr sz="1800"/>
+              <a:defRPr sz="2400">
+                <a:solidFill>
+                  <a:srgbClr val="111111"/>
+                </a:solidFill>
+              </a:defRPr>
             </a:lvl3pPr>
             <a:lvl4pPr>
-              <a:defRPr sz="1500"/>
+              <a:defRPr sz="2000">
+                <a:solidFill>
+                  <a:srgbClr val="111111"/>
+                </a:solidFill>
+              </a:defRPr>
             </a:lvl4pPr>
             <a:lvl5pPr>
-              <a:defRPr sz="1500"/>
+              <a:defRPr sz="2000">
+                <a:solidFill>
+                  <a:srgbClr val="111111"/>
+                </a:solidFill>
+              </a:defRPr>
             </a:lvl5pPr>
             <a:lvl6pPr>
-              <a:defRPr sz="1500"/>
+              <a:defRPr sz="2000">
+                <a:solidFill>
+                  <a:srgbClr val="111111"/>
+                </a:solidFill>
+              </a:defRPr>
             </a:lvl6pPr>
             <a:lvl7pPr>
-              <a:defRPr sz="1500"/>
+              <a:defRPr sz="2000">
+                <a:solidFill>
+                  <a:srgbClr val="111111"/>
+                </a:solidFill>
+              </a:defRPr>
             </a:lvl7pPr>
             <a:lvl8pPr>
-              <a:defRPr sz="1500"/>
+              <a:defRPr sz="2000">
+                <a:solidFill>
+                  <a:srgbClr val="111111"/>
+                </a:solidFill>
+              </a:defRPr>
             </a:lvl8pPr>
             <a:lvl9pPr>
-              <a:defRPr sz="1500"/>
+              <a:defRPr sz="2000">
+                <a:solidFill>
+                  <a:srgbClr val="111111"/>
+                </a:solidFill>
+              </a:defRPr>
             </a:lvl9pPr>
           </a:lstStyle>
           <a:p>
             <a:pPr lvl="0"/>
             <a:r>
-              <a:rPr lang="en-US"/>
+              <a:rPr lang="en-US" smtClean="0">
+                <a:solidFill>
+                  <a:srgbClr val="111111"/>
+                </a:solidFill>
+              </a:rPr>
               <a:t>Click to edit Master text styles</a:t>
             </a:r>
           </a:p>
           <a:p>
             <a:pPr lvl="1"/>
             <a:r>
-              <a:rPr lang="en-US"/>
+              <a:rPr lang="en-US" smtClean="0">
+                <a:solidFill>
+                  <a:srgbClr val="111111"/>
+                </a:solidFill>
+              </a:rPr>
               <a:t>Second level</a:t>
             </a:r>
           </a:p>
           <a:p>
             <a:pPr lvl="2"/>
             <a:r>
-              <a:rPr lang="en-US"/>
+              <a:rPr lang="en-US" smtClean="0">
+                <a:solidFill>
+                  <a:srgbClr val="111111"/>
+                </a:solidFill>
+              </a:rPr>
               <a:t>Third level</a:t>
             </a:r>
           </a:p>
           <a:p>
             <a:pPr lvl="3"/>
             <a:r>
-              <a:rPr lang="en-US"/>
+              <a:rPr lang="en-US" smtClean="0">
+                <a:solidFill>
+                  <a:srgbClr val="111111"/>
+                </a:solidFill>
+              </a:rPr>
               <a:t>Fourth level</a:t>
             </a:r>
           </a:p>
           <a:p>
             <a:pPr lvl="4"/>
             <a:r>
-              <a:rPr lang="en-US"/>
+              <a:rPr lang="en-US" smtClean="0">
+                <a:solidFill>
+                  <a:srgbClr val="111111"/>
+                </a:solidFill>
+              </a:rPr>
               <a:t>Fifth level</a:t>
             </a:r>
+            <a:endParaRPr lang="en-US"/>
           </a:p>
         </p:txBody>
       </p:sp>
@@ -2211,8 +2693,8 @@
         </p:nvSpPr>
         <p:spPr>
           <a:xfrm>
-            <a:off x="457201" y="1076326"/>
-            <a:ext cx="3008313" cy="3518297"/>
+            <a:off x="457200" y="1435100"/>
+            <a:ext cx="3008313" cy="4691063"/>
           </a:xfrm>
         </p:spPr>
         <p:txBody>
@@ -2220,45 +2702,85 @@
           <a:lstStyle>
             <a:lvl1pPr marL="0" indent="0">
               <a:buNone/>
-              <a:defRPr sz="1050"/>
+              <a:defRPr sz="1400">
+                <a:solidFill>
+                  <a:srgbClr val="111111"/>
+                </a:solidFill>
+              </a:defRPr>
             </a:lvl1pPr>
-            <a:lvl2pPr marL="342900" indent="0">
+            <a:lvl2pPr marL="457200" indent="0">
               <a:buNone/>
-              <a:defRPr sz="900"/>
+              <a:defRPr sz="1200">
+                <a:solidFill>
+                  <a:srgbClr val="111111"/>
+                </a:solidFill>
+              </a:defRPr>
             </a:lvl2pPr>
-            <a:lvl3pPr marL="685800" indent="0">
+            <a:lvl3pPr marL="914400" indent="0">
               <a:buNone/>
-              <a:defRPr sz="750"/>
+              <a:defRPr sz="1000">
+                <a:solidFill>
+                  <a:srgbClr val="111111"/>
+                </a:solidFill>
+              </a:defRPr>
             </a:lvl3pPr>
-            <a:lvl4pPr marL="1028700" indent="0">
+            <a:lvl4pPr marL="1371600" indent="0">
               <a:buNone/>
-              <a:defRPr sz="675"/>
+              <a:defRPr sz="900">
+                <a:solidFill>
+                  <a:srgbClr val="111111"/>
+                </a:solidFill>
+              </a:defRPr>
             </a:lvl4pPr>
-            <a:lvl5pPr marL="1371600" indent="0">
+            <a:lvl5pPr marL="1828800" indent="0">
               <a:buNone/>
-              <a:defRPr sz="675"/>
+              <a:defRPr sz="900">
+                <a:solidFill>
+                  <a:srgbClr val="111111"/>
+                </a:solidFill>
+              </a:defRPr>
             </a:lvl5pPr>
-            <a:lvl6pPr marL="1714500" indent="0">
+            <a:lvl6pPr marL="2286000" indent="0">
               <a:buNone/>
-              <a:defRPr sz="675"/>
+              <a:defRPr sz="900">
+                <a:solidFill>
+                  <a:srgbClr val="111111"/>
+                </a:solidFill>
+              </a:defRPr>
             </a:lvl6pPr>
-            <a:lvl7pPr marL="2057400" indent="0">
+            <a:lvl7pPr marL="2743200" indent="0">
               <a:buNone/>
-              <a:defRPr sz="675"/>
+              <a:defRPr sz="900">
+                <a:solidFill>
+                  <a:srgbClr val="111111"/>
+                </a:solidFill>
+              </a:defRPr>
             </a:lvl7pPr>
-            <a:lvl8pPr marL="2400300" indent="0">
+            <a:lvl8pPr marL="3200400" indent="0">
               <a:buNone/>
-              <a:defRPr sz="675"/>
+              <a:defRPr sz="900">
+                <a:solidFill>
+                  <a:srgbClr val="111111"/>
+                </a:solidFill>
+              </a:defRPr>
             </a:lvl8pPr>
-            <a:lvl9pPr marL="2743200" indent="0">
+            <a:lvl9pPr marL="3657600" indent="0">
               <a:buNone/>
-              <a:defRPr sz="675"/>
+              <a:defRPr sz="900">
+                <a:solidFill>
+                  <a:srgbClr val="111111"/>
+                </a:solidFill>
+              </a:defRPr>
             </a:lvl9pPr>
           </a:lstStyle>
           <a:p>
             <a:pPr lvl="0"/>
             <a:r>
-              <a:rPr lang="en-US"/>
+              <a:rPr lang="en-US" smtClean="0">
+                <a:solidFill>
+                  <a:srgbClr val="111111"/>
+                </a:solidFill>
+              </a:rPr>
               <a:t>Click to edit Master text styles</a:t>
             </a:r>
           </a:p>
@@ -2279,9 +2801,13 @@
           <a:bodyPr/>
           <a:lstStyle/>
           <a:p>
-            <a:fld id="{241EB5C9-1307-BA42-ABA2-0BC069CD8E7F}" type="datetimeFigureOut">
-              <a:rPr lang="en-US" smtClean="0"/>
-              <a:t>1/2/22</a:t>
+            <a:fld id="{5BCAD085-E8A6-8845-BD4E-CB4CCA059FC4}" type="datetimeFigureOut">
+              <a:rPr lang="en-US" smtClean="0">
+                <a:solidFill>
+                  <a:srgbClr val="111111"/>
+                </a:solidFill>
+              </a:rPr>
+              <a:t>1/27/13</a:t>
             </a:fld>
             <a:endParaRPr lang="en-US"/>
           </a:p>
@@ -2321,8 +2847,12 @@
           <a:bodyPr/>
           <a:lstStyle/>
           <a:p>
-            <a:fld id="{C5EF2332-01BF-834F-8236-50238282D533}" type="slidenum">
-              <a:rPr lang="en-US" smtClean="0"/>
+            <a:fld id="{C1FF6DA9-008F-8B48-92A6-B652298478BF}" type="slidenum">
+              <a:rPr lang="en-US" smtClean="0">
+                <a:solidFill>
+                  <a:srgbClr val="111111"/>
+                </a:solidFill>
+              </a:rPr>
               <a:t>‹#›</a:t>
             </a:fld>
             <a:endParaRPr lang="en-US"/>
@@ -2332,7 +2862,7 @@
     </p:spTree>
     <p:extLst>
       <p:ext uri="{BB962C8B-B14F-4D97-AF65-F5344CB8AC3E}">
-        <p14:creationId xmlns:p14="http://schemas.microsoft.com/office/powerpoint/2010/main" val="3540895647"/>
+        <p14:creationId xmlns:p14="http://schemas.microsoft.com/office/powerpoint/2010/main" val="1840726560"/>
       </p:ext>
     </p:extLst>
   </p:cSld>
@@ -2371,22 +2901,31 @@
         </p:nvSpPr>
         <p:spPr>
           <a:xfrm>
-            <a:off x="1792288" y="3600450"/>
-            <a:ext cx="5486400" cy="425054"/>
+            <a:off x="1792288" y="4800600"/>
+            <a:ext cx="5486400" cy="566738"/>
           </a:xfrm>
         </p:spPr>
         <p:txBody>
           <a:bodyPr anchor="b"/>
           <a:lstStyle>
             <a:lvl1pPr algn="l">
-              <a:defRPr sz="1500" b="1"/>
+              <a:defRPr sz="2000" b="1">
+                <a:solidFill>
+                  <a:srgbClr val="111111"/>
+                </a:solidFill>
+              </a:defRPr>
             </a:lvl1pPr>
           </a:lstStyle>
           <a:p>
             <a:r>
-              <a:rPr lang="en-US"/>
+              <a:rPr lang="en-US" smtClean="0">
+                <a:solidFill>
+                  <a:srgbClr val="111111"/>
+                </a:solidFill>
+              </a:rPr>
               <a:t>Click to edit Master title style</a:t>
             </a:r>
+            <a:endParaRPr lang="en-US"/>
           </a:p>
         </p:txBody>
       </p:sp>
@@ -2402,8 +2941,8 @@
         </p:nvSpPr>
         <p:spPr>
           <a:xfrm>
-            <a:off x="1792288" y="459581"/>
-            <a:ext cx="5486400" cy="3086100"/>
+            <a:off x="1792288" y="612775"/>
+            <a:ext cx="5486400" cy="4114800"/>
           </a:xfrm>
         </p:spPr>
         <p:txBody>
@@ -2411,39 +2950,75 @@
           <a:lstStyle>
             <a:lvl1pPr marL="0" indent="0">
               <a:buNone/>
-              <a:defRPr sz="2400"/>
+              <a:defRPr sz="3200">
+                <a:solidFill>
+                  <a:srgbClr val="111111"/>
+                </a:solidFill>
+              </a:defRPr>
             </a:lvl1pPr>
-            <a:lvl2pPr marL="342900" indent="0">
+            <a:lvl2pPr marL="457200" indent="0">
               <a:buNone/>
-              <a:defRPr sz="2100"/>
+              <a:defRPr sz="2800">
+                <a:solidFill>
+                  <a:srgbClr val="111111"/>
+                </a:solidFill>
+              </a:defRPr>
             </a:lvl2pPr>
-            <a:lvl3pPr marL="685800" indent="0">
+            <a:lvl3pPr marL="914400" indent="0">
               <a:buNone/>
-              <a:defRPr sz="1800"/>
+              <a:defRPr sz="2400">
+                <a:solidFill>
+                  <a:srgbClr val="111111"/>
+                </a:solidFill>
+              </a:defRPr>
             </a:lvl3pPr>
-            <a:lvl4pPr marL="1028700" indent="0">
+            <a:lvl4pPr marL="1371600" indent="0">
               <a:buNone/>
-              <a:defRPr sz="1500"/>
+              <a:defRPr sz="2000">
+                <a:solidFill>
+                  <a:srgbClr val="111111"/>
+                </a:solidFill>
+              </a:defRPr>
             </a:lvl4pPr>
-            <a:lvl5pPr marL="1371600" indent="0">
+            <a:lvl5pPr marL="1828800" indent="0">
               <a:buNone/>
-              <a:defRPr sz="1500"/>
+              <a:defRPr sz="2000">
+                <a:solidFill>
+                  <a:srgbClr val="111111"/>
+                </a:solidFill>
+              </a:defRPr>
             </a:lvl5pPr>
-            <a:lvl6pPr marL="1714500" indent="0">
+            <a:lvl6pPr marL="2286000" indent="0">
               <a:buNone/>
-              <a:defRPr sz="1500"/>
+              <a:defRPr sz="2000">
+                <a:solidFill>
+                  <a:srgbClr val="111111"/>
+                </a:solidFill>
+              </a:defRPr>
             </a:lvl6pPr>
-            <a:lvl7pPr marL="2057400" indent="0">
+            <a:lvl7pPr marL="2743200" indent="0">
               <a:buNone/>
-              <a:defRPr sz="1500"/>
+              <a:defRPr sz="2000">
+                <a:solidFill>
+                  <a:srgbClr val="111111"/>
+                </a:solidFill>
+              </a:defRPr>
             </a:lvl7pPr>
-            <a:lvl8pPr marL="2400300" indent="0">
+            <a:lvl8pPr marL="3200400" indent="0">
               <a:buNone/>
-              <a:defRPr sz="1500"/>
+              <a:defRPr sz="2000">
+                <a:solidFill>
+                  <a:srgbClr val="111111"/>
+                </a:solidFill>
+              </a:defRPr>
             </a:lvl8pPr>
-            <a:lvl9pPr marL="2743200" indent="0">
+            <a:lvl9pPr marL="3657600" indent="0">
               <a:buNone/>
-              <a:defRPr sz="1500"/>
+              <a:defRPr sz="2000">
+                <a:solidFill>
+                  <a:srgbClr val="111111"/>
+                </a:solidFill>
+              </a:defRPr>
             </a:lvl9pPr>
           </a:lstStyle>
           <a:p>
@@ -2463,8 +3038,8 @@
         </p:nvSpPr>
         <p:spPr>
           <a:xfrm>
-            <a:off x="1792288" y="4025503"/>
-            <a:ext cx="5486400" cy="603647"/>
+            <a:off x="1792288" y="5367338"/>
+            <a:ext cx="5486400" cy="804862"/>
           </a:xfrm>
         </p:spPr>
         <p:txBody>
@@ -2472,45 +3047,85 @@
           <a:lstStyle>
             <a:lvl1pPr marL="0" indent="0">
               <a:buNone/>
-              <a:defRPr sz="1050"/>
+              <a:defRPr sz="1400">
+                <a:solidFill>
+                  <a:srgbClr val="111111"/>
+                </a:solidFill>
+              </a:defRPr>
             </a:lvl1pPr>
-            <a:lvl2pPr marL="342900" indent="0">
+            <a:lvl2pPr marL="457200" indent="0">
               <a:buNone/>
-              <a:defRPr sz="900"/>
+              <a:defRPr sz="1200">
+                <a:solidFill>
+                  <a:srgbClr val="111111"/>
+                </a:solidFill>
+              </a:defRPr>
             </a:lvl2pPr>
-            <a:lvl3pPr marL="685800" indent="0">
+            <a:lvl3pPr marL="914400" indent="0">
               <a:buNone/>
-              <a:defRPr sz="750"/>
+              <a:defRPr sz="1000">
+                <a:solidFill>
+                  <a:srgbClr val="111111"/>
+                </a:solidFill>
+              </a:defRPr>
             </a:lvl3pPr>
-            <a:lvl4pPr marL="1028700" indent="0">
+            <a:lvl4pPr marL="1371600" indent="0">
               <a:buNone/>
-              <a:defRPr sz="675"/>
+              <a:defRPr sz="900">
+                <a:solidFill>
+                  <a:srgbClr val="111111"/>
+                </a:solidFill>
+              </a:defRPr>
             </a:lvl4pPr>
-            <a:lvl5pPr marL="1371600" indent="0">
+            <a:lvl5pPr marL="1828800" indent="0">
               <a:buNone/>
-              <a:defRPr sz="675"/>
+              <a:defRPr sz="900">
+                <a:solidFill>
+                  <a:srgbClr val="111111"/>
+                </a:solidFill>
+              </a:defRPr>
             </a:lvl5pPr>
-            <a:lvl6pPr marL="1714500" indent="0">
+            <a:lvl6pPr marL="2286000" indent="0">
               <a:buNone/>
-              <a:defRPr sz="675"/>
+              <a:defRPr sz="900">
+                <a:solidFill>
+                  <a:srgbClr val="111111"/>
+                </a:solidFill>
+              </a:defRPr>
             </a:lvl6pPr>
-            <a:lvl7pPr marL="2057400" indent="0">
+            <a:lvl7pPr marL="2743200" indent="0">
               <a:buNone/>
-              <a:defRPr sz="675"/>
+              <a:defRPr sz="900">
+                <a:solidFill>
+                  <a:srgbClr val="111111"/>
+                </a:solidFill>
+              </a:defRPr>
             </a:lvl7pPr>
-            <a:lvl8pPr marL="2400300" indent="0">
+            <a:lvl8pPr marL="3200400" indent="0">
               <a:buNone/>
-              <a:defRPr sz="675"/>
+              <a:defRPr sz="900">
+                <a:solidFill>
+                  <a:srgbClr val="111111"/>
+                </a:solidFill>
+              </a:defRPr>
             </a:lvl8pPr>
-            <a:lvl9pPr marL="2743200" indent="0">
+            <a:lvl9pPr marL="3657600" indent="0">
               <a:buNone/>
-              <a:defRPr sz="675"/>
+              <a:defRPr sz="900">
+                <a:solidFill>
+                  <a:srgbClr val="111111"/>
+                </a:solidFill>
+              </a:defRPr>
             </a:lvl9pPr>
           </a:lstStyle>
           <a:p>
             <a:pPr lvl="0"/>
             <a:r>
-              <a:rPr lang="en-US"/>
+              <a:rPr lang="en-US" smtClean="0">
+                <a:solidFill>
+                  <a:srgbClr val="111111"/>
+                </a:solidFill>
+              </a:rPr>
               <a:t>Click to edit Master text styles</a:t>
             </a:r>
           </a:p>
@@ -2531,9 +3146,13 @@
           <a:bodyPr/>
           <a:lstStyle/>
           <a:p>
-            <a:fld id="{241EB5C9-1307-BA42-ABA2-0BC069CD8E7F}" type="datetimeFigureOut">
-              <a:rPr lang="en-US" smtClean="0"/>
-              <a:t>1/2/22</a:t>
+            <a:fld id="{5BCAD085-E8A6-8845-BD4E-CB4CCA059FC4}" type="datetimeFigureOut">
+              <a:rPr lang="en-US" smtClean="0">
+                <a:solidFill>
+                  <a:srgbClr val="111111"/>
+                </a:solidFill>
+              </a:rPr>
+              <a:t>1/27/13</a:t>
             </a:fld>
             <a:endParaRPr lang="en-US"/>
           </a:p>
@@ -2573,8 +3192,12 @@
           <a:bodyPr/>
           <a:lstStyle/>
           <a:p>
-            <a:fld id="{C5EF2332-01BF-834F-8236-50238282D533}" type="slidenum">
-              <a:rPr lang="en-US" smtClean="0"/>
+            <a:fld id="{C1FF6DA9-008F-8B48-92A6-B652298478BF}" type="slidenum">
+              <a:rPr lang="en-US" smtClean="0">
+                <a:solidFill>
+                  <a:srgbClr val="111111"/>
+                </a:solidFill>
+              </a:rPr>
               <a:t>‹#›</a:t>
             </a:fld>
             <a:endParaRPr lang="en-US"/>
@@ -2584,7 +3207,7 @@
     </p:spTree>
     <p:extLst>
       <p:ext uri="{BB962C8B-B14F-4D97-AF65-F5344CB8AC3E}">
-        <p14:creationId xmlns:p14="http://schemas.microsoft.com/office/powerpoint/2010/main" val="3566899855"/>
+        <p14:creationId xmlns:p14="http://schemas.microsoft.com/office/powerpoint/2010/main" val="3889236939"/>
       </p:ext>
     </p:extLst>
   </p:cSld>
@@ -2598,9 +3221,12 @@
 <p:sldMaster xmlns:a="http://schemas.openxmlformats.org/drawingml/2006/main" xmlns:p="http://schemas.openxmlformats.org/presentationml/2006/main" xmlns:r="http://schemas.openxmlformats.org/officeDocument/2006/relationships">
   <p:cSld>
     <p:bg>
-      <p:bgRef idx="1001">
-        <a:schemeClr val="bg1"/>
-      </p:bgRef>
+      <p:bgPr>
+        <a:solidFill>
+          <a:srgbClr val="FFFFFF"/>
+        </a:solidFill>
+        <a:effectLst/>
+      </p:bgPr>
     </p:bg>
     <p:spTree>
       <p:nvGrpSpPr>
@@ -2628,8 +3254,8 @@
         </p:nvSpPr>
         <p:spPr>
           <a:xfrm>
-            <a:off x="457200" y="205979"/>
-            <a:ext cx="8229600" cy="857250"/>
+            <a:off x="457200" y="274638"/>
+            <a:ext cx="8229600" cy="1143000"/>
           </a:xfrm>
           <a:prstGeom prst="rect">
             <a:avLst/>
@@ -2642,9 +3268,14 @@
           <a:lstStyle/>
           <a:p>
             <a:r>
-              <a:rPr lang="en-US"/>
+              <a:rPr lang="en-US" smtClean="0">
+                <a:solidFill>
+                  <a:srgbClr val="111111"/>
+                </a:solidFill>
+              </a:rPr>
               <a:t>Click to edit Master title style</a:t>
             </a:r>
+            <a:endParaRPr lang="en-US"/>
           </a:p>
         </p:txBody>
       </p:sp>
@@ -2660,8 +3291,8 @@
         </p:nvSpPr>
         <p:spPr>
           <a:xfrm>
-            <a:off x="457200" y="1200151"/>
-            <a:ext cx="8229600" cy="3394472"/>
+            <a:off x="457200" y="1600200"/>
+            <a:ext cx="8229600" cy="4525963"/>
           </a:xfrm>
           <a:prstGeom prst="rect">
             <a:avLst/>
@@ -2675,37 +3306,58 @@
           <a:p>
             <a:pPr lvl="0"/>
             <a:r>
-              <a:rPr lang="en-US"/>
+              <a:rPr lang="en-US" smtClean="0">
+                <a:solidFill>
+                  <a:srgbClr val="111111"/>
+                </a:solidFill>
+              </a:rPr>
               <a:t>Click to edit Master text styles</a:t>
             </a:r>
           </a:p>
           <a:p>
             <a:pPr lvl="1"/>
             <a:r>
-              <a:rPr lang="en-US"/>
+              <a:rPr lang="en-US" smtClean="0">
+                <a:solidFill>
+                  <a:srgbClr val="111111"/>
+                </a:solidFill>
+              </a:rPr>
               <a:t>Second level</a:t>
             </a:r>
           </a:p>
           <a:p>
             <a:pPr lvl="2"/>
             <a:r>
-              <a:rPr lang="en-US"/>
+              <a:rPr lang="en-US" smtClean="0">
+                <a:solidFill>
+                  <a:srgbClr val="111111"/>
+                </a:solidFill>
+              </a:rPr>
               <a:t>Third level</a:t>
             </a:r>
           </a:p>
           <a:p>
             <a:pPr lvl="3"/>
             <a:r>
-              <a:rPr lang="en-US"/>
+              <a:rPr lang="en-US" smtClean="0">
+                <a:solidFill>
+                  <a:srgbClr val="111111"/>
+                </a:solidFill>
+              </a:rPr>
               <a:t>Fourth level</a:t>
             </a:r>
           </a:p>
           <a:p>
             <a:pPr lvl="4"/>
             <a:r>
-              <a:rPr lang="en-US"/>
+              <a:rPr lang="en-US" smtClean="0">
+                <a:solidFill>
+                  <a:srgbClr val="111111"/>
+                </a:solidFill>
+              </a:rPr>
               <a:t>Fifth level</a:t>
             </a:r>
+            <a:endParaRPr lang="en-US"/>
           </a:p>
         </p:txBody>
       </p:sp>
@@ -2721,8 +3373,8 @@
         </p:nvSpPr>
         <p:spPr>
           <a:xfrm>
-            <a:off x="457200" y="4767263"/>
-            <a:ext cx="2133600" cy="273844"/>
+            <a:off x="457200" y="6356350"/>
+            <a:ext cx="2133600" cy="365125"/>
           </a:xfrm>
           <a:prstGeom prst="rect">
             <a:avLst/>
@@ -2732,19 +3384,21 @@
           <a:bodyPr anchor="ctr" bIns="45720" lIns="91440" rIns="91440" rtlCol="0" tIns="45720" vert="horz"/>
           <a:lstStyle>
             <a:lvl1pPr algn="l">
-              <a:defRPr sz="900">
-                <a:solidFill>
-                  <a:schemeClr val="tx1">
-                    <a:tint val="75000"/>
-                  </a:schemeClr>
+              <a:defRPr sz="1200">
+                <a:solidFill>
+                  <a:srgbClr val="111111"/>
                 </a:solidFill>
               </a:defRPr>
             </a:lvl1pPr>
           </a:lstStyle>
           <a:p>
-            <a:fld id="{241EB5C9-1307-BA42-ABA2-0BC069CD8E7F}" type="datetimeFigureOut">
-              <a:rPr lang="en-US" smtClean="0"/>
-              <a:t>1/2/22</a:t>
+            <a:fld id="{5BCAD085-E8A6-8845-BD4E-CB4CCA059FC4}" type="datetimeFigureOut">
+              <a:rPr lang="en-US" smtClean="0">
+                <a:solidFill>
+                  <a:srgbClr val="111111"/>
+                </a:solidFill>
+              </a:rPr>
+              <a:t>1/27/13</a:t>
             </a:fld>
             <a:endParaRPr lang="en-US"/>
           </a:p>
@@ -2762,8 +3416,8 @@
         </p:nvSpPr>
         <p:spPr>
           <a:xfrm>
-            <a:off x="3124200" y="4767263"/>
-            <a:ext cx="2895600" cy="273844"/>
+            <a:off x="3124200" y="6356350"/>
+            <a:ext cx="2895600" cy="365125"/>
           </a:xfrm>
           <a:prstGeom prst="rect">
             <a:avLst/>
@@ -2773,11 +3427,9 @@
           <a:bodyPr anchor="ctr" bIns="45720" lIns="91440" rIns="91440" rtlCol="0" tIns="45720" vert="horz"/>
           <a:lstStyle>
             <a:lvl1pPr algn="ctr">
-              <a:defRPr sz="900">
-                <a:solidFill>
-                  <a:schemeClr val="tx1">
-                    <a:tint val="75000"/>
-                  </a:schemeClr>
+              <a:defRPr sz="1200">
+                <a:solidFill>
+                  <a:srgbClr val="111111"/>
                 </a:solidFill>
               </a:defRPr>
             </a:lvl1pPr>
@@ -2799,8 +3451,8 @@
         </p:nvSpPr>
         <p:spPr>
           <a:xfrm>
-            <a:off x="6553200" y="4767263"/>
-            <a:ext cx="2133600" cy="273844"/>
+            <a:off x="6553200" y="6356350"/>
+            <a:ext cx="2133600" cy="365125"/>
           </a:xfrm>
           <a:prstGeom prst="rect">
             <a:avLst/>
@@ -2810,18 +3462,20 @@
           <a:bodyPr anchor="ctr" bIns="45720" lIns="91440" rIns="91440" rtlCol="0" tIns="45720" vert="horz"/>
           <a:lstStyle>
             <a:lvl1pPr algn="r">
-              <a:defRPr sz="900">
-                <a:solidFill>
-                  <a:schemeClr val="tx1">
-                    <a:tint val="75000"/>
-                  </a:schemeClr>
+              <a:defRPr sz="1200">
+                <a:solidFill>
+                  <a:srgbClr val="111111"/>
                 </a:solidFill>
               </a:defRPr>
             </a:lvl1pPr>
           </a:lstStyle>
           <a:p>
-            <a:fld id="{C5EF2332-01BF-834F-8236-50238282D533}" type="slidenum">
-              <a:rPr lang="en-US" smtClean="0"/>
+            <a:fld id="{C1FF6DA9-008F-8B48-92A6-B652298478BF}" type="slidenum">
+              <a:rPr lang="en-US" smtClean="0">
+                <a:solidFill>
+                  <a:srgbClr val="111111"/>
+                </a:solidFill>
+              </a:rPr>
               <a:t>‹#›</a:t>
             </a:fld>
             <a:endParaRPr lang="en-US"/>
@@ -2831,7 +3485,7 @@
     </p:spTree>
     <p:extLst>
       <p:ext uri="{BB962C8B-B14F-4D97-AF65-F5344CB8AC3E}">
-        <p14:creationId xmlns:p14="http://schemas.microsoft.com/office/powerpoint/2010/main" val="3676200875"/>
+        <p14:creationId xmlns:p14="http://schemas.microsoft.com/office/powerpoint/2010/main" val="2209977519"/>
       </p:ext>
     </p:extLst>
   </p:cSld>
@@ -2851,250 +3505,254 @@
   </p:sldLayoutIdLst>
   <p:txStyles>
     <p:titleStyle>
-      <a:lvl1pPr algn="ctr" defTabSz="342900" eaLnBrk="1" hangingPunct="1" latinLnBrk="0" rtl="0">
+      <a:lvl1pPr algn="ctr" defTabSz="457200" eaLnBrk="1" hangingPunct="1" latinLnBrk="0" rtl="0">
         <a:spcBef>
           <a:spcPct val="0"/>
         </a:spcBef>
         <a:buNone/>
-        <a:defRPr kern="1200" sz="3300">
-          <a:solidFill>
-            <a:schemeClr val="tx1"/>
-          </a:solidFill>
-          <a:latin typeface="+mj-lt"/>
+        <a:defRPr kern="1200" sz="4400">
+          <a:latin typeface="Cambria"/>
           <a:ea typeface="+mj-ea"/>
           <a:cs typeface="+mj-cs"/>
+          <a:solidFill>
+            <a:srgbClr val="111111"/>
+          </a:solidFill>
         </a:defRPr>
       </a:lvl1pPr>
     </p:titleStyle>
     <p:bodyStyle>
-      <a:lvl1pPr algn="l" defTabSz="342900" eaLnBrk="1" hangingPunct="1" indent="-342900" latinLnBrk="0" marL="342900" rtl="0">
+      <a:lvl1pPr algn="l" defTabSz="457200" eaLnBrk="1" hangingPunct="1" indent="-342900" latinLnBrk="0" marL="342900" rtl="0">
+        <a:spcBef>
+          <a:spcPct val="20000"/>
+        </a:spcBef>
+        <a:buFont typeface="Arial"/>
+        <a:buChar char="•"/>
+        <a:defRPr kern="1200" sz="3200">
+          <a:latin typeface="Cambria"/>
+          <a:ea typeface="+mn-ea"/>
+          <a:cs typeface="+mn-cs"/>
+          <a:solidFill>
+            <a:srgbClr val="111111"/>
+          </a:solidFill>
+        </a:defRPr>
+      </a:lvl1pPr>
+      <a:lvl2pPr algn="l" defTabSz="457200" eaLnBrk="1" hangingPunct="1" indent="-285750" latinLnBrk="0" marL="742950" rtl="0">
+        <a:spcBef>
+          <a:spcPct val="20000"/>
+        </a:spcBef>
+        <a:buFont typeface="Arial"/>
+        <a:buChar char="–"/>
+        <a:defRPr kern="1200" sz="2800">
+          <a:latin typeface="Cambria"/>
+          <a:ea typeface="+mn-ea"/>
+          <a:cs typeface="+mn-cs"/>
+          <a:solidFill>
+            <a:srgbClr val="111111"/>
+          </a:solidFill>
+        </a:defRPr>
+      </a:lvl2pPr>
+      <a:lvl3pPr algn="l" defTabSz="457200" eaLnBrk="1" hangingPunct="1" indent="-228600" latinLnBrk="0" marL="1143000" rtl="0">
         <a:spcBef>
           <a:spcPct val="20000"/>
         </a:spcBef>
         <a:buFont typeface="Arial"/>
         <a:buChar char="•"/>
         <a:defRPr kern="1200" sz="2400">
-          <a:solidFill>
-            <a:schemeClr val="tx1"/>
-          </a:solidFill>
-          <a:latin typeface="+mn-lt"/>
+          <a:latin typeface="Cambria"/>
           <a:ea typeface="+mn-ea"/>
           <a:cs typeface="+mn-cs"/>
+          <a:solidFill>
+            <a:srgbClr val="111111"/>
+          </a:solidFill>
         </a:defRPr>
-      </a:lvl1pPr>
-      <a:lvl2pPr algn="l" defTabSz="342900" eaLnBrk="1" hangingPunct="1" indent="-342900" latinLnBrk="0" marL="685800" rtl="0">
+      </a:lvl3pPr>
+      <a:lvl4pPr algn="l" defTabSz="457200" eaLnBrk="1" hangingPunct="1" indent="-228600" latinLnBrk="0" marL="1600200" rtl="0">
         <a:spcBef>
           <a:spcPct val="20000"/>
         </a:spcBef>
         <a:buFont typeface="Arial"/>
         <a:buChar char="–"/>
-        <a:defRPr kern="1200" sz="2100">
-          <a:solidFill>
-            <a:schemeClr val="tx1"/>
-          </a:solidFill>
-          <a:latin typeface="+mn-lt"/>
+        <a:defRPr kern="1200" sz="2000">
+          <a:latin typeface="Cambria"/>
           <a:ea typeface="+mn-ea"/>
           <a:cs typeface="+mn-cs"/>
+          <a:solidFill>
+            <a:srgbClr val="111111"/>
+          </a:solidFill>
         </a:defRPr>
-      </a:lvl2pPr>
-      <a:lvl3pPr algn="l" defTabSz="342900" eaLnBrk="1" hangingPunct="1" indent="-342900" latinLnBrk="0" marL="1028700" rtl="0">
+      </a:lvl4pPr>
+      <a:lvl5pPr algn="l" defTabSz="457200" eaLnBrk="1" hangingPunct="1" indent="-228600" latinLnBrk="0" marL="2057400" rtl="0">
+        <a:spcBef>
+          <a:spcPct val="20000"/>
+        </a:spcBef>
+        <a:buFont typeface="Arial"/>
+        <a:buChar char="»"/>
+        <a:defRPr kern="1200" sz="2000">
+          <a:latin typeface="Cambria"/>
+          <a:ea typeface="+mn-ea"/>
+          <a:cs typeface="+mn-cs"/>
+          <a:solidFill>
+            <a:srgbClr val="111111"/>
+          </a:solidFill>
+        </a:defRPr>
+      </a:lvl5pPr>
+      <a:lvl6pPr algn="l" defTabSz="457200" eaLnBrk="1" hangingPunct="1" indent="-228600" latinLnBrk="0" marL="2514600" rtl="0">
         <a:spcBef>
           <a:spcPct val="20000"/>
         </a:spcBef>
         <a:buFont typeface="Arial"/>
         <a:buChar char="•"/>
-        <a:defRPr kern="1200" sz="1800">
-          <a:solidFill>
-            <a:schemeClr val="tx1"/>
-          </a:solidFill>
-          <a:latin typeface="+mn-lt"/>
+        <a:defRPr kern="1200" sz="2000">
+          <a:latin typeface="Cambria"/>
           <a:ea typeface="+mn-ea"/>
           <a:cs typeface="+mn-cs"/>
+          <a:solidFill>
+            <a:srgbClr val="111111"/>
+          </a:solidFill>
         </a:defRPr>
-      </a:lvl3pPr>
-      <a:lvl4pPr algn="l" defTabSz="342900" eaLnBrk="1" hangingPunct="1" indent="-342900" latinLnBrk="0" marL="1371600" rtl="0">
-        <a:spcBef>
-          <a:spcPct val="20000"/>
-        </a:spcBef>
-        <a:buFont typeface="Arial"/>
-        <a:buChar char="–"/>
-        <a:defRPr kern="1200" sz="1500">
-          <a:solidFill>
-            <a:schemeClr val="tx1"/>
-          </a:solidFill>
-          <a:latin typeface="+mn-lt"/>
-          <a:ea typeface="+mn-ea"/>
-          <a:cs typeface="+mn-cs"/>
-        </a:defRPr>
-      </a:lvl4pPr>
-      <a:lvl5pPr algn="l" defTabSz="342900" eaLnBrk="1" hangingPunct="1" indent="-342900" latinLnBrk="0" marL="1714500" rtl="0">
-        <a:spcBef>
-          <a:spcPct val="20000"/>
-        </a:spcBef>
-        <a:buFont typeface="Arial"/>
-        <a:buChar char="»"/>
-        <a:defRPr kern="1200" sz="1500">
-          <a:solidFill>
-            <a:schemeClr val="tx1"/>
-          </a:solidFill>
-          <a:latin typeface="+mn-lt"/>
-          <a:ea typeface="+mn-ea"/>
-          <a:cs typeface="+mn-cs"/>
-        </a:defRPr>
-      </a:lvl5pPr>
-      <a:lvl6pPr algn="l" defTabSz="342900" eaLnBrk="1" hangingPunct="1" indent="-342900" latinLnBrk="0" marL="2057400" rtl="0">
+      </a:lvl6pPr>
+      <a:lvl7pPr algn="l" defTabSz="457200" eaLnBrk="1" hangingPunct="1" indent="-228600" latinLnBrk="0" marL="2971800" rtl="0">
         <a:spcBef>
           <a:spcPct val="20000"/>
         </a:spcBef>
         <a:buFont typeface="Arial"/>
         <a:buChar char="•"/>
-        <a:defRPr kern="1200" sz="1500">
-          <a:solidFill>
-            <a:schemeClr val="tx1"/>
-          </a:solidFill>
-          <a:latin typeface="+mn-lt"/>
+        <a:defRPr kern="1200" sz="2000">
+          <a:latin typeface="Cambria"/>
           <a:ea typeface="+mn-ea"/>
           <a:cs typeface="+mn-cs"/>
+          <a:solidFill>
+            <a:srgbClr val="111111"/>
+          </a:solidFill>
         </a:defRPr>
-      </a:lvl6pPr>
-      <a:lvl7pPr algn="l" defTabSz="342900" eaLnBrk="1" hangingPunct="1" indent="-342900" latinLnBrk="0" marL="2400300" rtl="0">
+      </a:lvl7pPr>
+      <a:lvl8pPr algn="l" defTabSz="457200" eaLnBrk="1" hangingPunct="1" indent="-228600" latinLnBrk="0" marL="3429000" rtl="0">
         <a:spcBef>
           <a:spcPct val="20000"/>
         </a:spcBef>
         <a:buFont typeface="Arial"/>
         <a:buChar char="•"/>
-        <a:defRPr kern="1200" sz="1500">
-          <a:solidFill>
-            <a:schemeClr val="tx1"/>
-          </a:solidFill>
-          <a:latin typeface="+mn-lt"/>
+        <a:defRPr kern="1200" sz="2000">
+          <a:latin typeface="Cambria"/>
           <a:ea typeface="+mn-ea"/>
           <a:cs typeface="+mn-cs"/>
+          <a:solidFill>
+            <a:srgbClr val="111111"/>
+          </a:solidFill>
         </a:defRPr>
-      </a:lvl7pPr>
-      <a:lvl8pPr algn="l" defTabSz="342900" eaLnBrk="1" hangingPunct="1" indent="-342900" latinLnBrk="0" marL="2743200" rtl="0">
+      </a:lvl8pPr>
+      <a:lvl9pPr algn="l" defTabSz="457200" eaLnBrk="1" hangingPunct="1" indent="-228600" latinLnBrk="0" marL="3886200" rtl="0">
         <a:spcBef>
           <a:spcPct val="20000"/>
         </a:spcBef>
         <a:buFont typeface="Arial"/>
         <a:buChar char="•"/>
-        <a:defRPr kern="1200" sz="1500">
-          <a:solidFill>
-            <a:schemeClr val="tx1"/>
-          </a:solidFill>
-          <a:latin typeface="+mn-lt"/>
+        <a:defRPr kern="1200" sz="2000">
+          <a:latin typeface="Cambria"/>
           <a:ea typeface="+mn-ea"/>
           <a:cs typeface="+mn-cs"/>
-        </a:defRPr>
-      </a:lvl8pPr>
-      <a:lvl9pPr algn="l" defTabSz="342900" eaLnBrk="1" hangingPunct="1" indent="-342900" latinLnBrk="0" marL="3086100" rtl="0">
-        <a:spcBef>
-          <a:spcPct val="20000"/>
-        </a:spcBef>
-        <a:buFont typeface="Arial"/>
-        <a:buChar char="•"/>
-        <a:defRPr kern="1200" sz="1500">
           <a:solidFill>
-            <a:schemeClr val="tx1"/>
+            <a:srgbClr val="111111"/>
           </a:solidFill>
-          <a:latin typeface="+mn-lt"/>
-          <a:ea typeface="+mn-ea"/>
-          <a:cs typeface="+mn-cs"/>
         </a:defRPr>
       </a:lvl9pPr>
     </p:bodyStyle>
     <p:otherStyle>
       <a:defPPr>
-        <a:defRPr lang="en-US"/>
+        <a:defRPr lang="en-US">
+          <a:solidFill>
+            <a:srgbClr val="111111"/>
+          </a:solidFill>
+        </a:defRPr>
       </a:defPPr>
-      <a:lvl1pPr algn="l" defTabSz="342900" eaLnBrk="1" hangingPunct="1" latinLnBrk="0" marL="0" rtl="0">
-        <a:defRPr kern="1200" sz="1350">
-          <a:solidFill>
-            <a:schemeClr val="tx1"/>
-          </a:solidFill>
-          <a:latin typeface="+mn-lt"/>
+      <a:lvl1pPr algn="l" defTabSz="457200" eaLnBrk="1" hangingPunct="1" latinLnBrk="0" marL="0" rtl="0">
+        <a:defRPr kern="1200" sz="1800">
+          <a:latin typeface="Cambria"/>
           <a:ea typeface="+mn-ea"/>
           <a:cs typeface="+mn-cs"/>
+          <a:solidFill>
+            <a:srgbClr val="111111"/>
+          </a:solidFill>
         </a:defRPr>
       </a:lvl1pPr>
-      <a:lvl2pPr algn="l" defTabSz="342900" eaLnBrk="1" hangingPunct="1" latinLnBrk="0" marL="342900" rtl="0">
-        <a:defRPr kern="1200" sz="1350">
-          <a:solidFill>
-            <a:schemeClr val="tx1"/>
-          </a:solidFill>
-          <a:latin typeface="+mn-lt"/>
+      <a:lvl2pPr algn="l" defTabSz="457200" eaLnBrk="1" hangingPunct="1" latinLnBrk="0" marL="457200" rtl="0">
+        <a:defRPr kern="1200" sz="1800">
+          <a:latin typeface="Cambria"/>
           <a:ea typeface="+mn-ea"/>
           <a:cs typeface="+mn-cs"/>
+          <a:solidFill>
+            <a:srgbClr val="111111"/>
+          </a:solidFill>
         </a:defRPr>
       </a:lvl2pPr>
-      <a:lvl3pPr algn="l" defTabSz="342900" eaLnBrk="1" hangingPunct="1" latinLnBrk="0" marL="685800" rtl="0">
-        <a:defRPr kern="1200" sz="1350">
-          <a:solidFill>
-            <a:schemeClr val="tx1"/>
-          </a:solidFill>
-          <a:latin typeface="+mn-lt"/>
+      <a:lvl3pPr algn="l" defTabSz="457200" eaLnBrk="1" hangingPunct="1" latinLnBrk="0" marL="914400" rtl="0">
+        <a:defRPr kern="1200" sz="1800">
+          <a:latin typeface="Cambria"/>
           <a:ea typeface="+mn-ea"/>
           <a:cs typeface="+mn-cs"/>
+          <a:solidFill>
+            <a:srgbClr val="111111"/>
+          </a:solidFill>
         </a:defRPr>
       </a:lvl3pPr>
-      <a:lvl4pPr algn="l" defTabSz="342900" eaLnBrk="1" hangingPunct="1" latinLnBrk="0" marL="1028700" rtl="0">
-        <a:defRPr kern="1200" sz="1350">
-          <a:solidFill>
-            <a:schemeClr val="tx1"/>
-          </a:solidFill>
-          <a:latin typeface="+mn-lt"/>
+      <a:lvl4pPr algn="l" defTabSz="457200" eaLnBrk="1" hangingPunct="1" latinLnBrk="0" marL="1371600" rtl="0">
+        <a:defRPr kern="1200" sz="1800">
+          <a:latin typeface="Cambria"/>
           <a:ea typeface="+mn-ea"/>
           <a:cs typeface="+mn-cs"/>
+          <a:solidFill>
+            <a:srgbClr val="111111"/>
+          </a:solidFill>
         </a:defRPr>
       </a:lvl4pPr>
-      <a:lvl5pPr algn="l" defTabSz="342900" eaLnBrk="1" hangingPunct="1" latinLnBrk="0" marL="1371600" rtl="0">
-        <a:defRPr kern="1200" sz="1350">
-          <a:solidFill>
-            <a:schemeClr val="tx1"/>
-          </a:solidFill>
-          <a:latin typeface="+mn-lt"/>
+      <a:lvl5pPr algn="l" defTabSz="457200" eaLnBrk="1" hangingPunct="1" latinLnBrk="0" marL="1828800" rtl="0">
+        <a:defRPr kern="1200" sz="1800">
+          <a:latin typeface="Cambria"/>
           <a:ea typeface="+mn-ea"/>
           <a:cs typeface="+mn-cs"/>
+          <a:solidFill>
+            <a:srgbClr val="111111"/>
+          </a:solidFill>
         </a:defRPr>
       </a:lvl5pPr>
-      <a:lvl6pPr algn="l" defTabSz="342900" eaLnBrk="1" hangingPunct="1" latinLnBrk="0" marL="1714500" rtl="0">
-        <a:defRPr kern="1200" sz="1350">
-          <a:solidFill>
-            <a:schemeClr val="tx1"/>
-          </a:solidFill>
-          <a:latin typeface="+mn-lt"/>
+      <a:lvl6pPr algn="l" defTabSz="457200" eaLnBrk="1" hangingPunct="1" latinLnBrk="0" marL="2286000" rtl="0">
+        <a:defRPr kern="1200" sz="1800">
+          <a:latin typeface="Cambria"/>
           <a:ea typeface="+mn-ea"/>
           <a:cs typeface="+mn-cs"/>
+          <a:solidFill>
+            <a:srgbClr val="111111"/>
+          </a:solidFill>
         </a:defRPr>
       </a:lvl6pPr>
-      <a:lvl7pPr algn="l" defTabSz="342900" eaLnBrk="1" hangingPunct="1" latinLnBrk="0" marL="2057400" rtl="0">
-        <a:defRPr kern="1200" sz="1350">
-          <a:solidFill>
-            <a:schemeClr val="tx1"/>
-          </a:solidFill>
-          <a:latin typeface="+mn-lt"/>
+      <a:lvl7pPr algn="l" defTabSz="457200" eaLnBrk="1" hangingPunct="1" latinLnBrk="0" marL="2743200" rtl="0">
+        <a:defRPr kern="1200" sz="1800">
+          <a:latin typeface="Cambria"/>
           <a:ea typeface="+mn-ea"/>
           <a:cs typeface="+mn-cs"/>
+          <a:solidFill>
+            <a:srgbClr val="111111"/>
+          </a:solidFill>
         </a:defRPr>
       </a:lvl7pPr>
-      <a:lvl8pPr algn="l" defTabSz="342900" eaLnBrk="1" hangingPunct="1" latinLnBrk="0" marL="2400300" rtl="0">
-        <a:defRPr kern="1200" sz="1350">
-          <a:solidFill>
-            <a:schemeClr val="tx1"/>
-          </a:solidFill>
-          <a:latin typeface="+mn-lt"/>
+      <a:lvl8pPr algn="l" defTabSz="457200" eaLnBrk="1" hangingPunct="1" latinLnBrk="0" marL="3200400" rtl="0">
+        <a:defRPr kern="1200" sz="1800">
+          <a:latin typeface="Cambria"/>
           <a:ea typeface="+mn-ea"/>
           <a:cs typeface="+mn-cs"/>
+          <a:solidFill>
+            <a:srgbClr val="111111"/>
+          </a:solidFill>
         </a:defRPr>
       </a:lvl8pPr>
-      <a:lvl9pPr algn="l" defTabSz="342900" eaLnBrk="1" hangingPunct="1" latinLnBrk="0" marL="2743200" rtl="0">
-        <a:defRPr kern="1200" sz="1350">
-          <a:solidFill>
-            <a:schemeClr val="tx1"/>
-          </a:solidFill>
-          <a:latin typeface="+mn-lt"/>
+      <a:lvl9pPr algn="l" defTabSz="457200" eaLnBrk="1" hangingPunct="1" latinLnBrk="0" marL="3657600" rtl="0">
+        <a:defRPr kern="1200" sz="1800">
+          <a:latin typeface="Cambria"/>
           <a:ea typeface="+mn-ea"/>
           <a:cs typeface="+mn-cs"/>
+          <a:solidFill>
+            <a:srgbClr val="111111"/>
+          </a:solidFill>
         </a:defRPr>
       </a:lvl9pPr>
     </p:otherStyle>
@@ -3131,8 +3789,8 @@
         </p:nvSpPr>
         <p:spPr>
           <a:xfrm>
-            <a:off x="685800" y="1597819"/>
-            <a:ext cx="7772400" cy="1102519"/>
+            <a:off x="685800" y="2130425"/>
+            <a:ext cx="7772400" cy="1470025"/>
           </a:xfrm>
         </p:spPr>
         <p:txBody>
@@ -3161,8 +3819,8 @@
         </p:nvSpPr>
         <p:spPr>
           <a:xfrm>
-            <a:off x="1371600" y="2914650"/>
-            <a:ext cx="6400800" cy="1314450"/>
+            <a:off x="1371600" y="3886200"/>
+            <a:ext cx="6400800" cy="1752600"/>
           </a:xfrm>
         </p:spPr>
         <p:txBody>
@@ -5680,8 +6338,8 @@
           </p:nvPr>
         </p:nvGraphicFramePr>
         <p:xfrm>
-          <a:off x="457200" y="1193800"/>
-          <a:ext cx="8229600" cy="3390900"/>
+          <a:off x="457200" y="1600200"/>
+          <a:ext cx="8229600" cy="4521200"/>
         </p:xfrm>
         <a:graphic>
           <a:graphicData uri="http://schemas.openxmlformats.org/drawingml/2006/table">
@@ -6173,7 +6831,7 @@
           <a:bodyPr/>
           <a:lstStyle/>
           <a:p>
-            <a:pPr lvl="0" indent="-342900" marL="342900">
+            <a:pPr lvl="0" indent="-457200" marL="457200">
               <a:buAutoNum type="arabicPeriod"/>
             </a:pPr>
             <a:r>
@@ -6196,7 +6854,7 @@
             </a:r>
           </a:p>
           <a:p>
-            <a:pPr lvl="0" indent="-342900" marL="342900">
+            <a:pPr lvl="0" indent="-457200" marL="457200">
               <a:buAutoNum type="arabicPeriod"/>
             </a:pPr>
             <a:r>
@@ -6219,7 +6877,7 @@
             </a:r>
           </a:p>
           <a:p>
-            <a:pPr lvl="0" indent="-342900" marL="342900">
+            <a:pPr lvl="0" indent="-457200" marL="457200">
               <a:buAutoNum type="arabicPeriod"/>
             </a:pPr>
             <a:r>
@@ -6242,7 +6900,7 @@
             </a:r>
           </a:p>
           <a:p>
-            <a:pPr lvl="0" indent="-342900" marL="342900">
+            <a:pPr lvl="0" indent="-457200" marL="457200">
               <a:buAutoNum type="arabicPeriod"/>
             </a:pPr>
             <a:r>
@@ -6265,7 +6923,7 @@
             </a:r>
           </a:p>
           <a:p>
-            <a:pPr lvl="0" indent="-342900" marL="342900">
+            <a:pPr lvl="0" indent="-457200" marL="457200">
               <a:buAutoNum type="arabicPeriod"/>
             </a:pPr>
             <a:r>
@@ -6298,7 +6956,7 @@
             </a:r>
           </a:p>
           <a:p>
-            <a:pPr lvl="0" indent="-342900" marL="342900">
+            <a:pPr lvl="0" indent="-457200" marL="457200">
               <a:buAutoNum type="arabicPeriod"/>
             </a:pPr>
             <a:r>
@@ -10599,8 +11257,8 @@
         </p:nvSpPr>
         <p:spPr>
           <a:xfrm>
-            <a:off x="722313" y="3305176"/>
-            <a:ext cx="7772400" cy="1021556"/>
+            <a:off x="722313" y="4406900"/>
+            <a:ext cx="7772400" cy="1362075"/>
           </a:xfrm>
         </p:spPr>
         <p:txBody>
@@ -12486,8 +13144,8 @@
         </p:nvSpPr>
         <p:spPr>
           <a:xfrm>
-            <a:off x="722313" y="3305176"/>
-            <a:ext cx="7772400" cy="1021556"/>
+            <a:off x="722313" y="4406900"/>
+            <a:ext cx="7772400" cy="1362075"/>
           </a:xfrm>
         </p:spPr>
         <p:txBody>
@@ -13239,8 +13897,8 @@
         </p:nvSpPr>
         <p:spPr>
           <a:xfrm>
-            <a:off x="722313" y="3305176"/>
-            <a:ext cx="7772400" cy="1021556"/>
+            <a:off x="722313" y="4406900"/>
+            <a:ext cx="7772400" cy="1362075"/>
           </a:xfrm>
         </p:spPr>
         <p:txBody>
@@ -13594,7 +14252,7 @@
           <a:bodyPr/>
           <a:lstStyle/>
           <a:p>
-            <a:pPr lvl="0" indent="-342900" marL="342900">
+            <a:pPr lvl="0" indent="-457200" marL="457200">
               <a:buAutoNum type="arabicPeriod"/>
             </a:pPr>
             <a:r>
@@ -13617,7 +14275,7 @@
             </a:r>
           </a:p>
           <a:p>
-            <a:pPr lvl="0" indent="-342900" marL="342900">
+            <a:pPr lvl="0" indent="-457200" marL="457200">
               <a:buAutoNum type="arabicPeriod"/>
             </a:pPr>
             <a:r>
@@ -13702,8 +14360,8 @@
           </p:nvPr>
         </p:nvGraphicFramePr>
         <p:xfrm>
-          <a:off x="457200" y="1193800"/>
-          <a:ext cx="8229600" cy="3390900"/>
+          <a:off x="457200" y="1600200"/>
+          <a:ext cx="8229600" cy="4521200"/>
         </p:xfrm>
         <a:graphic>
           <a:graphicData uri="http://schemas.openxmlformats.org/drawingml/2006/table">
@@ -14621,8 +15279,8 @@
         </p:nvSpPr>
         <p:spPr>
           <a:xfrm>
-            <a:off x="722313" y="3305176"/>
-            <a:ext cx="7772400" cy="1021556"/>
+            <a:off x="722313" y="4406900"/>
+            <a:ext cx="7772400" cy="1362075"/>
           </a:xfrm>
         </p:spPr>
         <p:txBody>
@@ -14673,8 +15331,8 @@
         </p:nvSpPr>
         <p:spPr>
           <a:xfrm>
-            <a:off x="457201" y="204787"/>
-            <a:ext cx="3008313" cy="871538"/>
+            <a:off x="457200" y="273050"/>
+            <a:ext cx="3008313" cy="1162050"/>
           </a:xfrm>
         </p:spPr>
         <p:txBody>
@@ -14808,8 +15466,8 @@
           </p:nvPr>
         </p:nvGraphicFramePr>
         <p:xfrm>
-          <a:off x="3568700" y="203200"/>
-          <a:ext cx="5105400" cy="4381500"/>
+          <a:off x="3568700" y="266700"/>
+          <a:ext cx="5105400" cy="5842000"/>
         </p:xfrm>
         <a:graphic>
           <a:graphicData uri="http://schemas.openxmlformats.org/drawingml/2006/table">
@@ -16591,8 +17249,8 @@
           </p:nvPr>
         </p:nvGraphicFramePr>
         <p:xfrm>
-          <a:off x="457200" y="1625600"/>
-          <a:ext cx="4038600" cy="2959100"/>
+          <a:off x="457200" y="2171700"/>
+          <a:ext cx="4038600" cy="3949700"/>
         </p:xfrm>
         <a:graphic>
           <a:graphicData uri="http://schemas.openxmlformats.org/drawingml/2006/table">
@@ -17028,8 +17686,8 @@
           </p:nvPr>
         </p:nvGraphicFramePr>
         <p:xfrm>
-          <a:off x="4635500" y="1625600"/>
-          <a:ext cx="4038600" cy="2959100"/>
+          <a:off x="4635500" y="2171700"/>
+          <a:ext cx="4038600" cy="3949700"/>
         </p:xfrm>
         <a:graphic>
           <a:graphicData uri="http://schemas.openxmlformats.org/drawingml/2006/table">

--- a/courses/research-in-finance/lectures/lecture-02-data-handling/slides.pptx
+++ b/courses/research-in-finance/lectures/lecture-02-data-handling/slides.pptx
@@ -4,7 +4,39 @@
   <p:sldMasterIdLst>
     <p:sldMasterId id="2147483648" r:id="rId1"/>
   </p:sldMasterIdLst>
-  <p:sldSz cx="12191695" cy="6858000" type="screen4x3"/>
+  <p:sldIdLst>
+    <p:sldId id="256" r:id="rId2"/>
+    <p:sldId id="257" r:id="rId3"/>
+    <p:sldId id="258" r:id="rId4"/>
+    <p:sldId id="259" r:id="rId5"/>
+    <p:sldId id="260" r:id="rId6"/>
+    <p:sldId id="261" r:id="rId7"/>
+    <p:sldId id="262" r:id="rId8"/>
+    <p:sldId id="263" r:id="rId9"/>
+    <p:sldId id="264" r:id="rId10"/>
+    <p:sldId id="265" r:id="rId11"/>
+    <p:sldId id="266" r:id="rId12"/>
+    <p:sldId id="267" r:id="rId13"/>
+    <p:sldId id="268" r:id="rId14"/>
+    <p:sldId id="269" r:id="rId15"/>
+    <p:sldId id="270" r:id="rId16"/>
+    <p:sldId id="271" r:id="rId17"/>
+    <p:sldId id="272" r:id="rId18"/>
+    <p:sldId id="273" r:id="rId19"/>
+    <p:sldId id="274" r:id="rId20"/>
+    <p:sldId id="275" r:id="rId21"/>
+    <p:sldId id="276" r:id="rId22"/>
+    <p:sldId id="277" r:id="rId23"/>
+    <p:sldId id="278" r:id="rId24"/>
+    <p:sldId id="279" r:id="rId25"/>
+    <p:sldId id="280" r:id="rId26"/>
+    <p:sldId id="281" r:id="rId27"/>
+    <p:sldId id="282" r:id="rId28"/>
+    <p:sldId id="283" r:id="rId29"/>
+    <p:sldId id="284" r:id="rId30"/>
+    <p:sldId id="285" r:id="rId31"/>
+  </p:sldIdLst>
+  <p:sldSz cx="9144000" cy="5143500" type="screen16x9"/>
   <p:notesSz cx="6858000" cy="9144000"/>
   <p:defaultTextStyle>
     <a:defPPr>
@@ -101,6 +133,22 @@
       </a:defRPr>
     </a:lvl9pPr>
   </p:defaultTextStyle>
+  <p:extLst>
+    <p:ext uri="{EFAFB233-063F-42B5-8137-9DF3F51BA10A}">
+      <p15:sldGuideLst xmlns:p15="http://schemas.microsoft.com/office/powerpoint/2012/main">
+        <p15:guide id="1" orient="horz" pos="1620" userDrawn="1">
+          <p15:clr>
+            <a:srgbClr val="A4A3A4"/>
+          </p15:clr>
+        </p15:guide>
+        <p15:guide id="2" pos="2880" userDrawn="1">
+          <p15:clr>
+            <a:srgbClr val="A4A3A4"/>
+          </p15:clr>
+        </p15:guide>
+      </p15:sldGuideLst>
+    </p:ext>
+  </p:extLst>
 </p:presentation>
 </file>
 
@@ -133,8 +181,8 @@
         </p:nvSpPr>
         <p:spPr>
           <a:xfrm>
-            <a:off x="685800" y="2130425"/>
-            <a:ext cx="7772400" cy="1470025"/>
+            <a:off x="685800" y="1597819"/>
+            <a:ext cx="7772400" cy="1102519"/>
           </a:xfrm>
         </p:spPr>
         <p:txBody>
@@ -142,14 +190,13 @@
           <a:lstStyle/>
           <a:p>
             <a:r>
-              <a:rPr lang="en-US" smtClean="0">
+              <a:rPr lang="en-US">
                 <a:solidFill>
                   <a:srgbClr val="111111"/>
                 </a:solidFill>
               </a:rPr>
               <a:t>Click to edit Master title style</a:t>
             </a:r>
-            <a:endParaRPr lang="en-US"/>
           </a:p>
         </p:txBody>
       </p:sp>
@@ -165,8 +212,8 @@
         </p:nvSpPr>
         <p:spPr>
           <a:xfrm>
-            <a:off x="1371600" y="3886200"/>
-            <a:ext cx="6400800" cy="1752600"/>
+            <a:off x="1371600" y="2914650"/>
+            <a:ext cx="6400800" cy="1314450"/>
           </a:xfrm>
         </p:spPr>
         <p:txBody>
@@ -180,7 +227,7 @@
                 </a:solidFill>
               </a:defRPr>
             </a:lvl1pPr>
-            <a:lvl2pPr marL="457200" indent="0" algn="ctr">
+            <a:lvl2pPr marL="342900" indent="0" algn="ctr">
               <a:buNone/>
               <a:defRPr>
                 <a:solidFill>
@@ -188,7 +235,7 @@
                 </a:solidFill>
               </a:defRPr>
             </a:lvl2pPr>
-            <a:lvl3pPr marL="914400" indent="0" algn="ctr">
+            <a:lvl3pPr marL="685800" indent="0" algn="ctr">
               <a:buNone/>
               <a:defRPr>
                 <a:solidFill>
@@ -196,7 +243,7 @@
                 </a:solidFill>
               </a:defRPr>
             </a:lvl3pPr>
-            <a:lvl4pPr marL="1371600" indent="0" algn="ctr">
+            <a:lvl4pPr marL="1028700" indent="0" algn="ctr">
               <a:buNone/>
               <a:defRPr>
                 <a:solidFill>
@@ -204,7 +251,7 @@
                 </a:solidFill>
               </a:defRPr>
             </a:lvl4pPr>
-            <a:lvl5pPr marL="1828800" indent="0" algn="ctr">
+            <a:lvl5pPr marL="1371600" indent="0" algn="ctr">
               <a:buNone/>
               <a:defRPr>
                 <a:solidFill>
@@ -212,7 +259,7 @@
                 </a:solidFill>
               </a:defRPr>
             </a:lvl5pPr>
-            <a:lvl6pPr marL="2286000" indent="0" algn="ctr">
+            <a:lvl6pPr marL="1714500" indent="0" algn="ctr">
               <a:buNone/>
               <a:defRPr>
                 <a:solidFill>
@@ -220,7 +267,7 @@
                 </a:solidFill>
               </a:defRPr>
             </a:lvl6pPr>
-            <a:lvl7pPr marL="2743200" indent="0" algn="ctr">
+            <a:lvl7pPr marL="2057400" indent="0" algn="ctr">
               <a:buNone/>
               <a:defRPr>
                 <a:solidFill>
@@ -228,7 +275,7 @@
                 </a:solidFill>
               </a:defRPr>
             </a:lvl7pPr>
-            <a:lvl8pPr marL="3200400" indent="0" algn="ctr">
+            <a:lvl8pPr marL="2400300" indent="0" algn="ctr">
               <a:buNone/>
               <a:defRPr>
                 <a:solidFill>
@@ -236,7 +283,7 @@
                 </a:solidFill>
               </a:defRPr>
             </a:lvl8pPr>
-            <a:lvl9pPr marL="3657600" indent="0" algn="ctr">
+            <a:lvl9pPr marL="2743200" indent="0" algn="ctr">
               <a:buNone/>
               <a:defRPr>
                 <a:solidFill>
@@ -247,14 +294,13 @@
           </a:lstStyle>
           <a:p>
             <a:r>
-              <a:rPr lang="en-US" smtClean="0">
+              <a:rPr lang="en-US">
                 <a:solidFill>
                   <a:srgbClr val="111111"/>
                 </a:solidFill>
               </a:rPr>
               <a:t>Click to edit Master subtitle style</a:t>
             </a:r>
-            <a:endParaRPr lang="en-US"/>
           </a:p>
         </p:txBody>
       </p:sp>
@@ -273,15 +319,19 @@
           <a:bodyPr/>
           <a:lstStyle/>
           <a:p>
-            <a:fld id="{5BCAD085-E8A6-8845-BD4E-CB4CCA059FC4}" type="datetimeFigureOut">
+            <a:fld id="{241EB5C9-1307-BA42-ABA2-0BC069CD8E7F}" type="datetimeFigureOut">
               <a:rPr lang="en-US" smtClean="0">
                 <a:solidFill>
                   <a:srgbClr val="111111"/>
                 </a:solidFill>
               </a:rPr>
-              <a:t>1/27/13</a:t>
+              <a:t>1/2/22</a:t>
             </a:fld>
-            <a:endParaRPr lang="en-US"/>
+            <a:endParaRPr lang="en-US">
+              <a:solidFill>
+                <a:srgbClr val="111111"/>
+              </a:solidFill>
+            </a:endParaRPr>
           </a:p>
         </p:txBody>
       </p:sp>
@@ -300,7 +350,11 @@
           <a:bodyPr/>
           <a:lstStyle/>
           <a:p>
-            <a:endParaRPr lang="en-US"/>
+            <a:endParaRPr lang="en-US">
+              <a:solidFill>
+                <a:srgbClr val="111111"/>
+              </a:solidFill>
+            </a:endParaRPr>
           </a:p>
         </p:txBody>
       </p:sp>
@@ -319,7 +373,7 @@
           <a:bodyPr/>
           <a:lstStyle/>
           <a:p>
-            <a:fld id="{C1FF6DA9-008F-8B48-92A6-B652298478BF}" type="slidenum">
+            <a:fld id="{C5EF2332-01BF-834F-8236-50238282D533}" type="slidenum">
               <a:rPr lang="en-US" smtClean="0">
                 <a:solidFill>
                   <a:srgbClr val="111111"/>
@@ -327,14 +381,18 @@
               </a:rPr>
               <a:t>‹#›</a:t>
             </a:fld>
-            <a:endParaRPr lang="en-US"/>
+            <a:endParaRPr lang="en-US">
+              <a:solidFill>
+                <a:srgbClr val="111111"/>
+              </a:solidFill>
+            </a:endParaRPr>
           </a:p>
         </p:txBody>
       </p:sp>
     </p:spTree>
     <p:extLst>
       <p:ext uri="{BB962C8B-B14F-4D97-AF65-F5344CB8AC3E}">
-        <p14:creationId xmlns:p14="http://schemas.microsoft.com/office/powerpoint/2010/main" val="3168075583"/>
+        <p14:creationId xmlns:p14="http://schemas.microsoft.com/office/powerpoint/2010/main" val="1444357513"/>
       </p:ext>
     </p:extLst>
   </p:cSld>
@@ -377,14 +435,13 @@
           <a:lstStyle/>
           <a:p>
             <a:r>
-              <a:rPr lang="en-US" smtClean="0">
+              <a:rPr lang="en-US">
                 <a:solidFill>
                   <a:srgbClr val="111111"/>
                 </a:solidFill>
               </a:rPr>
               <a:t>Click to edit Master title style</a:t>
             </a:r>
-            <a:endParaRPr lang="en-US"/>
           </a:p>
         </p:txBody>
       </p:sp>
@@ -405,7 +462,7 @@
           <a:p>
             <a:pPr lvl="0"/>
             <a:r>
-              <a:rPr lang="en-US" smtClean="0">
+              <a:rPr lang="en-US">
                 <a:solidFill>
                   <a:srgbClr val="111111"/>
                 </a:solidFill>
@@ -416,7 +473,7 @@
           <a:p>
             <a:pPr lvl="1"/>
             <a:r>
-              <a:rPr lang="en-US" smtClean="0">
+              <a:rPr lang="en-US">
                 <a:solidFill>
                   <a:srgbClr val="111111"/>
                 </a:solidFill>
@@ -427,7 +484,7 @@
           <a:p>
             <a:pPr lvl="2"/>
             <a:r>
-              <a:rPr lang="en-US" smtClean="0">
+              <a:rPr lang="en-US">
                 <a:solidFill>
                   <a:srgbClr val="111111"/>
                 </a:solidFill>
@@ -438,7 +495,7 @@
           <a:p>
             <a:pPr lvl="3"/>
             <a:r>
-              <a:rPr lang="en-US" smtClean="0">
+              <a:rPr lang="en-US">
                 <a:solidFill>
                   <a:srgbClr val="111111"/>
                 </a:solidFill>
@@ -449,14 +506,13 @@
           <a:p>
             <a:pPr lvl="4"/>
             <a:r>
-              <a:rPr lang="en-US" smtClean="0">
+              <a:rPr lang="en-US">
                 <a:solidFill>
                   <a:srgbClr val="111111"/>
                 </a:solidFill>
               </a:rPr>
               <a:t>Fifth level</a:t>
             </a:r>
-            <a:endParaRPr lang="en-US"/>
           </a:p>
         </p:txBody>
       </p:sp>
@@ -475,15 +531,19 @@
           <a:bodyPr/>
           <a:lstStyle/>
           <a:p>
-            <a:fld id="{5BCAD085-E8A6-8845-BD4E-CB4CCA059FC4}" type="datetimeFigureOut">
+            <a:fld id="{241EB5C9-1307-BA42-ABA2-0BC069CD8E7F}" type="datetimeFigureOut">
               <a:rPr lang="en-US" smtClean="0">
                 <a:solidFill>
                   <a:srgbClr val="111111"/>
                 </a:solidFill>
               </a:rPr>
-              <a:t>1/27/13</a:t>
+              <a:t>1/2/22</a:t>
             </a:fld>
-            <a:endParaRPr lang="en-US"/>
+            <a:endParaRPr lang="en-US">
+              <a:solidFill>
+                <a:srgbClr val="111111"/>
+              </a:solidFill>
+            </a:endParaRPr>
           </a:p>
         </p:txBody>
       </p:sp>
@@ -502,7 +562,11 @@
           <a:bodyPr/>
           <a:lstStyle/>
           <a:p>
-            <a:endParaRPr lang="en-US"/>
+            <a:endParaRPr lang="en-US">
+              <a:solidFill>
+                <a:srgbClr val="111111"/>
+              </a:solidFill>
+            </a:endParaRPr>
           </a:p>
         </p:txBody>
       </p:sp>
@@ -521,7 +585,7 @@
           <a:bodyPr/>
           <a:lstStyle/>
           <a:p>
-            <a:fld id="{C1FF6DA9-008F-8B48-92A6-B652298478BF}" type="slidenum">
+            <a:fld id="{C5EF2332-01BF-834F-8236-50238282D533}" type="slidenum">
               <a:rPr lang="en-US" smtClean="0">
                 <a:solidFill>
                   <a:srgbClr val="111111"/>
@@ -529,14 +593,18 @@
               </a:rPr>
               <a:t>‹#›</a:t>
             </a:fld>
-            <a:endParaRPr lang="en-US"/>
+            <a:endParaRPr lang="en-US">
+              <a:solidFill>
+                <a:srgbClr val="111111"/>
+              </a:solidFill>
+            </a:endParaRPr>
           </a:p>
         </p:txBody>
       </p:sp>
     </p:spTree>
     <p:extLst>
       <p:ext uri="{BB962C8B-B14F-4D97-AF65-F5344CB8AC3E}">
-        <p14:creationId xmlns:p14="http://schemas.microsoft.com/office/powerpoint/2010/main" val="2910927964"/>
+        <p14:creationId xmlns:p14="http://schemas.microsoft.com/office/powerpoint/2010/main" val="313914798"/>
       </p:ext>
     </p:extLst>
   </p:cSld>
@@ -575,8 +643,8 @@
         </p:nvSpPr>
         <p:spPr>
           <a:xfrm>
-            <a:off x="6629400" y="274638"/>
-            <a:ext cx="2057400" cy="5851525"/>
+            <a:off x="6629400" y="205979"/>
+            <a:ext cx="2057400" cy="4388644"/>
           </a:xfrm>
         </p:spPr>
         <p:txBody>
@@ -584,14 +652,13 @@
           <a:lstStyle/>
           <a:p>
             <a:r>
-              <a:rPr lang="en-US" smtClean="0">
+              <a:rPr lang="en-US">
                 <a:solidFill>
                   <a:srgbClr val="111111"/>
                 </a:solidFill>
               </a:rPr>
               <a:t>Click to edit Master title style</a:t>
             </a:r>
-            <a:endParaRPr lang="en-US"/>
           </a:p>
         </p:txBody>
       </p:sp>
@@ -607,8 +674,8 @@
         </p:nvSpPr>
         <p:spPr>
           <a:xfrm>
-            <a:off x="457200" y="274638"/>
-            <a:ext cx="6019800" cy="5851525"/>
+            <a:off x="457200" y="205979"/>
+            <a:ext cx="6019800" cy="4388644"/>
           </a:xfrm>
         </p:spPr>
         <p:txBody>
@@ -617,7 +684,7 @@
           <a:p>
             <a:pPr lvl="0"/>
             <a:r>
-              <a:rPr lang="en-US" smtClean="0">
+              <a:rPr lang="en-US">
                 <a:solidFill>
                   <a:srgbClr val="111111"/>
                 </a:solidFill>
@@ -628,7 +695,7 @@
           <a:p>
             <a:pPr lvl="1"/>
             <a:r>
-              <a:rPr lang="en-US" smtClean="0">
+              <a:rPr lang="en-US">
                 <a:solidFill>
                   <a:srgbClr val="111111"/>
                 </a:solidFill>
@@ -639,7 +706,7 @@
           <a:p>
             <a:pPr lvl="2"/>
             <a:r>
-              <a:rPr lang="en-US" smtClean="0">
+              <a:rPr lang="en-US">
                 <a:solidFill>
                   <a:srgbClr val="111111"/>
                 </a:solidFill>
@@ -650,7 +717,7 @@
           <a:p>
             <a:pPr lvl="3"/>
             <a:r>
-              <a:rPr lang="en-US" smtClean="0">
+              <a:rPr lang="en-US">
                 <a:solidFill>
                   <a:srgbClr val="111111"/>
                 </a:solidFill>
@@ -661,14 +728,13 @@
           <a:p>
             <a:pPr lvl="4"/>
             <a:r>
-              <a:rPr lang="en-US" smtClean="0">
+              <a:rPr lang="en-US">
                 <a:solidFill>
                   <a:srgbClr val="111111"/>
                 </a:solidFill>
               </a:rPr>
               <a:t>Fifth level</a:t>
             </a:r>
-            <a:endParaRPr lang="en-US"/>
           </a:p>
         </p:txBody>
       </p:sp>
@@ -687,15 +753,19 @@
           <a:bodyPr/>
           <a:lstStyle/>
           <a:p>
-            <a:fld id="{5BCAD085-E8A6-8845-BD4E-CB4CCA059FC4}" type="datetimeFigureOut">
+            <a:fld id="{241EB5C9-1307-BA42-ABA2-0BC069CD8E7F}" type="datetimeFigureOut">
               <a:rPr lang="en-US" smtClean="0">
                 <a:solidFill>
                   <a:srgbClr val="111111"/>
                 </a:solidFill>
               </a:rPr>
-              <a:t>1/27/13</a:t>
+              <a:t>1/2/22</a:t>
             </a:fld>
-            <a:endParaRPr lang="en-US"/>
+            <a:endParaRPr lang="en-US">
+              <a:solidFill>
+                <a:srgbClr val="111111"/>
+              </a:solidFill>
+            </a:endParaRPr>
           </a:p>
         </p:txBody>
       </p:sp>
@@ -714,7 +784,11 @@
           <a:bodyPr/>
           <a:lstStyle/>
           <a:p>
-            <a:endParaRPr lang="en-US"/>
+            <a:endParaRPr lang="en-US">
+              <a:solidFill>
+                <a:srgbClr val="111111"/>
+              </a:solidFill>
+            </a:endParaRPr>
           </a:p>
         </p:txBody>
       </p:sp>
@@ -733,7 +807,7 @@
           <a:bodyPr/>
           <a:lstStyle/>
           <a:p>
-            <a:fld id="{C1FF6DA9-008F-8B48-92A6-B652298478BF}" type="slidenum">
+            <a:fld id="{C5EF2332-01BF-834F-8236-50238282D533}" type="slidenum">
               <a:rPr lang="en-US" smtClean="0">
                 <a:solidFill>
                   <a:srgbClr val="111111"/>
@@ -741,14 +815,18 @@
               </a:rPr>
               <a:t>‹#›</a:t>
             </a:fld>
-            <a:endParaRPr lang="en-US"/>
+            <a:endParaRPr lang="en-US">
+              <a:solidFill>
+                <a:srgbClr val="111111"/>
+              </a:solidFill>
+            </a:endParaRPr>
           </a:p>
         </p:txBody>
       </p:sp>
     </p:spTree>
     <p:extLst>
       <p:ext uri="{BB962C8B-B14F-4D97-AF65-F5344CB8AC3E}">
-        <p14:creationId xmlns:p14="http://schemas.microsoft.com/office/powerpoint/2010/main" val="3612223792"/>
+        <p14:creationId xmlns:p14="http://schemas.microsoft.com/office/powerpoint/2010/main" val="2581529045"/>
       </p:ext>
     </p:extLst>
   </p:cSld>
@@ -791,14 +869,13 @@
           <a:lstStyle/>
           <a:p>
             <a:r>
-              <a:rPr lang="en-US" smtClean="0">
+              <a:rPr lang="en-US">
                 <a:solidFill>
                   <a:srgbClr val="111111"/>
                 </a:solidFill>
               </a:rPr>
               <a:t>Click to edit Master title style</a:t>
             </a:r>
-            <a:endParaRPr lang="en-US"/>
           </a:p>
         </p:txBody>
       </p:sp>
@@ -819,7 +896,7 @@
           <a:p>
             <a:pPr lvl="0"/>
             <a:r>
-              <a:rPr lang="en-US" smtClean="0">
+              <a:rPr lang="en-US">
                 <a:solidFill>
                   <a:srgbClr val="111111"/>
                 </a:solidFill>
@@ -830,7 +907,7 @@
           <a:p>
             <a:pPr lvl="1"/>
             <a:r>
-              <a:rPr lang="en-US" smtClean="0">
+              <a:rPr lang="en-US">
                 <a:solidFill>
                   <a:srgbClr val="111111"/>
                 </a:solidFill>
@@ -841,7 +918,7 @@
           <a:p>
             <a:pPr lvl="2"/>
             <a:r>
-              <a:rPr lang="en-US" smtClean="0">
+              <a:rPr lang="en-US">
                 <a:solidFill>
                   <a:srgbClr val="111111"/>
                 </a:solidFill>
@@ -852,7 +929,7 @@
           <a:p>
             <a:pPr lvl="3"/>
             <a:r>
-              <a:rPr lang="en-US" smtClean="0">
+              <a:rPr lang="en-US">
                 <a:solidFill>
                   <a:srgbClr val="111111"/>
                 </a:solidFill>
@@ -863,14 +940,13 @@
           <a:p>
             <a:pPr lvl="4"/>
             <a:r>
-              <a:rPr lang="en-US" smtClean="0">
+              <a:rPr lang="en-US">
                 <a:solidFill>
                   <a:srgbClr val="111111"/>
                 </a:solidFill>
               </a:rPr>
               <a:t>Fifth level</a:t>
             </a:r>
-            <a:endParaRPr lang="en-US"/>
           </a:p>
         </p:txBody>
       </p:sp>
@@ -889,15 +965,19 @@
           <a:bodyPr/>
           <a:lstStyle/>
           <a:p>
-            <a:fld id="{5BCAD085-E8A6-8845-BD4E-CB4CCA059FC4}" type="datetimeFigureOut">
+            <a:fld id="{241EB5C9-1307-BA42-ABA2-0BC069CD8E7F}" type="datetimeFigureOut">
               <a:rPr lang="en-US" smtClean="0">
                 <a:solidFill>
                   <a:srgbClr val="111111"/>
                 </a:solidFill>
               </a:rPr>
-              <a:t>1/27/13</a:t>
+              <a:t>1/2/22</a:t>
             </a:fld>
-            <a:endParaRPr lang="en-US"/>
+            <a:endParaRPr lang="en-US">
+              <a:solidFill>
+                <a:srgbClr val="111111"/>
+              </a:solidFill>
+            </a:endParaRPr>
           </a:p>
         </p:txBody>
       </p:sp>
@@ -916,7 +996,11 @@
           <a:bodyPr/>
           <a:lstStyle/>
           <a:p>
-            <a:endParaRPr lang="en-US"/>
+            <a:endParaRPr lang="en-US">
+              <a:solidFill>
+                <a:srgbClr val="111111"/>
+              </a:solidFill>
+            </a:endParaRPr>
           </a:p>
         </p:txBody>
       </p:sp>
@@ -935,7 +1019,7 @@
           <a:bodyPr/>
           <a:lstStyle/>
           <a:p>
-            <a:fld id="{C1FF6DA9-008F-8B48-92A6-B652298478BF}" type="slidenum">
+            <a:fld id="{C5EF2332-01BF-834F-8236-50238282D533}" type="slidenum">
               <a:rPr lang="en-US" smtClean="0">
                 <a:solidFill>
                   <a:srgbClr val="111111"/>
@@ -943,14 +1027,18 @@
               </a:rPr>
               <a:t>‹#›</a:t>
             </a:fld>
-            <a:endParaRPr lang="en-US"/>
+            <a:endParaRPr lang="en-US">
+              <a:solidFill>
+                <a:srgbClr val="111111"/>
+              </a:solidFill>
+            </a:endParaRPr>
           </a:p>
         </p:txBody>
       </p:sp>
     </p:spTree>
     <p:extLst>
       <p:ext uri="{BB962C8B-B14F-4D97-AF65-F5344CB8AC3E}">
-        <p14:creationId xmlns:p14="http://schemas.microsoft.com/office/powerpoint/2010/main" val="2614314258"/>
+        <p14:creationId xmlns:p14="http://schemas.microsoft.com/office/powerpoint/2010/main" val="338346009"/>
       </p:ext>
     </p:extLst>
   </p:cSld>
@@ -989,15 +1077,15 @@
         </p:nvSpPr>
         <p:spPr>
           <a:xfrm>
-            <a:off x="722313" y="4406900"/>
-            <a:ext cx="7772400" cy="1362075"/>
+            <a:off x="722313" y="3305176"/>
+            <a:ext cx="7772400" cy="1021556"/>
           </a:xfrm>
         </p:spPr>
         <p:txBody>
           <a:bodyPr anchor="t"/>
           <a:lstStyle>
             <a:lvl1pPr algn="l">
-              <a:defRPr sz="4000" b="1" cap="all">
+              <a:defRPr sz="3000" b="1" cap="all">
                 <a:solidFill>
                   <a:srgbClr val="111111"/>
                 </a:solidFill>
@@ -1006,14 +1094,13 @@
           </a:lstStyle>
           <a:p>
             <a:r>
-              <a:rPr lang="en-US" smtClean="0">
+              <a:rPr lang="en-US">
                 <a:solidFill>
                   <a:srgbClr val="111111"/>
                 </a:solidFill>
               </a:rPr>
               <a:t>Click to edit Master title style</a:t>
             </a:r>
-            <a:endParaRPr lang="en-US"/>
           </a:p>
         </p:txBody>
       </p:sp>
@@ -1029,8 +1116,8 @@
         </p:nvSpPr>
         <p:spPr>
           <a:xfrm>
-            <a:off x="722313" y="2906713"/>
-            <a:ext cx="7772400" cy="1500187"/>
+            <a:off x="722313" y="2180035"/>
+            <a:ext cx="7772400" cy="1125140"/>
           </a:xfrm>
         </p:spPr>
         <p:txBody>
@@ -1038,71 +1125,71 @@
           <a:lstStyle>
             <a:lvl1pPr marL="0" indent="0">
               <a:buNone/>
-              <a:defRPr sz="2000">
+              <a:defRPr sz="1500">
                 <a:solidFill>
                   <a:srgbClr val="111111"/>
                 </a:solidFill>
               </a:defRPr>
             </a:lvl1pPr>
-            <a:lvl2pPr marL="457200" indent="0">
+            <a:lvl2pPr marL="342900" indent="0">
               <a:buNone/>
-              <a:defRPr sz="1800">
+              <a:defRPr sz="1350">
                 <a:solidFill>
                   <a:srgbClr val="111111"/>
                 </a:solidFill>
               </a:defRPr>
             </a:lvl2pPr>
-            <a:lvl3pPr marL="914400" indent="0">
+            <a:lvl3pPr marL="685800" indent="0">
               <a:buNone/>
-              <a:defRPr sz="1600">
+              <a:defRPr sz="1200">
                 <a:solidFill>
                   <a:srgbClr val="111111"/>
                 </a:solidFill>
               </a:defRPr>
             </a:lvl3pPr>
-            <a:lvl4pPr marL="1371600" indent="0">
+            <a:lvl4pPr marL="1028700" indent="0">
               <a:buNone/>
-              <a:defRPr sz="1400">
+              <a:defRPr sz="1050">
                 <a:solidFill>
                   <a:srgbClr val="111111"/>
                 </a:solidFill>
               </a:defRPr>
             </a:lvl4pPr>
-            <a:lvl5pPr marL="1828800" indent="0">
+            <a:lvl5pPr marL="1371600" indent="0">
               <a:buNone/>
-              <a:defRPr sz="1400">
+              <a:defRPr sz="1050">
                 <a:solidFill>
                   <a:srgbClr val="111111"/>
                 </a:solidFill>
               </a:defRPr>
             </a:lvl5pPr>
-            <a:lvl6pPr marL="2286000" indent="0">
+            <a:lvl6pPr marL="1714500" indent="0">
               <a:buNone/>
-              <a:defRPr sz="1400">
+              <a:defRPr sz="1050">
                 <a:solidFill>
                   <a:srgbClr val="111111"/>
                 </a:solidFill>
               </a:defRPr>
             </a:lvl6pPr>
-            <a:lvl7pPr marL="2743200" indent="0">
+            <a:lvl7pPr marL="2057400" indent="0">
               <a:buNone/>
-              <a:defRPr sz="1400">
+              <a:defRPr sz="1050">
                 <a:solidFill>
                   <a:srgbClr val="111111"/>
                 </a:solidFill>
               </a:defRPr>
             </a:lvl7pPr>
-            <a:lvl8pPr marL="3200400" indent="0">
+            <a:lvl8pPr marL="2400300" indent="0">
               <a:buNone/>
-              <a:defRPr sz="1400">
+              <a:defRPr sz="1050">
                 <a:solidFill>
                   <a:srgbClr val="111111"/>
                 </a:solidFill>
               </a:defRPr>
             </a:lvl8pPr>
-            <a:lvl9pPr marL="3657600" indent="0">
+            <a:lvl9pPr marL="2743200" indent="0">
               <a:buNone/>
-              <a:defRPr sz="1400">
+              <a:defRPr sz="1050">
                 <a:solidFill>
                   <a:srgbClr val="111111"/>
                 </a:solidFill>
@@ -1112,7 +1199,7 @@
           <a:p>
             <a:pPr lvl="0"/>
             <a:r>
-              <a:rPr lang="en-US" smtClean="0">
+              <a:rPr lang="en-US">
                 <a:solidFill>
                   <a:srgbClr val="111111"/>
                 </a:solidFill>
@@ -1137,15 +1224,19 @@
           <a:bodyPr/>
           <a:lstStyle/>
           <a:p>
-            <a:fld id="{5BCAD085-E8A6-8845-BD4E-CB4CCA059FC4}" type="datetimeFigureOut">
+            <a:fld id="{241EB5C9-1307-BA42-ABA2-0BC069CD8E7F}" type="datetimeFigureOut">
               <a:rPr lang="en-US" smtClean="0">
                 <a:solidFill>
                   <a:srgbClr val="111111"/>
                 </a:solidFill>
               </a:rPr>
-              <a:t>1/27/13</a:t>
+              <a:t>1/2/22</a:t>
             </a:fld>
-            <a:endParaRPr lang="en-US"/>
+            <a:endParaRPr lang="en-US">
+              <a:solidFill>
+                <a:srgbClr val="111111"/>
+              </a:solidFill>
+            </a:endParaRPr>
           </a:p>
         </p:txBody>
       </p:sp>
@@ -1164,7 +1255,11 @@
           <a:bodyPr/>
           <a:lstStyle/>
           <a:p>
-            <a:endParaRPr lang="en-US"/>
+            <a:endParaRPr lang="en-US">
+              <a:solidFill>
+                <a:srgbClr val="111111"/>
+              </a:solidFill>
+            </a:endParaRPr>
           </a:p>
         </p:txBody>
       </p:sp>
@@ -1183,7 +1278,7 @@
           <a:bodyPr/>
           <a:lstStyle/>
           <a:p>
-            <a:fld id="{C1FF6DA9-008F-8B48-92A6-B652298478BF}" type="slidenum">
+            <a:fld id="{C5EF2332-01BF-834F-8236-50238282D533}" type="slidenum">
               <a:rPr lang="en-US" smtClean="0">
                 <a:solidFill>
                   <a:srgbClr val="111111"/>
@@ -1191,14 +1286,18 @@
               </a:rPr>
               <a:t>‹#›</a:t>
             </a:fld>
-            <a:endParaRPr lang="en-US"/>
+            <a:endParaRPr lang="en-US">
+              <a:solidFill>
+                <a:srgbClr val="111111"/>
+              </a:solidFill>
+            </a:endParaRPr>
           </a:p>
         </p:txBody>
       </p:sp>
     </p:spTree>
     <p:extLst>
       <p:ext uri="{BB962C8B-B14F-4D97-AF65-F5344CB8AC3E}">
-        <p14:creationId xmlns:p14="http://schemas.microsoft.com/office/powerpoint/2010/main" val="960648375"/>
+        <p14:creationId xmlns:p14="http://schemas.microsoft.com/office/powerpoint/2010/main" val="1073069076"/>
       </p:ext>
     </p:extLst>
   </p:cSld>
@@ -1241,14 +1340,13 @@
           <a:lstStyle/>
           <a:p>
             <a:r>
-              <a:rPr lang="en-US" smtClean="0">
+              <a:rPr lang="en-US">
                 <a:solidFill>
                   <a:srgbClr val="111111"/>
                 </a:solidFill>
               </a:rPr>
               <a:t>Click to edit Master title style</a:t>
             </a:r>
-            <a:endParaRPr lang="en-US"/>
           </a:p>
         </p:txBody>
       </p:sp>
@@ -1264,71 +1362,71 @@
         </p:nvSpPr>
         <p:spPr>
           <a:xfrm>
-            <a:off x="457200" y="1600200"/>
-            <a:ext cx="4038600" cy="4525963"/>
+            <a:off x="457200" y="1200151"/>
+            <a:ext cx="4038600" cy="3394472"/>
           </a:xfrm>
         </p:spPr>
         <p:txBody>
           <a:bodyPr/>
           <a:lstStyle>
             <a:lvl1pPr>
-              <a:defRPr sz="2800">
+              <a:defRPr sz="2100">
                 <a:solidFill>
                   <a:srgbClr val="111111"/>
                 </a:solidFill>
               </a:defRPr>
             </a:lvl1pPr>
             <a:lvl2pPr>
-              <a:defRPr sz="2400">
+              <a:defRPr sz="1800">
                 <a:solidFill>
                   <a:srgbClr val="111111"/>
                 </a:solidFill>
               </a:defRPr>
             </a:lvl2pPr>
             <a:lvl3pPr>
-              <a:defRPr sz="2000">
+              <a:defRPr sz="1500">
                 <a:solidFill>
                   <a:srgbClr val="111111"/>
                 </a:solidFill>
               </a:defRPr>
             </a:lvl3pPr>
             <a:lvl4pPr>
-              <a:defRPr sz="1800">
+              <a:defRPr sz="1350">
                 <a:solidFill>
                   <a:srgbClr val="111111"/>
                 </a:solidFill>
               </a:defRPr>
             </a:lvl4pPr>
             <a:lvl5pPr>
-              <a:defRPr sz="1800">
+              <a:defRPr sz="1350">
                 <a:solidFill>
                   <a:srgbClr val="111111"/>
                 </a:solidFill>
               </a:defRPr>
             </a:lvl5pPr>
             <a:lvl6pPr>
-              <a:defRPr sz="1800">
+              <a:defRPr sz="1350">
                 <a:solidFill>
                   <a:srgbClr val="111111"/>
                 </a:solidFill>
               </a:defRPr>
             </a:lvl6pPr>
             <a:lvl7pPr>
-              <a:defRPr sz="1800">
+              <a:defRPr sz="1350">
                 <a:solidFill>
                   <a:srgbClr val="111111"/>
                 </a:solidFill>
               </a:defRPr>
             </a:lvl7pPr>
             <a:lvl8pPr>
-              <a:defRPr sz="1800">
+              <a:defRPr sz="1350">
                 <a:solidFill>
                   <a:srgbClr val="111111"/>
                 </a:solidFill>
               </a:defRPr>
             </a:lvl8pPr>
             <a:lvl9pPr>
-              <a:defRPr sz="1800">
+              <a:defRPr sz="1350">
                 <a:solidFill>
                   <a:srgbClr val="111111"/>
                 </a:solidFill>
@@ -1338,7 +1436,7 @@
           <a:p>
             <a:pPr lvl="0"/>
             <a:r>
-              <a:rPr lang="en-US" smtClean="0">
+              <a:rPr lang="en-US">
                 <a:solidFill>
                   <a:srgbClr val="111111"/>
                 </a:solidFill>
@@ -1349,7 +1447,7 @@
           <a:p>
             <a:pPr lvl="1"/>
             <a:r>
-              <a:rPr lang="en-US" smtClean="0">
+              <a:rPr lang="en-US">
                 <a:solidFill>
                   <a:srgbClr val="111111"/>
                 </a:solidFill>
@@ -1360,7 +1458,7 @@
           <a:p>
             <a:pPr lvl="2"/>
             <a:r>
-              <a:rPr lang="en-US" smtClean="0">
+              <a:rPr lang="en-US">
                 <a:solidFill>
                   <a:srgbClr val="111111"/>
                 </a:solidFill>
@@ -1371,7 +1469,7 @@
           <a:p>
             <a:pPr lvl="3"/>
             <a:r>
-              <a:rPr lang="en-US" smtClean="0">
+              <a:rPr lang="en-US">
                 <a:solidFill>
                   <a:srgbClr val="111111"/>
                 </a:solidFill>
@@ -1382,14 +1480,13 @@
           <a:p>
             <a:pPr lvl="4"/>
             <a:r>
-              <a:rPr lang="en-US" smtClean="0">
+              <a:rPr lang="en-US">
                 <a:solidFill>
                   <a:srgbClr val="111111"/>
                 </a:solidFill>
               </a:rPr>
               <a:t>Fifth level</a:t>
             </a:r>
-            <a:endParaRPr lang="en-US"/>
           </a:p>
         </p:txBody>
       </p:sp>
@@ -1405,71 +1502,71 @@
         </p:nvSpPr>
         <p:spPr>
           <a:xfrm>
-            <a:off x="4648200" y="1600200"/>
-            <a:ext cx="4038600" cy="4525963"/>
+            <a:off x="4648200" y="1200151"/>
+            <a:ext cx="4038600" cy="3394472"/>
           </a:xfrm>
         </p:spPr>
         <p:txBody>
           <a:bodyPr/>
           <a:lstStyle>
             <a:lvl1pPr>
-              <a:defRPr sz="2800">
+              <a:defRPr sz="2100">
                 <a:solidFill>
                   <a:srgbClr val="111111"/>
                 </a:solidFill>
               </a:defRPr>
             </a:lvl1pPr>
             <a:lvl2pPr>
-              <a:defRPr sz="2400">
+              <a:defRPr sz="1800">
                 <a:solidFill>
                   <a:srgbClr val="111111"/>
                 </a:solidFill>
               </a:defRPr>
             </a:lvl2pPr>
             <a:lvl3pPr>
-              <a:defRPr sz="2000">
+              <a:defRPr sz="1500">
                 <a:solidFill>
                   <a:srgbClr val="111111"/>
                 </a:solidFill>
               </a:defRPr>
             </a:lvl3pPr>
             <a:lvl4pPr>
-              <a:defRPr sz="1800">
+              <a:defRPr sz="1350">
                 <a:solidFill>
                   <a:srgbClr val="111111"/>
                 </a:solidFill>
               </a:defRPr>
             </a:lvl4pPr>
             <a:lvl5pPr>
-              <a:defRPr sz="1800">
+              <a:defRPr sz="1350">
                 <a:solidFill>
                   <a:srgbClr val="111111"/>
                 </a:solidFill>
               </a:defRPr>
             </a:lvl5pPr>
             <a:lvl6pPr>
-              <a:defRPr sz="1800">
+              <a:defRPr sz="1350">
                 <a:solidFill>
                   <a:srgbClr val="111111"/>
                 </a:solidFill>
               </a:defRPr>
             </a:lvl6pPr>
             <a:lvl7pPr>
-              <a:defRPr sz="1800">
+              <a:defRPr sz="1350">
                 <a:solidFill>
                   <a:srgbClr val="111111"/>
                 </a:solidFill>
               </a:defRPr>
             </a:lvl7pPr>
             <a:lvl8pPr>
-              <a:defRPr sz="1800">
+              <a:defRPr sz="1350">
                 <a:solidFill>
                   <a:srgbClr val="111111"/>
                 </a:solidFill>
               </a:defRPr>
             </a:lvl8pPr>
             <a:lvl9pPr>
-              <a:defRPr sz="1800">
+              <a:defRPr sz="1350">
                 <a:solidFill>
                   <a:srgbClr val="111111"/>
                 </a:solidFill>
@@ -1479,7 +1576,7 @@
           <a:p>
             <a:pPr lvl="0"/>
             <a:r>
-              <a:rPr lang="en-US" smtClean="0">
+              <a:rPr lang="en-US">
                 <a:solidFill>
                   <a:srgbClr val="111111"/>
                 </a:solidFill>
@@ -1490,7 +1587,7 @@
           <a:p>
             <a:pPr lvl="1"/>
             <a:r>
-              <a:rPr lang="en-US" smtClean="0">
+              <a:rPr lang="en-US">
                 <a:solidFill>
                   <a:srgbClr val="111111"/>
                 </a:solidFill>
@@ -1501,7 +1598,7 @@
           <a:p>
             <a:pPr lvl="2"/>
             <a:r>
-              <a:rPr lang="en-US" smtClean="0">
+              <a:rPr lang="en-US">
                 <a:solidFill>
                   <a:srgbClr val="111111"/>
                 </a:solidFill>
@@ -1512,7 +1609,7 @@
           <a:p>
             <a:pPr lvl="3"/>
             <a:r>
-              <a:rPr lang="en-US" smtClean="0">
+              <a:rPr lang="en-US">
                 <a:solidFill>
                   <a:srgbClr val="111111"/>
                 </a:solidFill>
@@ -1523,14 +1620,13 @@
           <a:p>
             <a:pPr lvl="4"/>
             <a:r>
-              <a:rPr lang="en-US" smtClean="0">
+              <a:rPr lang="en-US">
                 <a:solidFill>
                   <a:srgbClr val="111111"/>
                 </a:solidFill>
               </a:rPr>
               <a:t>Fifth level</a:t>
             </a:r>
-            <a:endParaRPr lang="en-US"/>
           </a:p>
         </p:txBody>
       </p:sp>
@@ -1549,15 +1645,19 @@
           <a:bodyPr/>
           <a:lstStyle/>
           <a:p>
-            <a:fld id="{5BCAD085-E8A6-8845-BD4E-CB4CCA059FC4}" type="datetimeFigureOut">
+            <a:fld id="{241EB5C9-1307-BA42-ABA2-0BC069CD8E7F}" type="datetimeFigureOut">
               <a:rPr lang="en-US" smtClean="0">
                 <a:solidFill>
                   <a:srgbClr val="111111"/>
                 </a:solidFill>
               </a:rPr>
-              <a:t>1/27/13</a:t>
+              <a:t>1/2/22</a:t>
             </a:fld>
-            <a:endParaRPr lang="en-US"/>
+            <a:endParaRPr lang="en-US">
+              <a:solidFill>
+                <a:srgbClr val="111111"/>
+              </a:solidFill>
+            </a:endParaRPr>
           </a:p>
         </p:txBody>
       </p:sp>
@@ -1576,7 +1676,11 @@
           <a:bodyPr/>
           <a:lstStyle/>
           <a:p>
-            <a:endParaRPr lang="en-US"/>
+            <a:endParaRPr lang="en-US">
+              <a:solidFill>
+                <a:srgbClr val="111111"/>
+              </a:solidFill>
+            </a:endParaRPr>
           </a:p>
         </p:txBody>
       </p:sp>
@@ -1595,7 +1699,7 @@
           <a:bodyPr/>
           <a:lstStyle/>
           <a:p>
-            <a:fld id="{C1FF6DA9-008F-8B48-92A6-B652298478BF}" type="slidenum">
+            <a:fld id="{C5EF2332-01BF-834F-8236-50238282D533}" type="slidenum">
               <a:rPr lang="en-US" smtClean="0">
                 <a:solidFill>
                   <a:srgbClr val="111111"/>
@@ -1603,14 +1707,18 @@
               </a:rPr>
               <a:t>‹#›</a:t>
             </a:fld>
-            <a:endParaRPr lang="en-US"/>
+            <a:endParaRPr lang="en-US">
+              <a:solidFill>
+                <a:srgbClr val="111111"/>
+              </a:solidFill>
+            </a:endParaRPr>
           </a:p>
         </p:txBody>
       </p:sp>
     </p:spTree>
     <p:extLst>
       <p:ext uri="{BB962C8B-B14F-4D97-AF65-F5344CB8AC3E}">
-        <p14:creationId xmlns:p14="http://schemas.microsoft.com/office/powerpoint/2010/main" val="2782244947"/>
+        <p14:creationId xmlns:p14="http://schemas.microsoft.com/office/powerpoint/2010/main" val="2619886245"/>
       </p:ext>
     </p:extLst>
   </p:cSld>
@@ -1661,14 +1769,13 @@
           </a:lstStyle>
           <a:p>
             <a:r>
-              <a:rPr lang="en-US" smtClean="0">
+              <a:rPr lang="en-US">
                 <a:solidFill>
                   <a:srgbClr val="111111"/>
                 </a:solidFill>
               </a:rPr>
               <a:t>Click to edit Master title style</a:t>
             </a:r>
-            <a:endParaRPr lang="en-US"/>
           </a:p>
         </p:txBody>
       </p:sp>
@@ -1684,8 +1791,8 @@
         </p:nvSpPr>
         <p:spPr>
           <a:xfrm>
-            <a:off x="457200" y="1535113"/>
-            <a:ext cx="4040188" cy="639762"/>
+            <a:off x="457200" y="1151335"/>
+            <a:ext cx="4040188" cy="479822"/>
           </a:xfrm>
         </p:spPr>
         <p:txBody>
@@ -1693,71 +1800,71 @@
           <a:lstStyle>
             <a:lvl1pPr marL="0" indent="0">
               <a:buNone/>
-              <a:defRPr sz="2400" b="1">
+              <a:defRPr sz="1800" b="1">
                 <a:solidFill>
                   <a:srgbClr val="111111"/>
                 </a:solidFill>
               </a:defRPr>
             </a:lvl1pPr>
-            <a:lvl2pPr marL="457200" indent="0">
+            <a:lvl2pPr marL="342900" indent="0">
               <a:buNone/>
-              <a:defRPr sz="2000" b="1">
+              <a:defRPr sz="1500" b="1">
                 <a:solidFill>
                   <a:srgbClr val="111111"/>
                 </a:solidFill>
               </a:defRPr>
             </a:lvl2pPr>
-            <a:lvl3pPr marL="914400" indent="0">
+            <a:lvl3pPr marL="685800" indent="0">
               <a:buNone/>
-              <a:defRPr sz="1800" b="1">
+              <a:defRPr sz="1350" b="1">
                 <a:solidFill>
                   <a:srgbClr val="111111"/>
                 </a:solidFill>
               </a:defRPr>
             </a:lvl3pPr>
-            <a:lvl4pPr marL="1371600" indent="0">
+            <a:lvl4pPr marL="1028700" indent="0">
               <a:buNone/>
-              <a:defRPr sz="1600" b="1">
+              <a:defRPr sz="1200" b="1">
                 <a:solidFill>
                   <a:srgbClr val="111111"/>
                 </a:solidFill>
               </a:defRPr>
             </a:lvl4pPr>
-            <a:lvl5pPr marL="1828800" indent="0">
+            <a:lvl5pPr marL="1371600" indent="0">
               <a:buNone/>
-              <a:defRPr sz="1600" b="1">
+              <a:defRPr sz="1200" b="1">
                 <a:solidFill>
                   <a:srgbClr val="111111"/>
                 </a:solidFill>
               </a:defRPr>
             </a:lvl5pPr>
-            <a:lvl6pPr marL="2286000" indent="0">
+            <a:lvl6pPr marL="1714500" indent="0">
               <a:buNone/>
-              <a:defRPr sz="1600" b="1">
+              <a:defRPr sz="1200" b="1">
                 <a:solidFill>
                   <a:srgbClr val="111111"/>
                 </a:solidFill>
               </a:defRPr>
             </a:lvl6pPr>
-            <a:lvl7pPr marL="2743200" indent="0">
+            <a:lvl7pPr marL="2057400" indent="0">
               <a:buNone/>
-              <a:defRPr sz="1600" b="1">
+              <a:defRPr sz="1200" b="1">
                 <a:solidFill>
                   <a:srgbClr val="111111"/>
                 </a:solidFill>
               </a:defRPr>
             </a:lvl7pPr>
-            <a:lvl8pPr marL="3200400" indent="0">
+            <a:lvl8pPr marL="2400300" indent="0">
               <a:buNone/>
-              <a:defRPr sz="1600" b="1">
+              <a:defRPr sz="1200" b="1">
                 <a:solidFill>
                   <a:srgbClr val="111111"/>
                 </a:solidFill>
               </a:defRPr>
             </a:lvl8pPr>
-            <a:lvl9pPr marL="3657600" indent="0">
+            <a:lvl9pPr marL="2743200" indent="0">
               <a:buNone/>
-              <a:defRPr sz="1600" b="1">
+              <a:defRPr sz="1200" b="1">
                 <a:solidFill>
                   <a:srgbClr val="111111"/>
                 </a:solidFill>
@@ -1767,7 +1874,7 @@
           <a:p>
             <a:pPr lvl="0"/>
             <a:r>
-              <a:rPr lang="en-US" smtClean="0">
+              <a:rPr lang="en-US">
                 <a:solidFill>
                   <a:srgbClr val="111111"/>
                 </a:solidFill>
@@ -1789,71 +1896,71 @@
         </p:nvSpPr>
         <p:spPr>
           <a:xfrm>
-            <a:off x="457200" y="2174875"/>
-            <a:ext cx="4040188" cy="3951288"/>
+            <a:off x="457200" y="1631156"/>
+            <a:ext cx="4040188" cy="2963466"/>
           </a:xfrm>
         </p:spPr>
         <p:txBody>
           <a:bodyPr/>
           <a:lstStyle>
             <a:lvl1pPr>
-              <a:defRPr sz="2400">
+              <a:defRPr sz="1800">
                 <a:solidFill>
                   <a:srgbClr val="111111"/>
                 </a:solidFill>
               </a:defRPr>
             </a:lvl1pPr>
             <a:lvl2pPr>
-              <a:defRPr sz="2000">
+              <a:defRPr sz="1500">
                 <a:solidFill>
                   <a:srgbClr val="111111"/>
                 </a:solidFill>
               </a:defRPr>
             </a:lvl2pPr>
             <a:lvl3pPr>
-              <a:defRPr sz="1800">
+              <a:defRPr sz="1350">
                 <a:solidFill>
                   <a:srgbClr val="111111"/>
                 </a:solidFill>
               </a:defRPr>
             </a:lvl3pPr>
             <a:lvl4pPr>
-              <a:defRPr sz="1600">
+              <a:defRPr sz="1200">
                 <a:solidFill>
                   <a:srgbClr val="111111"/>
                 </a:solidFill>
               </a:defRPr>
             </a:lvl4pPr>
             <a:lvl5pPr>
-              <a:defRPr sz="1600">
+              <a:defRPr sz="1200">
                 <a:solidFill>
                   <a:srgbClr val="111111"/>
                 </a:solidFill>
               </a:defRPr>
             </a:lvl5pPr>
             <a:lvl6pPr>
-              <a:defRPr sz="1600">
+              <a:defRPr sz="1200">
                 <a:solidFill>
                   <a:srgbClr val="111111"/>
                 </a:solidFill>
               </a:defRPr>
             </a:lvl6pPr>
             <a:lvl7pPr>
-              <a:defRPr sz="1600">
+              <a:defRPr sz="1200">
                 <a:solidFill>
                   <a:srgbClr val="111111"/>
                 </a:solidFill>
               </a:defRPr>
             </a:lvl7pPr>
             <a:lvl8pPr>
-              <a:defRPr sz="1600">
+              <a:defRPr sz="1200">
                 <a:solidFill>
                   <a:srgbClr val="111111"/>
                 </a:solidFill>
               </a:defRPr>
             </a:lvl8pPr>
             <a:lvl9pPr>
-              <a:defRPr sz="1600">
+              <a:defRPr sz="1200">
                 <a:solidFill>
                   <a:srgbClr val="111111"/>
                 </a:solidFill>
@@ -1863,7 +1970,7 @@
           <a:p>
             <a:pPr lvl="0"/>
             <a:r>
-              <a:rPr lang="en-US" smtClean="0">
+              <a:rPr lang="en-US">
                 <a:solidFill>
                   <a:srgbClr val="111111"/>
                 </a:solidFill>
@@ -1874,7 +1981,7 @@
           <a:p>
             <a:pPr lvl="1"/>
             <a:r>
-              <a:rPr lang="en-US" smtClean="0">
+              <a:rPr lang="en-US">
                 <a:solidFill>
                   <a:srgbClr val="111111"/>
                 </a:solidFill>
@@ -1885,7 +1992,7 @@
           <a:p>
             <a:pPr lvl="2"/>
             <a:r>
-              <a:rPr lang="en-US" smtClean="0">
+              <a:rPr lang="en-US">
                 <a:solidFill>
                   <a:srgbClr val="111111"/>
                 </a:solidFill>
@@ -1896,7 +2003,7 @@
           <a:p>
             <a:pPr lvl="3"/>
             <a:r>
-              <a:rPr lang="en-US" smtClean="0">
+              <a:rPr lang="en-US">
                 <a:solidFill>
                   <a:srgbClr val="111111"/>
                 </a:solidFill>
@@ -1907,14 +2014,13 @@
           <a:p>
             <a:pPr lvl="4"/>
             <a:r>
-              <a:rPr lang="en-US" smtClean="0">
+              <a:rPr lang="en-US">
                 <a:solidFill>
                   <a:srgbClr val="111111"/>
                 </a:solidFill>
               </a:rPr>
               <a:t>Fifth level</a:t>
             </a:r>
-            <a:endParaRPr lang="en-US"/>
           </a:p>
         </p:txBody>
       </p:sp>
@@ -1930,8 +2036,8 @@
         </p:nvSpPr>
         <p:spPr>
           <a:xfrm>
-            <a:off x="4645025" y="1535113"/>
-            <a:ext cx="4041775" cy="639762"/>
+            <a:off x="4645026" y="1151335"/>
+            <a:ext cx="4041775" cy="479822"/>
           </a:xfrm>
         </p:spPr>
         <p:txBody>
@@ -1939,71 +2045,71 @@
           <a:lstStyle>
             <a:lvl1pPr marL="0" indent="0">
               <a:buNone/>
-              <a:defRPr sz="2400" b="1">
+              <a:defRPr sz="1800" b="1">
                 <a:solidFill>
                   <a:srgbClr val="111111"/>
                 </a:solidFill>
               </a:defRPr>
             </a:lvl1pPr>
-            <a:lvl2pPr marL="457200" indent="0">
+            <a:lvl2pPr marL="342900" indent="0">
               <a:buNone/>
-              <a:defRPr sz="2000" b="1">
+              <a:defRPr sz="1500" b="1">
                 <a:solidFill>
                   <a:srgbClr val="111111"/>
                 </a:solidFill>
               </a:defRPr>
             </a:lvl2pPr>
-            <a:lvl3pPr marL="914400" indent="0">
+            <a:lvl3pPr marL="685800" indent="0">
               <a:buNone/>
-              <a:defRPr sz="1800" b="1">
+              <a:defRPr sz="1350" b="1">
                 <a:solidFill>
                   <a:srgbClr val="111111"/>
                 </a:solidFill>
               </a:defRPr>
             </a:lvl3pPr>
-            <a:lvl4pPr marL="1371600" indent="0">
+            <a:lvl4pPr marL="1028700" indent="0">
               <a:buNone/>
-              <a:defRPr sz="1600" b="1">
+              <a:defRPr sz="1200" b="1">
                 <a:solidFill>
                   <a:srgbClr val="111111"/>
                 </a:solidFill>
               </a:defRPr>
             </a:lvl4pPr>
-            <a:lvl5pPr marL="1828800" indent="0">
+            <a:lvl5pPr marL="1371600" indent="0">
               <a:buNone/>
-              <a:defRPr sz="1600" b="1">
+              <a:defRPr sz="1200" b="1">
                 <a:solidFill>
                   <a:srgbClr val="111111"/>
                 </a:solidFill>
               </a:defRPr>
             </a:lvl5pPr>
-            <a:lvl6pPr marL="2286000" indent="0">
+            <a:lvl6pPr marL="1714500" indent="0">
               <a:buNone/>
-              <a:defRPr sz="1600" b="1">
+              <a:defRPr sz="1200" b="1">
                 <a:solidFill>
                   <a:srgbClr val="111111"/>
                 </a:solidFill>
               </a:defRPr>
             </a:lvl6pPr>
-            <a:lvl7pPr marL="2743200" indent="0">
+            <a:lvl7pPr marL="2057400" indent="0">
               <a:buNone/>
-              <a:defRPr sz="1600" b="1">
+              <a:defRPr sz="1200" b="1">
                 <a:solidFill>
                   <a:srgbClr val="111111"/>
                 </a:solidFill>
               </a:defRPr>
             </a:lvl7pPr>
-            <a:lvl8pPr marL="3200400" indent="0">
+            <a:lvl8pPr marL="2400300" indent="0">
               <a:buNone/>
-              <a:defRPr sz="1600" b="1">
+              <a:defRPr sz="1200" b="1">
                 <a:solidFill>
                   <a:srgbClr val="111111"/>
                 </a:solidFill>
               </a:defRPr>
             </a:lvl8pPr>
-            <a:lvl9pPr marL="3657600" indent="0">
+            <a:lvl9pPr marL="2743200" indent="0">
               <a:buNone/>
-              <a:defRPr sz="1600" b="1">
+              <a:defRPr sz="1200" b="1">
                 <a:solidFill>
                   <a:srgbClr val="111111"/>
                 </a:solidFill>
@@ -2013,7 +2119,7 @@
           <a:p>
             <a:pPr lvl="0"/>
             <a:r>
-              <a:rPr lang="en-US" smtClean="0">
+              <a:rPr lang="en-US">
                 <a:solidFill>
                   <a:srgbClr val="111111"/>
                 </a:solidFill>
@@ -2035,71 +2141,71 @@
         </p:nvSpPr>
         <p:spPr>
           <a:xfrm>
-            <a:off x="4645025" y="2174875"/>
-            <a:ext cx="4041775" cy="3951288"/>
+            <a:off x="4645026" y="1631156"/>
+            <a:ext cx="4041775" cy="2963466"/>
           </a:xfrm>
         </p:spPr>
         <p:txBody>
           <a:bodyPr/>
           <a:lstStyle>
             <a:lvl1pPr>
-              <a:defRPr sz="2400">
+              <a:defRPr sz="1800">
                 <a:solidFill>
                   <a:srgbClr val="111111"/>
                 </a:solidFill>
               </a:defRPr>
             </a:lvl1pPr>
             <a:lvl2pPr>
-              <a:defRPr sz="2000">
+              <a:defRPr sz="1500">
                 <a:solidFill>
                   <a:srgbClr val="111111"/>
                 </a:solidFill>
               </a:defRPr>
             </a:lvl2pPr>
             <a:lvl3pPr>
-              <a:defRPr sz="1800">
+              <a:defRPr sz="1350">
                 <a:solidFill>
                   <a:srgbClr val="111111"/>
                 </a:solidFill>
               </a:defRPr>
             </a:lvl3pPr>
             <a:lvl4pPr>
-              <a:defRPr sz="1600">
+              <a:defRPr sz="1200">
                 <a:solidFill>
                   <a:srgbClr val="111111"/>
                 </a:solidFill>
               </a:defRPr>
             </a:lvl4pPr>
             <a:lvl5pPr>
-              <a:defRPr sz="1600">
+              <a:defRPr sz="1200">
                 <a:solidFill>
                   <a:srgbClr val="111111"/>
                 </a:solidFill>
               </a:defRPr>
             </a:lvl5pPr>
             <a:lvl6pPr>
-              <a:defRPr sz="1600">
+              <a:defRPr sz="1200">
                 <a:solidFill>
                   <a:srgbClr val="111111"/>
                 </a:solidFill>
               </a:defRPr>
             </a:lvl6pPr>
             <a:lvl7pPr>
-              <a:defRPr sz="1600">
+              <a:defRPr sz="1200">
                 <a:solidFill>
                   <a:srgbClr val="111111"/>
                 </a:solidFill>
               </a:defRPr>
             </a:lvl7pPr>
             <a:lvl8pPr>
-              <a:defRPr sz="1600">
+              <a:defRPr sz="1200">
                 <a:solidFill>
                   <a:srgbClr val="111111"/>
                 </a:solidFill>
               </a:defRPr>
             </a:lvl8pPr>
             <a:lvl9pPr>
-              <a:defRPr sz="1600">
+              <a:defRPr sz="1200">
                 <a:solidFill>
                   <a:srgbClr val="111111"/>
                 </a:solidFill>
@@ -2109,7 +2215,7 @@
           <a:p>
             <a:pPr lvl="0"/>
             <a:r>
-              <a:rPr lang="en-US" smtClean="0">
+              <a:rPr lang="en-US">
                 <a:solidFill>
                   <a:srgbClr val="111111"/>
                 </a:solidFill>
@@ -2120,7 +2226,7 @@
           <a:p>
             <a:pPr lvl="1"/>
             <a:r>
-              <a:rPr lang="en-US" smtClean="0">
+              <a:rPr lang="en-US">
                 <a:solidFill>
                   <a:srgbClr val="111111"/>
                 </a:solidFill>
@@ -2131,7 +2237,7 @@
           <a:p>
             <a:pPr lvl="2"/>
             <a:r>
-              <a:rPr lang="en-US" smtClean="0">
+              <a:rPr lang="en-US">
                 <a:solidFill>
                   <a:srgbClr val="111111"/>
                 </a:solidFill>
@@ -2142,7 +2248,7 @@
           <a:p>
             <a:pPr lvl="3"/>
             <a:r>
-              <a:rPr lang="en-US" smtClean="0">
+              <a:rPr lang="en-US">
                 <a:solidFill>
                   <a:srgbClr val="111111"/>
                 </a:solidFill>
@@ -2153,14 +2259,13 @@
           <a:p>
             <a:pPr lvl="4"/>
             <a:r>
-              <a:rPr lang="en-US" smtClean="0">
+              <a:rPr lang="en-US">
                 <a:solidFill>
                   <a:srgbClr val="111111"/>
                 </a:solidFill>
               </a:rPr>
               <a:t>Fifth level</a:t>
             </a:r>
-            <a:endParaRPr lang="en-US"/>
           </a:p>
         </p:txBody>
       </p:sp>
@@ -2179,15 +2284,19 @@
           <a:bodyPr/>
           <a:lstStyle/>
           <a:p>
-            <a:fld id="{5BCAD085-E8A6-8845-BD4E-CB4CCA059FC4}" type="datetimeFigureOut">
+            <a:fld id="{241EB5C9-1307-BA42-ABA2-0BC069CD8E7F}" type="datetimeFigureOut">
               <a:rPr lang="en-US" smtClean="0">
                 <a:solidFill>
                   <a:srgbClr val="111111"/>
                 </a:solidFill>
               </a:rPr>
-              <a:t>1/27/13</a:t>
+              <a:t>1/2/22</a:t>
             </a:fld>
-            <a:endParaRPr lang="en-US"/>
+            <a:endParaRPr lang="en-US">
+              <a:solidFill>
+                <a:srgbClr val="111111"/>
+              </a:solidFill>
+            </a:endParaRPr>
           </a:p>
         </p:txBody>
       </p:sp>
@@ -2206,7 +2315,11 @@
           <a:bodyPr/>
           <a:lstStyle/>
           <a:p>
-            <a:endParaRPr lang="en-US"/>
+            <a:endParaRPr lang="en-US">
+              <a:solidFill>
+                <a:srgbClr val="111111"/>
+              </a:solidFill>
+            </a:endParaRPr>
           </a:p>
         </p:txBody>
       </p:sp>
@@ -2225,7 +2338,7 @@
           <a:bodyPr/>
           <a:lstStyle/>
           <a:p>
-            <a:fld id="{C1FF6DA9-008F-8B48-92A6-B652298478BF}" type="slidenum">
+            <a:fld id="{C5EF2332-01BF-834F-8236-50238282D533}" type="slidenum">
               <a:rPr lang="en-US" smtClean="0">
                 <a:solidFill>
                   <a:srgbClr val="111111"/>
@@ -2233,14 +2346,18 @@
               </a:rPr>
               <a:t>‹#›</a:t>
             </a:fld>
-            <a:endParaRPr lang="en-US"/>
+            <a:endParaRPr lang="en-US">
+              <a:solidFill>
+                <a:srgbClr val="111111"/>
+              </a:solidFill>
+            </a:endParaRPr>
           </a:p>
         </p:txBody>
       </p:sp>
     </p:spTree>
     <p:extLst>
       <p:ext uri="{BB962C8B-B14F-4D97-AF65-F5344CB8AC3E}">
-        <p14:creationId xmlns:p14="http://schemas.microsoft.com/office/powerpoint/2010/main" val="990158736"/>
+        <p14:creationId xmlns:p14="http://schemas.microsoft.com/office/powerpoint/2010/main" val="2535793967"/>
       </p:ext>
     </p:extLst>
   </p:cSld>
@@ -2283,14 +2400,13 @@
           <a:lstStyle/>
           <a:p>
             <a:r>
-              <a:rPr lang="en-US" smtClean="0">
+              <a:rPr lang="en-US">
                 <a:solidFill>
                   <a:srgbClr val="111111"/>
                 </a:solidFill>
               </a:rPr>
               <a:t>Click to edit Master title style</a:t>
             </a:r>
-            <a:endParaRPr lang="en-US"/>
           </a:p>
         </p:txBody>
       </p:sp>
@@ -2309,15 +2425,19 @@
           <a:bodyPr/>
           <a:lstStyle/>
           <a:p>
-            <a:fld id="{5BCAD085-E8A6-8845-BD4E-CB4CCA059FC4}" type="datetimeFigureOut">
+            <a:fld id="{241EB5C9-1307-BA42-ABA2-0BC069CD8E7F}" type="datetimeFigureOut">
               <a:rPr lang="en-US" smtClean="0">
                 <a:solidFill>
                   <a:srgbClr val="111111"/>
                 </a:solidFill>
               </a:rPr>
-              <a:t>1/27/13</a:t>
+              <a:t>1/2/22</a:t>
             </a:fld>
-            <a:endParaRPr lang="en-US"/>
+            <a:endParaRPr lang="en-US">
+              <a:solidFill>
+                <a:srgbClr val="111111"/>
+              </a:solidFill>
+            </a:endParaRPr>
           </a:p>
         </p:txBody>
       </p:sp>
@@ -2336,7 +2456,11 @@
           <a:bodyPr/>
           <a:lstStyle/>
           <a:p>
-            <a:endParaRPr lang="en-US"/>
+            <a:endParaRPr lang="en-US">
+              <a:solidFill>
+                <a:srgbClr val="111111"/>
+              </a:solidFill>
+            </a:endParaRPr>
           </a:p>
         </p:txBody>
       </p:sp>
@@ -2355,7 +2479,7 @@
           <a:bodyPr/>
           <a:lstStyle/>
           <a:p>
-            <a:fld id="{C1FF6DA9-008F-8B48-92A6-B652298478BF}" type="slidenum">
+            <a:fld id="{C5EF2332-01BF-834F-8236-50238282D533}" type="slidenum">
               <a:rPr lang="en-US" smtClean="0">
                 <a:solidFill>
                   <a:srgbClr val="111111"/>
@@ -2363,14 +2487,18 @@
               </a:rPr>
               <a:t>‹#›</a:t>
             </a:fld>
-            <a:endParaRPr lang="en-US"/>
+            <a:endParaRPr lang="en-US">
+              <a:solidFill>
+                <a:srgbClr val="111111"/>
+              </a:solidFill>
+            </a:endParaRPr>
           </a:p>
         </p:txBody>
       </p:sp>
     </p:spTree>
     <p:extLst>
       <p:ext uri="{BB962C8B-B14F-4D97-AF65-F5344CB8AC3E}">
-        <p14:creationId xmlns:p14="http://schemas.microsoft.com/office/powerpoint/2010/main" val="727027711"/>
+        <p14:creationId xmlns:p14="http://schemas.microsoft.com/office/powerpoint/2010/main" val="3472721253"/>
       </p:ext>
     </p:extLst>
   </p:cSld>
@@ -2412,15 +2540,19 @@
           <a:bodyPr/>
           <a:lstStyle/>
           <a:p>
-            <a:fld id="{5BCAD085-E8A6-8845-BD4E-CB4CCA059FC4}" type="datetimeFigureOut">
+            <a:fld id="{241EB5C9-1307-BA42-ABA2-0BC069CD8E7F}" type="datetimeFigureOut">
               <a:rPr lang="en-US" smtClean="0">
                 <a:solidFill>
                   <a:srgbClr val="111111"/>
                 </a:solidFill>
               </a:rPr>
-              <a:t>1/27/13</a:t>
+              <a:t>1/2/22</a:t>
             </a:fld>
-            <a:endParaRPr lang="en-US"/>
+            <a:endParaRPr lang="en-US">
+              <a:solidFill>
+                <a:srgbClr val="111111"/>
+              </a:solidFill>
+            </a:endParaRPr>
           </a:p>
         </p:txBody>
       </p:sp>
@@ -2439,7 +2571,11 @@
           <a:bodyPr/>
           <a:lstStyle/>
           <a:p>
-            <a:endParaRPr lang="en-US"/>
+            <a:endParaRPr lang="en-US">
+              <a:solidFill>
+                <a:srgbClr val="111111"/>
+              </a:solidFill>
+            </a:endParaRPr>
           </a:p>
         </p:txBody>
       </p:sp>
@@ -2458,7 +2594,7 @@
           <a:bodyPr/>
           <a:lstStyle/>
           <a:p>
-            <a:fld id="{C1FF6DA9-008F-8B48-92A6-B652298478BF}" type="slidenum">
+            <a:fld id="{C5EF2332-01BF-834F-8236-50238282D533}" type="slidenum">
               <a:rPr lang="en-US" smtClean="0">
                 <a:solidFill>
                   <a:srgbClr val="111111"/>
@@ -2466,14 +2602,18 @@
               </a:rPr>
               <a:t>‹#›</a:t>
             </a:fld>
-            <a:endParaRPr lang="en-US"/>
+            <a:endParaRPr lang="en-US">
+              <a:solidFill>
+                <a:srgbClr val="111111"/>
+              </a:solidFill>
+            </a:endParaRPr>
           </a:p>
         </p:txBody>
       </p:sp>
     </p:spTree>
     <p:extLst>
       <p:ext uri="{BB962C8B-B14F-4D97-AF65-F5344CB8AC3E}">
-        <p14:creationId xmlns:p14="http://schemas.microsoft.com/office/powerpoint/2010/main" val="1212999818"/>
+        <p14:creationId xmlns:p14="http://schemas.microsoft.com/office/powerpoint/2010/main" val="2130901097"/>
       </p:ext>
     </p:extLst>
   </p:cSld>
@@ -2512,15 +2652,15 @@
         </p:nvSpPr>
         <p:spPr>
           <a:xfrm>
-            <a:off x="457200" y="273050"/>
-            <a:ext cx="3008313" cy="1162050"/>
+            <a:off x="457201" y="204787"/>
+            <a:ext cx="3008313" cy="871538"/>
           </a:xfrm>
         </p:spPr>
         <p:txBody>
           <a:bodyPr anchor="b"/>
           <a:lstStyle>
             <a:lvl1pPr algn="l">
-              <a:defRPr sz="2000" b="1">
+              <a:defRPr sz="1500" b="1">
                 <a:solidFill>
                   <a:srgbClr val="111111"/>
                 </a:solidFill>
@@ -2529,14 +2669,13 @@
           </a:lstStyle>
           <a:p>
             <a:r>
-              <a:rPr lang="en-US" smtClean="0">
+              <a:rPr lang="en-US">
                 <a:solidFill>
                   <a:srgbClr val="111111"/>
                 </a:solidFill>
               </a:rPr>
               <a:t>Click to edit Master title style</a:t>
             </a:r>
-            <a:endParaRPr lang="en-US"/>
           </a:p>
         </p:txBody>
       </p:sp>
@@ -2552,71 +2691,71 @@
         </p:nvSpPr>
         <p:spPr>
           <a:xfrm>
-            <a:off x="3575050" y="273050"/>
-            <a:ext cx="5111750" cy="5853113"/>
+            <a:off x="3575050" y="204788"/>
+            <a:ext cx="5111750" cy="4389835"/>
           </a:xfrm>
         </p:spPr>
         <p:txBody>
           <a:bodyPr/>
           <a:lstStyle>
             <a:lvl1pPr>
-              <a:defRPr sz="3200">
+              <a:defRPr sz="2400">
                 <a:solidFill>
                   <a:srgbClr val="111111"/>
                 </a:solidFill>
               </a:defRPr>
             </a:lvl1pPr>
             <a:lvl2pPr>
-              <a:defRPr sz="2800">
+              <a:defRPr sz="2100">
                 <a:solidFill>
                   <a:srgbClr val="111111"/>
                 </a:solidFill>
               </a:defRPr>
             </a:lvl2pPr>
             <a:lvl3pPr>
-              <a:defRPr sz="2400">
+              <a:defRPr sz="1800">
                 <a:solidFill>
                   <a:srgbClr val="111111"/>
                 </a:solidFill>
               </a:defRPr>
             </a:lvl3pPr>
             <a:lvl4pPr>
-              <a:defRPr sz="2000">
+              <a:defRPr sz="1500">
                 <a:solidFill>
                   <a:srgbClr val="111111"/>
                 </a:solidFill>
               </a:defRPr>
             </a:lvl4pPr>
             <a:lvl5pPr>
-              <a:defRPr sz="2000">
+              <a:defRPr sz="1500">
                 <a:solidFill>
                   <a:srgbClr val="111111"/>
                 </a:solidFill>
               </a:defRPr>
             </a:lvl5pPr>
             <a:lvl6pPr>
-              <a:defRPr sz="2000">
+              <a:defRPr sz="1500">
                 <a:solidFill>
                   <a:srgbClr val="111111"/>
                 </a:solidFill>
               </a:defRPr>
             </a:lvl6pPr>
             <a:lvl7pPr>
-              <a:defRPr sz="2000">
+              <a:defRPr sz="1500">
                 <a:solidFill>
                   <a:srgbClr val="111111"/>
                 </a:solidFill>
               </a:defRPr>
             </a:lvl7pPr>
             <a:lvl8pPr>
-              <a:defRPr sz="2000">
+              <a:defRPr sz="1500">
                 <a:solidFill>
                   <a:srgbClr val="111111"/>
                 </a:solidFill>
               </a:defRPr>
             </a:lvl8pPr>
             <a:lvl9pPr>
-              <a:defRPr sz="2000">
+              <a:defRPr sz="1500">
                 <a:solidFill>
                   <a:srgbClr val="111111"/>
                 </a:solidFill>
@@ -2626,7 +2765,7 @@
           <a:p>
             <a:pPr lvl="0"/>
             <a:r>
-              <a:rPr lang="en-US" smtClean="0">
+              <a:rPr lang="en-US">
                 <a:solidFill>
                   <a:srgbClr val="111111"/>
                 </a:solidFill>
@@ -2637,7 +2776,7 @@
           <a:p>
             <a:pPr lvl="1"/>
             <a:r>
-              <a:rPr lang="en-US" smtClean="0">
+              <a:rPr lang="en-US">
                 <a:solidFill>
                   <a:srgbClr val="111111"/>
                 </a:solidFill>
@@ -2648,7 +2787,7 @@
           <a:p>
             <a:pPr lvl="2"/>
             <a:r>
-              <a:rPr lang="en-US" smtClean="0">
+              <a:rPr lang="en-US">
                 <a:solidFill>
                   <a:srgbClr val="111111"/>
                 </a:solidFill>
@@ -2659,7 +2798,7 @@
           <a:p>
             <a:pPr lvl="3"/>
             <a:r>
-              <a:rPr lang="en-US" smtClean="0">
+              <a:rPr lang="en-US">
                 <a:solidFill>
                   <a:srgbClr val="111111"/>
                 </a:solidFill>
@@ -2670,14 +2809,13 @@
           <a:p>
             <a:pPr lvl="4"/>
             <a:r>
-              <a:rPr lang="en-US" smtClean="0">
+              <a:rPr lang="en-US">
                 <a:solidFill>
                   <a:srgbClr val="111111"/>
                 </a:solidFill>
               </a:rPr>
               <a:t>Fifth level</a:t>
             </a:r>
-            <a:endParaRPr lang="en-US"/>
           </a:p>
         </p:txBody>
       </p:sp>
@@ -2693,8 +2831,8 @@
         </p:nvSpPr>
         <p:spPr>
           <a:xfrm>
-            <a:off x="457200" y="1435100"/>
-            <a:ext cx="3008313" cy="4691063"/>
+            <a:off x="457201" y="1076326"/>
+            <a:ext cx="3008313" cy="3518297"/>
           </a:xfrm>
         </p:spPr>
         <p:txBody>
@@ -2702,71 +2840,71 @@
           <a:lstStyle>
             <a:lvl1pPr marL="0" indent="0">
               <a:buNone/>
-              <a:defRPr sz="1400">
+              <a:defRPr sz="1050">
                 <a:solidFill>
                   <a:srgbClr val="111111"/>
                 </a:solidFill>
               </a:defRPr>
             </a:lvl1pPr>
-            <a:lvl2pPr marL="457200" indent="0">
+            <a:lvl2pPr marL="342900" indent="0">
               <a:buNone/>
-              <a:defRPr sz="1200">
+              <a:defRPr sz="900">
                 <a:solidFill>
                   <a:srgbClr val="111111"/>
                 </a:solidFill>
               </a:defRPr>
             </a:lvl2pPr>
-            <a:lvl3pPr marL="914400" indent="0">
+            <a:lvl3pPr marL="685800" indent="0">
               <a:buNone/>
-              <a:defRPr sz="1000">
+              <a:defRPr sz="750">
                 <a:solidFill>
                   <a:srgbClr val="111111"/>
                 </a:solidFill>
               </a:defRPr>
             </a:lvl3pPr>
-            <a:lvl4pPr marL="1371600" indent="0">
+            <a:lvl4pPr marL="1028700" indent="0">
               <a:buNone/>
-              <a:defRPr sz="900">
+              <a:defRPr sz="675">
                 <a:solidFill>
                   <a:srgbClr val="111111"/>
                 </a:solidFill>
               </a:defRPr>
             </a:lvl4pPr>
-            <a:lvl5pPr marL="1828800" indent="0">
+            <a:lvl5pPr marL="1371600" indent="0">
               <a:buNone/>
-              <a:defRPr sz="900">
+              <a:defRPr sz="675">
                 <a:solidFill>
                   <a:srgbClr val="111111"/>
                 </a:solidFill>
               </a:defRPr>
             </a:lvl5pPr>
-            <a:lvl6pPr marL="2286000" indent="0">
+            <a:lvl6pPr marL="1714500" indent="0">
               <a:buNone/>
-              <a:defRPr sz="900">
+              <a:defRPr sz="675">
                 <a:solidFill>
                   <a:srgbClr val="111111"/>
                 </a:solidFill>
               </a:defRPr>
             </a:lvl6pPr>
-            <a:lvl7pPr marL="2743200" indent="0">
+            <a:lvl7pPr marL="2057400" indent="0">
               <a:buNone/>
-              <a:defRPr sz="900">
+              <a:defRPr sz="675">
                 <a:solidFill>
                   <a:srgbClr val="111111"/>
                 </a:solidFill>
               </a:defRPr>
             </a:lvl7pPr>
-            <a:lvl8pPr marL="3200400" indent="0">
+            <a:lvl8pPr marL="2400300" indent="0">
               <a:buNone/>
-              <a:defRPr sz="900">
+              <a:defRPr sz="675">
                 <a:solidFill>
                   <a:srgbClr val="111111"/>
                 </a:solidFill>
               </a:defRPr>
             </a:lvl8pPr>
-            <a:lvl9pPr marL="3657600" indent="0">
+            <a:lvl9pPr marL="2743200" indent="0">
               <a:buNone/>
-              <a:defRPr sz="900">
+              <a:defRPr sz="675">
                 <a:solidFill>
                   <a:srgbClr val="111111"/>
                 </a:solidFill>
@@ -2776,7 +2914,7 @@
           <a:p>
             <a:pPr lvl="0"/>
             <a:r>
-              <a:rPr lang="en-US" smtClean="0">
+              <a:rPr lang="en-US">
                 <a:solidFill>
                   <a:srgbClr val="111111"/>
                 </a:solidFill>
@@ -2801,15 +2939,19 @@
           <a:bodyPr/>
           <a:lstStyle/>
           <a:p>
-            <a:fld id="{5BCAD085-E8A6-8845-BD4E-CB4CCA059FC4}" type="datetimeFigureOut">
+            <a:fld id="{241EB5C9-1307-BA42-ABA2-0BC069CD8E7F}" type="datetimeFigureOut">
               <a:rPr lang="en-US" smtClean="0">
                 <a:solidFill>
                   <a:srgbClr val="111111"/>
                 </a:solidFill>
               </a:rPr>
-              <a:t>1/27/13</a:t>
+              <a:t>1/2/22</a:t>
             </a:fld>
-            <a:endParaRPr lang="en-US"/>
+            <a:endParaRPr lang="en-US">
+              <a:solidFill>
+                <a:srgbClr val="111111"/>
+              </a:solidFill>
+            </a:endParaRPr>
           </a:p>
         </p:txBody>
       </p:sp>
@@ -2828,7 +2970,11 @@
           <a:bodyPr/>
           <a:lstStyle/>
           <a:p>
-            <a:endParaRPr lang="en-US"/>
+            <a:endParaRPr lang="en-US">
+              <a:solidFill>
+                <a:srgbClr val="111111"/>
+              </a:solidFill>
+            </a:endParaRPr>
           </a:p>
         </p:txBody>
       </p:sp>
@@ -2847,7 +2993,7 @@
           <a:bodyPr/>
           <a:lstStyle/>
           <a:p>
-            <a:fld id="{C1FF6DA9-008F-8B48-92A6-B652298478BF}" type="slidenum">
+            <a:fld id="{C5EF2332-01BF-834F-8236-50238282D533}" type="slidenum">
               <a:rPr lang="en-US" smtClean="0">
                 <a:solidFill>
                   <a:srgbClr val="111111"/>
@@ -2855,14 +3001,18 @@
               </a:rPr>
               <a:t>‹#›</a:t>
             </a:fld>
-            <a:endParaRPr lang="en-US"/>
+            <a:endParaRPr lang="en-US">
+              <a:solidFill>
+                <a:srgbClr val="111111"/>
+              </a:solidFill>
+            </a:endParaRPr>
           </a:p>
         </p:txBody>
       </p:sp>
     </p:spTree>
     <p:extLst>
       <p:ext uri="{BB962C8B-B14F-4D97-AF65-F5344CB8AC3E}">
-        <p14:creationId xmlns:p14="http://schemas.microsoft.com/office/powerpoint/2010/main" val="1840726560"/>
+        <p14:creationId xmlns:p14="http://schemas.microsoft.com/office/powerpoint/2010/main" val="3540895647"/>
       </p:ext>
     </p:extLst>
   </p:cSld>
@@ -2901,15 +3051,15 @@
         </p:nvSpPr>
         <p:spPr>
           <a:xfrm>
-            <a:off x="1792288" y="4800600"/>
-            <a:ext cx="5486400" cy="566738"/>
+            <a:off x="1792288" y="3600450"/>
+            <a:ext cx="5486400" cy="425054"/>
           </a:xfrm>
         </p:spPr>
         <p:txBody>
           <a:bodyPr anchor="b"/>
           <a:lstStyle>
             <a:lvl1pPr algn="l">
-              <a:defRPr sz="2000" b="1">
+              <a:defRPr sz="1500" b="1">
                 <a:solidFill>
                   <a:srgbClr val="111111"/>
                 </a:solidFill>
@@ -2918,14 +3068,13 @@
           </a:lstStyle>
           <a:p>
             <a:r>
-              <a:rPr lang="en-US" smtClean="0">
+              <a:rPr lang="en-US">
                 <a:solidFill>
                   <a:srgbClr val="111111"/>
                 </a:solidFill>
               </a:rPr>
               <a:t>Click to edit Master title style</a:t>
             </a:r>
-            <a:endParaRPr lang="en-US"/>
           </a:p>
         </p:txBody>
       </p:sp>
@@ -2941,8 +3090,8 @@
         </p:nvSpPr>
         <p:spPr>
           <a:xfrm>
-            <a:off x="1792288" y="612775"/>
-            <a:ext cx="5486400" cy="4114800"/>
+            <a:off x="1792288" y="459581"/>
+            <a:ext cx="5486400" cy="3086100"/>
           </a:xfrm>
         </p:spPr>
         <p:txBody>
@@ -2950,71 +3099,71 @@
           <a:lstStyle>
             <a:lvl1pPr marL="0" indent="0">
               <a:buNone/>
-              <a:defRPr sz="3200">
+              <a:defRPr sz="2400">
                 <a:solidFill>
                   <a:srgbClr val="111111"/>
                 </a:solidFill>
               </a:defRPr>
             </a:lvl1pPr>
-            <a:lvl2pPr marL="457200" indent="0">
+            <a:lvl2pPr marL="342900" indent="0">
               <a:buNone/>
-              <a:defRPr sz="2800">
+              <a:defRPr sz="2100">
                 <a:solidFill>
                   <a:srgbClr val="111111"/>
                 </a:solidFill>
               </a:defRPr>
             </a:lvl2pPr>
-            <a:lvl3pPr marL="914400" indent="0">
+            <a:lvl3pPr marL="685800" indent="0">
               <a:buNone/>
-              <a:defRPr sz="2400">
+              <a:defRPr sz="1800">
                 <a:solidFill>
                   <a:srgbClr val="111111"/>
                 </a:solidFill>
               </a:defRPr>
             </a:lvl3pPr>
-            <a:lvl4pPr marL="1371600" indent="0">
+            <a:lvl4pPr marL="1028700" indent="0">
               <a:buNone/>
-              <a:defRPr sz="2000">
+              <a:defRPr sz="1500">
                 <a:solidFill>
                   <a:srgbClr val="111111"/>
                 </a:solidFill>
               </a:defRPr>
             </a:lvl4pPr>
-            <a:lvl5pPr marL="1828800" indent="0">
+            <a:lvl5pPr marL="1371600" indent="0">
               <a:buNone/>
-              <a:defRPr sz="2000">
+              <a:defRPr sz="1500">
                 <a:solidFill>
                   <a:srgbClr val="111111"/>
                 </a:solidFill>
               </a:defRPr>
             </a:lvl5pPr>
-            <a:lvl6pPr marL="2286000" indent="0">
+            <a:lvl6pPr marL="1714500" indent="0">
               <a:buNone/>
-              <a:defRPr sz="2000">
+              <a:defRPr sz="1500">
                 <a:solidFill>
                   <a:srgbClr val="111111"/>
                 </a:solidFill>
               </a:defRPr>
             </a:lvl6pPr>
-            <a:lvl7pPr marL="2743200" indent="0">
+            <a:lvl7pPr marL="2057400" indent="0">
               <a:buNone/>
-              <a:defRPr sz="2000">
+              <a:defRPr sz="1500">
                 <a:solidFill>
                   <a:srgbClr val="111111"/>
                 </a:solidFill>
               </a:defRPr>
             </a:lvl7pPr>
-            <a:lvl8pPr marL="3200400" indent="0">
+            <a:lvl8pPr marL="2400300" indent="0">
               <a:buNone/>
-              <a:defRPr sz="2000">
+              <a:defRPr sz="1500">
                 <a:solidFill>
                   <a:srgbClr val="111111"/>
                 </a:solidFill>
               </a:defRPr>
             </a:lvl8pPr>
-            <a:lvl9pPr marL="3657600" indent="0">
+            <a:lvl9pPr marL="2743200" indent="0">
               <a:buNone/>
-              <a:defRPr sz="2000">
+              <a:defRPr sz="1500">
                 <a:solidFill>
                   <a:srgbClr val="111111"/>
                 </a:solidFill>
@@ -3022,7 +3171,11 @@
             </a:lvl9pPr>
           </a:lstStyle>
           <a:p>
-            <a:endParaRPr lang="en-US"/>
+            <a:endParaRPr lang="en-US">
+              <a:solidFill>
+                <a:srgbClr val="111111"/>
+              </a:solidFill>
+            </a:endParaRPr>
           </a:p>
         </p:txBody>
       </p:sp>
@@ -3038,8 +3191,8 @@
         </p:nvSpPr>
         <p:spPr>
           <a:xfrm>
-            <a:off x="1792288" y="5367338"/>
-            <a:ext cx="5486400" cy="804862"/>
+            <a:off x="1792288" y="4025503"/>
+            <a:ext cx="5486400" cy="603647"/>
           </a:xfrm>
         </p:spPr>
         <p:txBody>
@@ -3047,71 +3200,71 @@
           <a:lstStyle>
             <a:lvl1pPr marL="0" indent="0">
               <a:buNone/>
-              <a:defRPr sz="1400">
+              <a:defRPr sz="1050">
                 <a:solidFill>
                   <a:srgbClr val="111111"/>
                 </a:solidFill>
               </a:defRPr>
             </a:lvl1pPr>
-            <a:lvl2pPr marL="457200" indent="0">
+            <a:lvl2pPr marL="342900" indent="0">
               <a:buNone/>
-              <a:defRPr sz="1200">
+              <a:defRPr sz="900">
                 <a:solidFill>
                   <a:srgbClr val="111111"/>
                 </a:solidFill>
               </a:defRPr>
             </a:lvl2pPr>
-            <a:lvl3pPr marL="914400" indent="0">
+            <a:lvl3pPr marL="685800" indent="0">
               <a:buNone/>
-              <a:defRPr sz="1000">
+              <a:defRPr sz="750">
                 <a:solidFill>
                   <a:srgbClr val="111111"/>
                 </a:solidFill>
               </a:defRPr>
             </a:lvl3pPr>
-            <a:lvl4pPr marL="1371600" indent="0">
+            <a:lvl4pPr marL="1028700" indent="0">
               <a:buNone/>
-              <a:defRPr sz="900">
+              <a:defRPr sz="675">
                 <a:solidFill>
                   <a:srgbClr val="111111"/>
                 </a:solidFill>
               </a:defRPr>
             </a:lvl4pPr>
-            <a:lvl5pPr marL="1828800" indent="0">
+            <a:lvl5pPr marL="1371600" indent="0">
               <a:buNone/>
-              <a:defRPr sz="900">
+              <a:defRPr sz="675">
                 <a:solidFill>
                   <a:srgbClr val="111111"/>
                 </a:solidFill>
               </a:defRPr>
             </a:lvl5pPr>
-            <a:lvl6pPr marL="2286000" indent="0">
+            <a:lvl6pPr marL="1714500" indent="0">
               <a:buNone/>
-              <a:defRPr sz="900">
+              <a:defRPr sz="675">
                 <a:solidFill>
                   <a:srgbClr val="111111"/>
                 </a:solidFill>
               </a:defRPr>
             </a:lvl6pPr>
-            <a:lvl7pPr marL="2743200" indent="0">
+            <a:lvl7pPr marL="2057400" indent="0">
               <a:buNone/>
-              <a:defRPr sz="900">
+              <a:defRPr sz="675">
                 <a:solidFill>
                   <a:srgbClr val="111111"/>
                 </a:solidFill>
               </a:defRPr>
             </a:lvl7pPr>
-            <a:lvl8pPr marL="3200400" indent="0">
+            <a:lvl8pPr marL="2400300" indent="0">
               <a:buNone/>
-              <a:defRPr sz="900">
+              <a:defRPr sz="675">
                 <a:solidFill>
                   <a:srgbClr val="111111"/>
                 </a:solidFill>
               </a:defRPr>
             </a:lvl8pPr>
-            <a:lvl9pPr marL="3657600" indent="0">
+            <a:lvl9pPr marL="2743200" indent="0">
               <a:buNone/>
-              <a:defRPr sz="900">
+              <a:defRPr sz="675">
                 <a:solidFill>
                   <a:srgbClr val="111111"/>
                 </a:solidFill>
@@ -3121,7 +3274,7 @@
           <a:p>
             <a:pPr lvl="0"/>
             <a:r>
-              <a:rPr lang="en-US" smtClean="0">
+              <a:rPr lang="en-US">
                 <a:solidFill>
                   <a:srgbClr val="111111"/>
                 </a:solidFill>
@@ -3146,15 +3299,19 @@
           <a:bodyPr/>
           <a:lstStyle/>
           <a:p>
-            <a:fld id="{5BCAD085-E8A6-8845-BD4E-CB4CCA059FC4}" type="datetimeFigureOut">
+            <a:fld id="{241EB5C9-1307-BA42-ABA2-0BC069CD8E7F}" type="datetimeFigureOut">
               <a:rPr lang="en-US" smtClean="0">
                 <a:solidFill>
                   <a:srgbClr val="111111"/>
                 </a:solidFill>
               </a:rPr>
-              <a:t>1/27/13</a:t>
+              <a:t>1/2/22</a:t>
             </a:fld>
-            <a:endParaRPr lang="en-US"/>
+            <a:endParaRPr lang="en-US">
+              <a:solidFill>
+                <a:srgbClr val="111111"/>
+              </a:solidFill>
+            </a:endParaRPr>
           </a:p>
         </p:txBody>
       </p:sp>
@@ -3173,7 +3330,11 @@
           <a:bodyPr/>
           <a:lstStyle/>
           <a:p>
-            <a:endParaRPr lang="en-US"/>
+            <a:endParaRPr lang="en-US">
+              <a:solidFill>
+                <a:srgbClr val="111111"/>
+              </a:solidFill>
+            </a:endParaRPr>
           </a:p>
         </p:txBody>
       </p:sp>
@@ -3192,7 +3353,7 @@
           <a:bodyPr/>
           <a:lstStyle/>
           <a:p>
-            <a:fld id="{C1FF6DA9-008F-8B48-92A6-B652298478BF}" type="slidenum">
+            <a:fld id="{C5EF2332-01BF-834F-8236-50238282D533}" type="slidenum">
               <a:rPr lang="en-US" smtClean="0">
                 <a:solidFill>
                   <a:srgbClr val="111111"/>
@@ -3200,14 +3361,18 @@
               </a:rPr>
               <a:t>‹#›</a:t>
             </a:fld>
-            <a:endParaRPr lang="en-US"/>
+            <a:endParaRPr lang="en-US">
+              <a:solidFill>
+                <a:srgbClr val="111111"/>
+              </a:solidFill>
+            </a:endParaRPr>
           </a:p>
         </p:txBody>
       </p:sp>
     </p:spTree>
     <p:extLst>
       <p:ext uri="{BB962C8B-B14F-4D97-AF65-F5344CB8AC3E}">
-        <p14:creationId xmlns:p14="http://schemas.microsoft.com/office/powerpoint/2010/main" val="3889236939"/>
+        <p14:creationId xmlns:p14="http://schemas.microsoft.com/office/powerpoint/2010/main" val="3566899855"/>
       </p:ext>
     </p:extLst>
   </p:cSld>
@@ -3221,12 +3386,9 @@
 <p:sldMaster xmlns:a="http://schemas.openxmlformats.org/drawingml/2006/main" xmlns:p="http://schemas.openxmlformats.org/presentationml/2006/main" xmlns:r="http://schemas.openxmlformats.org/officeDocument/2006/relationships">
   <p:cSld>
     <p:bg>
-      <p:bgPr>
-        <a:solidFill>
-          <a:srgbClr val="FFFFFF"/>
-        </a:solidFill>
-        <a:effectLst/>
-      </p:bgPr>
+      <p:bgRef idx="1001">
+        <a:schemeClr val="bg1"/>
+      </p:bgRef>
     </p:bg>
     <p:spTree>
       <p:nvGrpSpPr>
@@ -3254,8 +3416,8 @@
         </p:nvSpPr>
         <p:spPr>
           <a:xfrm>
-            <a:off x="457200" y="274638"/>
-            <a:ext cx="8229600" cy="1143000"/>
+            <a:off x="457200" y="205979"/>
+            <a:ext cx="8229600" cy="857250"/>
           </a:xfrm>
           <a:prstGeom prst="rect">
             <a:avLst/>
@@ -3268,14 +3430,13 @@
           <a:lstStyle/>
           <a:p>
             <a:r>
-              <a:rPr lang="en-US" smtClean="0">
+              <a:rPr lang="en-US">
                 <a:solidFill>
                   <a:srgbClr val="111111"/>
                 </a:solidFill>
               </a:rPr>
               <a:t>Click to edit Master title style</a:t>
             </a:r>
-            <a:endParaRPr lang="en-US"/>
           </a:p>
         </p:txBody>
       </p:sp>
@@ -3291,8 +3452,8 @@
         </p:nvSpPr>
         <p:spPr>
           <a:xfrm>
-            <a:off x="457200" y="1600200"/>
-            <a:ext cx="8229600" cy="4525963"/>
+            <a:off x="457200" y="1200151"/>
+            <a:ext cx="8229600" cy="3394472"/>
           </a:xfrm>
           <a:prstGeom prst="rect">
             <a:avLst/>
@@ -3306,7 +3467,7 @@
           <a:p>
             <a:pPr lvl="0"/>
             <a:r>
-              <a:rPr lang="en-US" smtClean="0">
+              <a:rPr lang="en-US">
                 <a:solidFill>
                   <a:srgbClr val="111111"/>
                 </a:solidFill>
@@ -3317,7 +3478,7 @@
           <a:p>
             <a:pPr lvl="1"/>
             <a:r>
-              <a:rPr lang="en-US" smtClean="0">
+              <a:rPr lang="en-US">
                 <a:solidFill>
                   <a:srgbClr val="111111"/>
                 </a:solidFill>
@@ -3328,7 +3489,7 @@
           <a:p>
             <a:pPr lvl="2"/>
             <a:r>
-              <a:rPr lang="en-US" smtClean="0">
+              <a:rPr lang="en-US">
                 <a:solidFill>
                   <a:srgbClr val="111111"/>
                 </a:solidFill>
@@ -3339,7 +3500,7 @@
           <a:p>
             <a:pPr lvl="3"/>
             <a:r>
-              <a:rPr lang="en-US" smtClean="0">
+              <a:rPr lang="en-US">
                 <a:solidFill>
                   <a:srgbClr val="111111"/>
                 </a:solidFill>
@@ -3350,14 +3511,13 @@
           <a:p>
             <a:pPr lvl="4"/>
             <a:r>
-              <a:rPr lang="en-US" smtClean="0">
+              <a:rPr lang="en-US">
                 <a:solidFill>
                   <a:srgbClr val="111111"/>
                 </a:solidFill>
               </a:rPr>
               <a:t>Fifth level</a:t>
             </a:r>
-            <a:endParaRPr lang="en-US"/>
           </a:p>
         </p:txBody>
       </p:sp>
@@ -3373,8 +3533,8 @@
         </p:nvSpPr>
         <p:spPr>
           <a:xfrm>
-            <a:off x="457200" y="6356350"/>
-            <a:ext cx="2133600" cy="365125"/>
+            <a:off x="457200" y="4767263"/>
+            <a:ext cx="2133600" cy="273844"/>
           </a:xfrm>
           <a:prstGeom prst="rect">
             <a:avLst/>
@@ -3384,7 +3544,7 @@
           <a:bodyPr anchor="ctr" bIns="45720" lIns="91440" rIns="91440" rtlCol="0" tIns="45720" vert="horz"/>
           <a:lstStyle>
             <a:lvl1pPr algn="l">
-              <a:defRPr sz="1200">
+              <a:defRPr sz="900">
                 <a:solidFill>
                   <a:srgbClr val="111111"/>
                 </a:solidFill>
@@ -3392,15 +3552,19 @@
             </a:lvl1pPr>
           </a:lstStyle>
           <a:p>
-            <a:fld id="{5BCAD085-E8A6-8845-BD4E-CB4CCA059FC4}" type="datetimeFigureOut">
+            <a:fld id="{241EB5C9-1307-BA42-ABA2-0BC069CD8E7F}" type="datetimeFigureOut">
               <a:rPr lang="en-US" smtClean="0">
                 <a:solidFill>
                   <a:srgbClr val="111111"/>
                 </a:solidFill>
               </a:rPr>
-              <a:t>1/27/13</a:t>
+              <a:t>1/2/22</a:t>
             </a:fld>
-            <a:endParaRPr lang="en-US"/>
+            <a:endParaRPr lang="en-US">
+              <a:solidFill>
+                <a:srgbClr val="111111"/>
+              </a:solidFill>
+            </a:endParaRPr>
           </a:p>
         </p:txBody>
       </p:sp>
@@ -3416,8 +3580,8 @@
         </p:nvSpPr>
         <p:spPr>
           <a:xfrm>
-            <a:off x="3124200" y="6356350"/>
-            <a:ext cx="2895600" cy="365125"/>
+            <a:off x="3124200" y="4767263"/>
+            <a:ext cx="2895600" cy="273844"/>
           </a:xfrm>
           <a:prstGeom prst="rect">
             <a:avLst/>
@@ -3427,7 +3591,7 @@
           <a:bodyPr anchor="ctr" bIns="45720" lIns="91440" rIns="91440" rtlCol="0" tIns="45720" vert="horz"/>
           <a:lstStyle>
             <a:lvl1pPr algn="ctr">
-              <a:defRPr sz="1200">
+              <a:defRPr sz="900">
                 <a:solidFill>
                   <a:srgbClr val="111111"/>
                 </a:solidFill>
@@ -3435,7 +3599,11 @@
             </a:lvl1pPr>
           </a:lstStyle>
           <a:p>
-            <a:endParaRPr lang="en-US"/>
+            <a:endParaRPr lang="en-US">
+              <a:solidFill>
+                <a:srgbClr val="111111"/>
+              </a:solidFill>
+            </a:endParaRPr>
           </a:p>
         </p:txBody>
       </p:sp>
@@ -3451,8 +3619,8 @@
         </p:nvSpPr>
         <p:spPr>
           <a:xfrm>
-            <a:off x="6553200" y="6356350"/>
-            <a:ext cx="2133600" cy="365125"/>
+            <a:off x="6553200" y="4767263"/>
+            <a:ext cx="2133600" cy="273844"/>
           </a:xfrm>
           <a:prstGeom prst="rect">
             <a:avLst/>
@@ -3462,7 +3630,7 @@
           <a:bodyPr anchor="ctr" bIns="45720" lIns="91440" rIns="91440" rtlCol="0" tIns="45720" vert="horz"/>
           <a:lstStyle>
             <a:lvl1pPr algn="r">
-              <a:defRPr sz="1200">
+              <a:defRPr sz="900">
                 <a:solidFill>
                   <a:srgbClr val="111111"/>
                 </a:solidFill>
@@ -3470,7 +3638,7 @@
             </a:lvl1pPr>
           </a:lstStyle>
           <a:p>
-            <a:fld id="{C1FF6DA9-008F-8B48-92A6-B652298478BF}" type="slidenum">
+            <a:fld id="{C5EF2332-01BF-834F-8236-50238282D533}" type="slidenum">
               <a:rPr lang="en-US" smtClean="0">
                 <a:solidFill>
                   <a:srgbClr val="111111"/>
@@ -3478,14 +3646,18 @@
               </a:rPr>
               <a:t>‹#›</a:t>
             </a:fld>
-            <a:endParaRPr lang="en-US"/>
+            <a:endParaRPr lang="en-US">
+              <a:solidFill>
+                <a:srgbClr val="111111"/>
+              </a:solidFill>
+            </a:endParaRPr>
           </a:p>
         </p:txBody>
       </p:sp>
     </p:spTree>
     <p:extLst>
       <p:ext uri="{BB962C8B-B14F-4D97-AF65-F5344CB8AC3E}">
-        <p14:creationId xmlns:p14="http://schemas.microsoft.com/office/powerpoint/2010/main" val="2209977519"/>
+        <p14:creationId xmlns:p14="http://schemas.microsoft.com/office/powerpoint/2010/main" val="3676200875"/>
       </p:ext>
     </p:extLst>
   </p:cSld>
@@ -3505,12 +3677,12 @@
   </p:sldLayoutIdLst>
   <p:txStyles>
     <p:titleStyle>
-      <a:lvl1pPr algn="ctr" defTabSz="457200" eaLnBrk="1" hangingPunct="1" latinLnBrk="0" rtl="0">
+      <a:lvl1pPr algn="ctr" defTabSz="342900" eaLnBrk="1" hangingPunct="1" latinLnBrk="0" rtl="0">
         <a:spcBef>
           <a:spcPct val="0"/>
         </a:spcBef>
         <a:buNone/>
-        <a:defRPr kern="1200" sz="4400">
+        <a:defRPr kern="1200" sz="3300">
           <a:latin typeface="Cambria"/>
           <a:ea typeface="+mj-ea"/>
           <a:cs typeface="+mj-cs"/>
@@ -3521,37 +3693,7 @@
       </a:lvl1pPr>
     </p:titleStyle>
     <p:bodyStyle>
-      <a:lvl1pPr algn="l" defTabSz="457200" eaLnBrk="1" hangingPunct="1" indent="-342900" latinLnBrk="0" marL="342900" rtl="0">
-        <a:spcBef>
-          <a:spcPct val="20000"/>
-        </a:spcBef>
-        <a:buFont typeface="Arial"/>
-        <a:buChar char="•"/>
-        <a:defRPr kern="1200" sz="3200">
-          <a:latin typeface="Cambria"/>
-          <a:ea typeface="+mn-ea"/>
-          <a:cs typeface="+mn-cs"/>
-          <a:solidFill>
-            <a:srgbClr val="111111"/>
-          </a:solidFill>
-        </a:defRPr>
-      </a:lvl1pPr>
-      <a:lvl2pPr algn="l" defTabSz="457200" eaLnBrk="1" hangingPunct="1" indent="-285750" latinLnBrk="0" marL="742950" rtl="0">
-        <a:spcBef>
-          <a:spcPct val="20000"/>
-        </a:spcBef>
-        <a:buFont typeface="Arial"/>
-        <a:buChar char="–"/>
-        <a:defRPr kern="1200" sz="2800">
-          <a:latin typeface="Cambria"/>
-          <a:ea typeface="+mn-ea"/>
-          <a:cs typeface="+mn-cs"/>
-          <a:solidFill>
-            <a:srgbClr val="111111"/>
-          </a:solidFill>
-        </a:defRPr>
-      </a:lvl2pPr>
-      <a:lvl3pPr algn="l" defTabSz="457200" eaLnBrk="1" hangingPunct="1" indent="-228600" latinLnBrk="0" marL="1143000" rtl="0">
+      <a:lvl1pPr algn="l" defTabSz="342900" eaLnBrk="1" hangingPunct="1" indent="-342900" latinLnBrk="0" marL="342900" rtl="0">
         <a:spcBef>
           <a:spcPct val="20000"/>
         </a:spcBef>
@@ -3565,14 +3707,44 @@
             <a:srgbClr val="111111"/>
           </a:solidFill>
         </a:defRPr>
-      </a:lvl3pPr>
-      <a:lvl4pPr algn="l" defTabSz="457200" eaLnBrk="1" hangingPunct="1" indent="-228600" latinLnBrk="0" marL="1600200" rtl="0">
+      </a:lvl1pPr>
+      <a:lvl2pPr algn="l" defTabSz="342900" eaLnBrk="1" hangingPunct="1" indent="-342900" latinLnBrk="0" marL="685800" rtl="0">
         <a:spcBef>
           <a:spcPct val="20000"/>
         </a:spcBef>
         <a:buFont typeface="Arial"/>
         <a:buChar char="–"/>
-        <a:defRPr kern="1200" sz="2000">
+        <a:defRPr kern="1200" sz="2100">
+          <a:latin typeface="Cambria"/>
+          <a:ea typeface="+mn-ea"/>
+          <a:cs typeface="+mn-cs"/>
+          <a:solidFill>
+            <a:srgbClr val="111111"/>
+          </a:solidFill>
+        </a:defRPr>
+      </a:lvl2pPr>
+      <a:lvl3pPr algn="l" defTabSz="342900" eaLnBrk="1" hangingPunct="1" indent="-342900" latinLnBrk="0" marL="1028700" rtl="0">
+        <a:spcBef>
+          <a:spcPct val="20000"/>
+        </a:spcBef>
+        <a:buFont typeface="Arial"/>
+        <a:buChar char="•"/>
+        <a:defRPr kern="1200" sz="1800">
+          <a:latin typeface="Cambria"/>
+          <a:ea typeface="+mn-ea"/>
+          <a:cs typeface="+mn-cs"/>
+          <a:solidFill>
+            <a:srgbClr val="111111"/>
+          </a:solidFill>
+        </a:defRPr>
+      </a:lvl3pPr>
+      <a:lvl4pPr algn="l" defTabSz="342900" eaLnBrk="1" hangingPunct="1" indent="-342900" latinLnBrk="0" marL="1371600" rtl="0">
+        <a:spcBef>
+          <a:spcPct val="20000"/>
+        </a:spcBef>
+        <a:buFont typeface="Arial"/>
+        <a:buChar char="–"/>
+        <a:defRPr kern="1200" sz="1500">
           <a:latin typeface="Cambria"/>
           <a:ea typeface="+mn-ea"/>
           <a:cs typeface="+mn-cs"/>
@@ -3581,13 +3753,13 @@
           </a:solidFill>
         </a:defRPr>
       </a:lvl4pPr>
-      <a:lvl5pPr algn="l" defTabSz="457200" eaLnBrk="1" hangingPunct="1" indent="-228600" latinLnBrk="0" marL="2057400" rtl="0">
+      <a:lvl5pPr algn="l" defTabSz="342900" eaLnBrk="1" hangingPunct="1" indent="-342900" latinLnBrk="0" marL="1714500" rtl="0">
         <a:spcBef>
           <a:spcPct val="20000"/>
         </a:spcBef>
         <a:buFont typeface="Arial"/>
         <a:buChar char="»"/>
-        <a:defRPr kern="1200" sz="2000">
+        <a:defRPr kern="1200" sz="1500">
           <a:latin typeface="Cambria"/>
           <a:ea typeface="+mn-ea"/>
           <a:cs typeface="+mn-cs"/>
@@ -3596,13 +3768,13 @@
           </a:solidFill>
         </a:defRPr>
       </a:lvl5pPr>
-      <a:lvl6pPr algn="l" defTabSz="457200" eaLnBrk="1" hangingPunct="1" indent="-228600" latinLnBrk="0" marL="2514600" rtl="0">
+      <a:lvl6pPr algn="l" defTabSz="342900" eaLnBrk="1" hangingPunct="1" indent="-342900" latinLnBrk="0" marL="2057400" rtl="0">
         <a:spcBef>
           <a:spcPct val="20000"/>
         </a:spcBef>
         <a:buFont typeface="Arial"/>
         <a:buChar char="•"/>
-        <a:defRPr kern="1200" sz="2000">
+        <a:defRPr kern="1200" sz="1500">
           <a:latin typeface="Cambria"/>
           <a:ea typeface="+mn-ea"/>
           <a:cs typeface="+mn-cs"/>
@@ -3611,13 +3783,13 @@
           </a:solidFill>
         </a:defRPr>
       </a:lvl6pPr>
-      <a:lvl7pPr algn="l" defTabSz="457200" eaLnBrk="1" hangingPunct="1" indent="-228600" latinLnBrk="0" marL="2971800" rtl="0">
+      <a:lvl7pPr algn="l" defTabSz="342900" eaLnBrk="1" hangingPunct="1" indent="-342900" latinLnBrk="0" marL="2400300" rtl="0">
         <a:spcBef>
           <a:spcPct val="20000"/>
         </a:spcBef>
         <a:buFont typeface="Arial"/>
         <a:buChar char="•"/>
-        <a:defRPr kern="1200" sz="2000">
+        <a:defRPr kern="1200" sz="1500">
           <a:latin typeface="Cambria"/>
           <a:ea typeface="+mn-ea"/>
           <a:cs typeface="+mn-cs"/>
@@ -3626,13 +3798,13 @@
           </a:solidFill>
         </a:defRPr>
       </a:lvl7pPr>
-      <a:lvl8pPr algn="l" defTabSz="457200" eaLnBrk="1" hangingPunct="1" indent="-228600" latinLnBrk="0" marL="3429000" rtl="0">
+      <a:lvl8pPr algn="l" defTabSz="342900" eaLnBrk="1" hangingPunct="1" indent="-342900" latinLnBrk="0" marL="2743200" rtl="0">
         <a:spcBef>
           <a:spcPct val="20000"/>
         </a:spcBef>
         <a:buFont typeface="Arial"/>
         <a:buChar char="•"/>
-        <a:defRPr kern="1200" sz="2000">
+        <a:defRPr kern="1200" sz="1500">
           <a:latin typeface="Cambria"/>
           <a:ea typeface="+mn-ea"/>
           <a:cs typeface="+mn-cs"/>
@@ -3641,13 +3813,13 @@
           </a:solidFill>
         </a:defRPr>
       </a:lvl8pPr>
-      <a:lvl9pPr algn="l" defTabSz="457200" eaLnBrk="1" hangingPunct="1" indent="-228600" latinLnBrk="0" marL="3886200" rtl="0">
+      <a:lvl9pPr algn="l" defTabSz="342900" eaLnBrk="1" hangingPunct="1" indent="-342900" latinLnBrk="0" marL="3086100" rtl="0">
         <a:spcBef>
           <a:spcPct val="20000"/>
         </a:spcBef>
         <a:buFont typeface="Arial"/>
         <a:buChar char="•"/>
-        <a:defRPr kern="1200" sz="2000">
+        <a:defRPr kern="1200" sz="1500">
           <a:latin typeface="Cambria"/>
           <a:ea typeface="+mn-ea"/>
           <a:cs typeface="+mn-cs"/>
@@ -3665,8 +3837,8 @@
           </a:solidFill>
         </a:defRPr>
       </a:defPPr>
-      <a:lvl1pPr algn="l" defTabSz="457200" eaLnBrk="1" hangingPunct="1" latinLnBrk="0" marL="0" rtl="0">
-        <a:defRPr kern="1200" sz="1800">
+      <a:lvl1pPr algn="l" defTabSz="342900" eaLnBrk="1" hangingPunct="1" latinLnBrk="0" marL="0" rtl="0">
+        <a:defRPr kern="1200" sz="1350">
           <a:latin typeface="Cambria"/>
           <a:ea typeface="+mn-ea"/>
           <a:cs typeface="+mn-cs"/>
@@ -3675,8 +3847,8 @@
           </a:solidFill>
         </a:defRPr>
       </a:lvl1pPr>
-      <a:lvl2pPr algn="l" defTabSz="457200" eaLnBrk="1" hangingPunct="1" latinLnBrk="0" marL="457200" rtl="0">
-        <a:defRPr kern="1200" sz="1800">
+      <a:lvl2pPr algn="l" defTabSz="342900" eaLnBrk="1" hangingPunct="1" latinLnBrk="0" marL="342900" rtl="0">
+        <a:defRPr kern="1200" sz="1350">
           <a:latin typeface="Cambria"/>
           <a:ea typeface="+mn-ea"/>
           <a:cs typeface="+mn-cs"/>
@@ -3685,8 +3857,8 @@
           </a:solidFill>
         </a:defRPr>
       </a:lvl2pPr>
-      <a:lvl3pPr algn="l" defTabSz="457200" eaLnBrk="1" hangingPunct="1" latinLnBrk="0" marL="914400" rtl="0">
-        <a:defRPr kern="1200" sz="1800">
+      <a:lvl3pPr algn="l" defTabSz="342900" eaLnBrk="1" hangingPunct="1" latinLnBrk="0" marL="685800" rtl="0">
+        <a:defRPr kern="1200" sz="1350">
           <a:latin typeface="Cambria"/>
           <a:ea typeface="+mn-ea"/>
           <a:cs typeface="+mn-cs"/>
@@ -3695,8 +3867,8 @@
           </a:solidFill>
         </a:defRPr>
       </a:lvl3pPr>
-      <a:lvl4pPr algn="l" defTabSz="457200" eaLnBrk="1" hangingPunct="1" latinLnBrk="0" marL="1371600" rtl="0">
-        <a:defRPr kern="1200" sz="1800">
+      <a:lvl4pPr algn="l" defTabSz="342900" eaLnBrk="1" hangingPunct="1" latinLnBrk="0" marL="1028700" rtl="0">
+        <a:defRPr kern="1200" sz="1350">
           <a:latin typeface="Cambria"/>
           <a:ea typeface="+mn-ea"/>
           <a:cs typeface="+mn-cs"/>
@@ -3705,8 +3877,8 @@
           </a:solidFill>
         </a:defRPr>
       </a:lvl4pPr>
-      <a:lvl5pPr algn="l" defTabSz="457200" eaLnBrk="1" hangingPunct="1" latinLnBrk="0" marL="1828800" rtl="0">
-        <a:defRPr kern="1200" sz="1800">
+      <a:lvl5pPr algn="l" defTabSz="342900" eaLnBrk="1" hangingPunct="1" latinLnBrk="0" marL="1371600" rtl="0">
+        <a:defRPr kern="1200" sz="1350">
           <a:latin typeface="Cambria"/>
           <a:ea typeface="+mn-ea"/>
           <a:cs typeface="+mn-cs"/>
@@ -3715,8 +3887,8 @@
           </a:solidFill>
         </a:defRPr>
       </a:lvl5pPr>
-      <a:lvl6pPr algn="l" defTabSz="457200" eaLnBrk="1" hangingPunct="1" latinLnBrk="0" marL="2286000" rtl="0">
-        <a:defRPr kern="1200" sz="1800">
+      <a:lvl6pPr algn="l" defTabSz="342900" eaLnBrk="1" hangingPunct="1" latinLnBrk="0" marL="1714500" rtl="0">
+        <a:defRPr kern="1200" sz="1350">
           <a:latin typeface="Cambria"/>
           <a:ea typeface="+mn-ea"/>
           <a:cs typeface="+mn-cs"/>
@@ -3725,8 +3897,8 @@
           </a:solidFill>
         </a:defRPr>
       </a:lvl6pPr>
-      <a:lvl7pPr algn="l" defTabSz="457200" eaLnBrk="1" hangingPunct="1" latinLnBrk="0" marL="2743200" rtl="0">
-        <a:defRPr kern="1200" sz="1800">
+      <a:lvl7pPr algn="l" defTabSz="342900" eaLnBrk="1" hangingPunct="1" latinLnBrk="0" marL="2057400" rtl="0">
+        <a:defRPr kern="1200" sz="1350">
           <a:latin typeface="Cambria"/>
           <a:ea typeface="+mn-ea"/>
           <a:cs typeface="+mn-cs"/>
@@ -3735,8 +3907,8 @@
           </a:solidFill>
         </a:defRPr>
       </a:lvl7pPr>
-      <a:lvl8pPr algn="l" defTabSz="457200" eaLnBrk="1" hangingPunct="1" latinLnBrk="0" marL="3200400" rtl="0">
-        <a:defRPr kern="1200" sz="1800">
+      <a:lvl8pPr algn="l" defTabSz="342900" eaLnBrk="1" hangingPunct="1" latinLnBrk="0" marL="2400300" rtl="0">
+        <a:defRPr kern="1200" sz="1350">
           <a:latin typeface="Cambria"/>
           <a:ea typeface="+mn-ea"/>
           <a:cs typeface="+mn-cs"/>
@@ -3745,8 +3917,8 @@
           </a:solidFill>
         </a:defRPr>
       </a:lvl8pPr>
-      <a:lvl9pPr algn="l" defTabSz="457200" eaLnBrk="1" hangingPunct="1" latinLnBrk="0" marL="3657600" rtl="0">
-        <a:defRPr kern="1200" sz="1800">
+      <a:lvl9pPr algn="l" defTabSz="342900" eaLnBrk="1" hangingPunct="1" latinLnBrk="0" marL="2743200" rtl="0">
+        <a:defRPr kern="1200" sz="1350">
           <a:latin typeface="Cambria"/>
           <a:ea typeface="+mn-ea"/>
           <a:cs typeface="+mn-cs"/>
@@ -3789,8 +3961,8 @@
         </p:nvSpPr>
         <p:spPr>
           <a:xfrm>
-            <a:off x="685800" y="2130425"/>
-            <a:ext cx="7772400" cy="1470025"/>
+            <a:off x="685800" y="1597819"/>
+            <a:ext cx="7772400" cy="1102519"/>
           </a:xfrm>
         </p:spPr>
         <p:txBody>
@@ -3819,8 +3991,8 @@
         </p:nvSpPr>
         <p:spPr>
           <a:xfrm>
-            <a:off x="1371600" y="3886200"/>
-            <a:ext cx="6400800" cy="1752600"/>
+            <a:off x="1371600" y="2914650"/>
+            <a:ext cx="6400800" cy="1314450"/>
           </a:xfrm>
         </p:spPr>
         <p:txBody>
@@ -6338,8 +6510,8 @@
           </p:nvPr>
         </p:nvGraphicFramePr>
         <p:xfrm>
-          <a:off x="457200" y="1600200"/>
-          <a:ext cx="8229600" cy="4521200"/>
+          <a:off x="457200" y="1193800"/>
+          <a:ext cx="8229600" cy="3390900"/>
         </p:xfrm>
         <a:graphic>
           <a:graphicData uri="http://schemas.openxmlformats.org/drawingml/2006/table">
@@ -6831,7 +7003,7 @@
           <a:bodyPr/>
           <a:lstStyle/>
           <a:p>
-            <a:pPr lvl="0" indent="-457200" marL="457200">
+            <a:pPr lvl="0" indent="-342900" marL="342900">
               <a:buAutoNum type="arabicPeriod"/>
             </a:pPr>
             <a:r>
@@ -6854,7 +7026,7 @@
             </a:r>
           </a:p>
           <a:p>
-            <a:pPr lvl="0" indent="-457200" marL="457200">
+            <a:pPr lvl="0" indent="-342900" marL="342900">
               <a:buAutoNum type="arabicPeriod"/>
             </a:pPr>
             <a:r>
@@ -6877,7 +7049,7 @@
             </a:r>
           </a:p>
           <a:p>
-            <a:pPr lvl="0" indent="-457200" marL="457200">
+            <a:pPr lvl="0" indent="-342900" marL="342900">
               <a:buAutoNum type="arabicPeriod"/>
             </a:pPr>
             <a:r>
@@ -6900,7 +7072,7 @@
             </a:r>
           </a:p>
           <a:p>
-            <a:pPr lvl="0" indent="-457200" marL="457200">
+            <a:pPr lvl="0" indent="-342900" marL="342900">
               <a:buAutoNum type="arabicPeriod"/>
             </a:pPr>
             <a:r>
@@ -6923,7 +7095,7 @@
             </a:r>
           </a:p>
           <a:p>
-            <a:pPr lvl="0" indent="-457200" marL="457200">
+            <a:pPr lvl="0" indent="-342900" marL="342900">
               <a:buAutoNum type="arabicPeriod"/>
             </a:pPr>
             <a:r>
@@ -6956,7 +7128,7 @@
             </a:r>
           </a:p>
           <a:p>
-            <a:pPr lvl="0" indent="-457200" marL="457200">
+            <a:pPr lvl="0" indent="-342900" marL="342900">
               <a:buAutoNum type="arabicPeriod"/>
             </a:pPr>
             <a:r>
@@ -11257,8 +11429,8 @@
         </p:nvSpPr>
         <p:spPr>
           <a:xfrm>
-            <a:off x="722313" y="4406900"/>
-            <a:ext cx="7772400" cy="1362075"/>
+            <a:off x="722313" y="3305176"/>
+            <a:ext cx="7772400" cy="1021556"/>
           </a:xfrm>
         </p:spPr>
         <p:txBody>
@@ -13144,8 +13316,8 @@
         </p:nvSpPr>
         <p:spPr>
           <a:xfrm>
-            <a:off x="722313" y="4406900"/>
-            <a:ext cx="7772400" cy="1362075"/>
+            <a:off x="722313" y="3305176"/>
+            <a:ext cx="7772400" cy="1021556"/>
           </a:xfrm>
         </p:spPr>
         <p:txBody>
@@ -13897,8 +14069,8 @@
         </p:nvSpPr>
         <p:spPr>
           <a:xfrm>
-            <a:off x="722313" y="4406900"/>
-            <a:ext cx="7772400" cy="1362075"/>
+            <a:off x="722313" y="3305176"/>
+            <a:ext cx="7772400" cy="1021556"/>
           </a:xfrm>
         </p:spPr>
         <p:txBody>
@@ -14252,7 +14424,7 @@
           <a:bodyPr/>
           <a:lstStyle/>
           <a:p>
-            <a:pPr lvl="0" indent="-457200" marL="457200">
+            <a:pPr lvl="0" indent="-342900" marL="342900">
               <a:buAutoNum type="arabicPeriod"/>
             </a:pPr>
             <a:r>
@@ -14275,7 +14447,7 @@
             </a:r>
           </a:p>
           <a:p>
-            <a:pPr lvl="0" indent="-457200" marL="457200">
+            <a:pPr lvl="0" indent="-342900" marL="342900">
               <a:buAutoNum type="arabicPeriod"/>
             </a:pPr>
             <a:r>
@@ -14360,8 +14532,8 @@
           </p:nvPr>
         </p:nvGraphicFramePr>
         <p:xfrm>
-          <a:off x="457200" y="1600200"/>
-          <a:ext cx="8229600" cy="4521200"/>
+          <a:off x="457200" y="1193800"/>
+          <a:ext cx="8229600" cy="3390900"/>
         </p:xfrm>
         <a:graphic>
           <a:graphicData uri="http://schemas.openxmlformats.org/drawingml/2006/table">
@@ -15279,8 +15451,8 @@
         </p:nvSpPr>
         <p:spPr>
           <a:xfrm>
-            <a:off x="722313" y="4406900"/>
-            <a:ext cx="7772400" cy="1362075"/>
+            <a:off x="722313" y="3305176"/>
+            <a:ext cx="7772400" cy="1021556"/>
           </a:xfrm>
         </p:spPr>
         <p:txBody>
@@ -15331,8 +15503,8 @@
         </p:nvSpPr>
         <p:spPr>
           <a:xfrm>
-            <a:off x="457200" y="273050"/>
-            <a:ext cx="3008313" cy="1162050"/>
+            <a:off x="457201" y="204787"/>
+            <a:ext cx="3008313" cy="871538"/>
           </a:xfrm>
         </p:spPr>
         <p:txBody>
@@ -15466,8 +15638,8 @@
           </p:nvPr>
         </p:nvGraphicFramePr>
         <p:xfrm>
-          <a:off x="3568700" y="266700"/>
-          <a:ext cx="5105400" cy="5842000"/>
+          <a:off x="3568700" y="203200"/>
+          <a:ext cx="5105400" cy="4381500"/>
         </p:xfrm>
         <a:graphic>
           <a:graphicData uri="http://schemas.openxmlformats.org/drawingml/2006/table">
@@ -17249,8 +17421,8 @@
           </p:nvPr>
         </p:nvGraphicFramePr>
         <p:xfrm>
-          <a:off x="457200" y="2171700"/>
-          <a:ext cx="4038600" cy="3949700"/>
+          <a:off x="457200" y="1625600"/>
+          <a:ext cx="4038600" cy="2959100"/>
         </p:xfrm>
         <a:graphic>
           <a:graphicData uri="http://schemas.openxmlformats.org/drawingml/2006/table">
@@ -17686,8 +17858,8 @@
           </p:nvPr>
         </p:nvGraphicFramePr>
         <p:xfrm>
-          <a:off x="4635500" y="2171700"/>
-          <a:ext cx="4038600" cy="3949700"/>
+          <a:off x="4635500" y="1625600"/>
+          <a:ext cx="4038600" cy="2959100"/>
         </p:xfrm>
         <a:graphic>
           <a:graphicData uri="http://schemas.openxmlformats.org/drawingml/2006/table">
